--- a/Mobile Security Test cases.pptx
+++ b/Mobile Security Test cases.pptx
@@ -9,6 +9,10 @@
     <p:sldId id="257" r:id="rId3"/>
     <p:sldId id="258" r:id="rId4"/>
     <p:sldId id="259" r:id="rId5"/>
+    <p:sldId id="260" r:id="rId6"/>
+    <p:sldId id="261" r:id="rId7"/>
+    <p:sldId id="262" r:id="rId8"/>
+    <p:sldId id="263" r:id="rId9"/>
   </p:sldIdLst>
   <p:sldSz cx="12192000" cy="6858000"/>
   <p:notesSz cx="6858000" cy="9144000"/>
@@ -3460,19 +3464,18 @@
         </p:nvSpPr>
         <p:spPr>
           <a:xfrm>
-            <a:off x="838200" y="1825625"/>
-            <a:ext cx="10515600" cy="4667250"/>
+            <a:off x="838200" y="1440493"/>
+            <a:ext cx="10515600" cy="5052382"/>
           </a:xfrm>
         </p:spPr>
         <p:txBody>
           <a:bodyPr>
-            <a:normAutofit fontScale="55000" lnSpcReduction="20000"/>
+            <a:normAutofit fontScale="40000" lnSpcReduction="20000"/>
           </a:bodyPr>
           <a:lstStyle/>
           <a:p>
-            <a:pPr>
-              <a:buFont typeface="Arial" panose="020B0604020202020204" pitchFamily="34" charset="0"/>
-              <a:buChar char="•"/>
+            <a:pPr marL="0" indent="0">
+              <a:buNone/>
             </a:pPr>
             <a:r>
               <a:rPr lang="en-US" b="1" dirty="0"/>
@@ -3484,9 +3487,8 @@
             </a:r>
           </a:p>
           <a:p>
-            <a:pPr>
-              <a:buFont typeface="Arial" panose="020B0604020202020204" pitchFamily="34" charset="0"/>
-              <a:buChar char="•"/>
+            <a:pPr marL="0" indent="0">
+              <a:buNone/>
             </a:pPr>
             <a:r>
               <a:rPr lang="en-US" b="1" dirty="0"/>
@@ -3498,14 +3500,19 @@
             </a:r>
           </a:p>
           <a:p>
-            <a:pPr>
-              <a:buFont typeface="Arial" panose="020B0604020202020204" pitchFamily="34" charset="0"/>
-              <a:buChar char="•"/>
+            <a:pPr marL="0" indent="0">
+              <a:buNone/>
             </a:pPr>
             <a:r>
               <a:rPr lang="en-US" b="1" dirty="0"/>
-              <a:t>Pre-conditions: </a:t>
-            </a:r>
+              <a:t>Pre-conditions:</a:t>
+            </a:r>
+          </a:p>
+          <a:p>
+            <a:pPr marL="514350" indent="-514350">
+              <a:buFont typeface="+mj-lt"/>
+              <a:buAutoNum type="arabicPeriod"/>
+            </a:pPr>
             <a:r>
               <a:rPr lang="en-US" dirty="0"/>
               <a:t>APK/AAB/IPA file uploaded to </a:t>
@@ -3516,7 +3523,17 @@
             </a:r>
             <a:r>
               <a:rPr lang="en-US" dirty="0"/>
-              <a:t>. Virtual device set up in </a:t>
+              <a:t>.</a:t>
+            </a:r>
+          </a:p>
+          <a:p>
+            <a:pPr marL="514350" indent="-514350">
+              <a:buFont typeface="+mj-lt"/>
+              <a:buAutoNum type="arabicPeriod"/>
+            </a:pPr>
+            <a:r>
+              <a:rPr lang="en-US" dirty="0"/>
+              <a:t>Virtual device set up in </a:t>
             </a:r>
             <a:r>
               <a:rPr lang="en-US" dirty="0" err="1"/>
@@ -3528,21 +3545,26 @@
             </a:r>
           </a:p>
           <a:p>
-            <a:pPr lvl="1">
+            <a:pPr marL="0" indent="0">
+              <a:buNone/>
+            </a:pPr>
+            <a:r>
+              <a:rPr lang="en-US" b="1" dirty="0"/>
+              <a:t>Steps:</a:t>
+            </a:r>
+          </a:p>
+          <a:p>
+            <a:pPr>
               <a:buFont typeface="+mj-lt"/>
               <a:buAutoNum type="arabicPeriod"/>
             </a:pPr>
             <a:r>
-              <a:rPr lang="en-US" b="1" dirty="0"/>
-              <a:t>Steps: </a:t>
-            </a:r>
-            <a:r>
               <a:rPr lang="en-US" dirty="0"/>
               <a:t>Install the app on the virtual device.</a:t>
             </a:r>
           </a:p>
           <a:p>
-            <a:pPr lvl="1">
+            <a:pPr>
               <a:buFont typeface="+mj-lt"/>
               <a:buAutoNum type="arabicPeriod"/>
             </a:pPr>
@@ -3552,7 +3574,7 @@
             </a:r>
           </a:p>
           <a:p>
-            <a:pPr lvl="1">
+            <a:pPr>
               <a:buFont typeface="+mj-lt"/>
               <a:buAutoNum type="arabicPeriod"/>
             </a:pPr>
@@ -3562,7 +3584,7 @@
             </a:r>
           </a:p>
           <a:p>
-            <a:pPr marL="1200150" lvl="2" indent="-285750">
+            <a:pPr marL="742950" lvl="1" indent="-285750">
               <a:buFont typeface="+mj-lt"/>
               <a:buAutoNum type="arabicPeriod"/>
             </a:pPr>
@@ -3572,7 +3594,7 @@
             </a:r>
           </a:p>
           <a:p>
-            <a:pPr marL="1200150" lvl="2" indent="-285750">
+            <a:pPr marL="742950" lvl="1" indent="-285750">
               <a:buFont typeface="+mj-lt"/>
               <a:buAutoNum type="arabicPeriod"/>
             </a:pPr>
@@ -3590,7 +3612,7 @@
             </a:r>
           </a:p>
           <a:p>
-            <a:pPr marL="1200150" lvl="2" indent="-285750">
+            <a:pPr marL="742950" lvl="1" indent="-285750">
               <a:buFont typeface="+mj-lt"/>
               <a:buAutoNum type="arabicPeriod"/>
             </a:pPr>
@@ -3600,7 +3622,7 @@
             </a:r>
           </a:p>
           <a:p>
-            <a:pPr lvl="1">
+            <a:pPr>
               <a:buFont typeface="+mj-lt"/>
               <a:buAutoNum type="arabicPeriod"/>
             </a:pPr>
@@ -3610,40 +3632,47 @@
             </a:r>
           </a:p>
           <a:p>
-            <a:pPr>
-              <a:buFont typeface="Arial" panose="020B0604020202020204" pitchFamily="34" charset="0"/>
-              <a:buChar char="•"/>
+            <a:pPr marL="0" indent="0">
+              <a:buNone/>
             </a:pPr>
             <a:r>
               <a:rPr lang="en-US" b="1" dirty="0"/>
-              <a:t>Expected Results: </a:t>
-            </a:r>
-          </a:p>
-          <a:p>
-            <a:pPr lvl="1"/>
+              <a:t>Expected Results:</a:t>
+            </a:r>
+          </a:p>
+          <a:p>
+            <a:pPr marL="514350" indent="-514350">
+              <a:buFont typeface="+mj-lt"/>
+              <a:buAutoNum type="arabicPeriod"/>
+            </a:pPr>
             <a:r>
               <a:rPr lang="en-US" dirty="0"/>
               <a:t>Strong password rules are enforced.</a:t>
             </a:r>
           </a:p>
           <a:p>
-            <a:pPr lvl="1"/>
+            <a:pPr marL="514350" indent="-514350">
+              <a:buFont typeface="+mj-lt"/>
+              <a:buAutoNum type="arabicPeriod"/>
+            </a:pPr>
             <a:r>
               <a:rPr lang="en-US" dirty="0"/>
               <a:t>Passwords are masked.</a:t>
             </a:r>
           </a:p>
           <a:p>
-            <a:pPr lvl="1"/>
+            <a:pPr marL="514350" indent="-514350">
+              <a:buFont typeface="+mj-lt"/>
+              <a:buAutoNum type="arabicPeriod"/>
+            </a:pPr>
             <a:r>
               <a:rPr lang="en-US" dirty="0"/>
               <a:t>Error messages do not expose sensitive details.</a:t>
             </a:r>
           </a:p>
           <a:p>
-            <a:pPr>
-              <a:buFont typeface="Arial" panose="020B0604020202020204" pitchFamily="34" charset="0"/>
-              <a:buChar char="•"/>
+            <a:pPr marL="0" indent="0">
+              <a:buNone/>
             </a:pPr>
             <a:r>
               <a:rPr lang="en-US" b="1" dirty="0"/>
@@ -3651,24 +3680,23 @@
             </a:r>
           </a:p>
           <a:p>
-            <a:pPr lvl="1"/>
-            <a:r>
-              <a:rPr lang="en-US" b="1" dirty="0"/>
-              <a:t>Example:  </a:t>
-            </a:r>
-          </a:p>
-          <a:p>
-            <a:pPr lvl="2"/>
+            <a:pPr marL="514350" indent="-514350">
+              <a:buFont typeface="+mj-lt"/>
+              <a:buAutoNum type="arabicPeriod"/>
+            </a:pPr>
             <a:r>
               <a:rPr lang="en-US" dirty="0"/>
-              <a:t>Weak passwords: e.g. "123456", "password".</a:t>
-            </a:r>
-          </a:p>
-          <a:p>
-            <a:pPr lvl="2"/>
+              <a:t>Weak passwords: "123456", "password".</a:t>
+            </a:r>
+          </a:p>
+          <a:p>
+            <a:pPr marL="514350" indent="-514350">
+              <a:buFont typeface="+mj-lt"/>
+              <a:buAutoNum type="arabicPeriod"/>
+            </a:pPr>
             <a:r>
               <a:rPr lang="en-US" dirty="0"/>
-              <a:t>Invalid email: e.g. "</a:t>
+              <a:t>Invalid email: "</a:t>
             </a:r>
             <a:r>
               <a:rPr lang="en-US" dirty="0" err="1"/>
@@ -3680,13 +3708,24 @@
             </a:r>
           </a:p>
           <a:p>
+            <a:pPr marL="0" indent="0">
+              <a:buNone/>
+            </a:pPr>
             <a:r>
               <a:rPr lang="en-US" b="1" dirty="0"/>
               <a:t>Test Environment:</a:t>
             </a:r>
             <a:r>
               <a:rPr lang="en-US" dirty="0"/>
-              <a:t> Corallium virtual device.</a:t>
+              <a:t> </a:t>
+            </a:r>
+            <a:r>
+              <a:rPr lang="en-US" dirty="0" err="1"/>
+              <a:t>Corellium</a:t>
+            </a:r>
+            <a:r>
+              <a:rPr lang="en-US" dirty="0"/>
+              <a:t> virtual device.</a:t>
             </a:r>
           </a:p>
         </p:txBody>
@@ -3795,10 +3834,11 @@
           </a:bodyPr>
           <a:lstStyle/>
           <a:p>
-            <a:pPr>
+            <a:pPr marL="0" indent="0">
               <a:lnSpc>
                 <a:spcPct val="80000"/>
               </a:lnSpc>
+              <a:buNone/>
             </a:pPr>
             <a:r>
               <a:rPr lang="en-US" sz="1500" b="1" dirty="0"/>
@@ -3810,6 +3850,9 @@
             </a:r>
           </a:p>
           <a:p>
+            <a:pPr marL="0" indent="0">
+              <a:buNone/>
+            </a:pPr>
             <a:r>
               <a:rPr lang="en-US" sz="1500" b="1" dirty="0"/>
               <a:t>Objective: </a:t>
@@ -3820,6 +3863,9 @@
             </a:r>
           </a:p>
           <a:p>
+            <a:pPr marL="0" indent="0">
+              <a:buNone/>
+            </a:pPr>
             <a:r>
               <a:rPr lang="en-US" sz="1500" b="1" dirty="0"/>
               <a:t>Pre-conditions</a:t>
@@ -3838,13 +3884,19 @@
             </a:r>
           </a:p>
           <a:p>
+            <a:pPr marL="0" indent="0">
+              <a:buNone/>
+            </a:pPr>
             <a:r>
               <a:rPr lang="en-US" sz="1500" b="1" dirty="0"/>
               <a:t>Steps:</a:t>
             </a:r>
           </a:p>
           <a:p>
-            <a:pPr lvl="1"/>
+            <a:pPr marL="800100" lvl="1" indent="-342900">
+              <a:buFont typeface="+mj-lt"/>
+              <a:buAutoNum type="arabicPeriod"/>
+            </a:pPr>
             <a:r>
               <a:rPr lang="en-US" sz="1500" dirty="0"/>
               <a:t> Launch the app on the </a:t>
@@ -3859,20 +3911,29 @@
             </a:r>
           </a:p>
           <a:p>
-            <a:pPr lvl="1"/>
+            <a:pPr marL="800100" lvl="1" indent="-342900">
+              <a:buFont typeface="+mj-lt"/>
+              <a:buAutoNum type="arabicPeriod"/>
+            </a:pPr>
             <a:r>
               <a:rPr lang="en-US" sz="1500" dirty="0"/>
               <a:t>Perform sensitive actions (e.g., login, registration).</a:t>
             </a:r>
           </a:p>
           <a:p>
-            <a:pPr lvl="1"/>
+            <a:pPr marL="800100" lvl="1" indent="-342900">
+              <a:buFont typeface="+mj-lt"/>
+              <a:buAutoNum type="arabicPeriod"/>
+            </a:pPr>
             <a:r>
               <a:rPr lang="en-US" sz="1500" dirty="0"/>
               <a:t>Monitor logs in real-time for sensitive data like passwords or API keys.</a:t>
             </a:r>
           </a:p>
           <a:p>
+            <a:pPr marL="0" indent="0">
+              <a:buNone/>
+            </a:pPr>
             <a:r>
               <a:rPr lang="en-US" sz="1500" b="1" dirty="0"/>
               <a:t>Expected Results: </a:t>
@@ -3883,6 +3944,9 @@
             </a:r>
           </a:p>
           <a:p>
+            <a:pPr marL="0" indent="0">
+              <a:buNone/>
+            </a:pPr>
             <a:r>
               <a:rPr lang="en-US" sz="1500" b="1" dirty="0"/>
               <a:t>Test Data</a:t>
@@ -3893,6 +3957,9 @@
             </a:r>
           </a:p>
           <a:p>
+            <a:pPr marL="0" indent="0">
+              <a:buNone/>
+            </a:pPr>
             <a:r>
               <a:rPr lang="en-US" sz="1500" b="1" dirty="0"/>
               <a:t>Test Environment</a:t>
@@ -3982,7 +4049,7 @@
                 <a:effectLst/>
                 <a:latin typeface="-webkit-standard"/>
               </a:rPr>
-              <a:t>Validate Secure Login Mechanism</a:t>
+              <a:t>Validate Session Timeout</a:t>
             </a:r>
             <a:endParaRPr lang="en-US" dirty="0"/>
           </a:p>
@@ -4016,119 +4083,130 @@
           </a:bodyPr>
           <a:lstStyle/>
           <a:p>
-            <a:pPr>
-              <a:lnSpc>
-                <a:spcPct val="80000"/>
-              </a:lnSpc>
+            <a:pPr marL="0" indent="0">
+              <a:buNone/>
             </a:pPr>
             <a:r>
               <a:rPr lang="en-US" sz="1500" b="1" dirty="0"/>
-              <a:t>Test Case ID: </a:t>
-            </a:r>
-            <a:r>
-              <a:rPr lang="en-US" sz="1500" dirty="0"/>
-              <a:t>TC-002</a:t>
-            </a:r>
-          </a:p>
-          <a:p>
+              <a:t>Test Case ID:</a:t>
+            </a:r>
+            <a:r>
+              <a:rPr lang="en-US" sz="1500" dirty="0"/>
+              <a:t> TC-003</a:t>
+            </a:r>
+          </a:p>
+          <a:p>
+            <a:pPr marL="0" indent="0">
+              <a:buNone/>
+            </a:pPr>
             <a:r>
               <a:rPr lang="en-US" sz="1500" b="1" dirty="0"/>
-              <a:t>Objective: </a:t>
-            </a:r>
-            <a:r>
-              <a:rPr lang="en-US" sz="1500" dirty="0"/>
-              <a:t>Ensure sensitive information is not logged during app operations.</a:t>
-            </a:r>
-          </a:p>
-          <a:p>
+              <a:t>Objective:</a:t>
+            </a:r>
+            <a:r>
+              <a:rPr lang="en-US" sz="1500" dirty="0"/>
+              <a:t> Ensure sessions expire after a set period of inactivity.</a:t>
+            </a:r>
+          </a:p>
+          <a:p>
+            <a:pPr marL="0" indent="0">
+              <a:buNone/>
+            </a:pPr>
             <a:r>
               <a:rPr lang="en-US" sz="1500" b="1" dirty="0"/>
-              <a:t>Pre-conditions</a:t>
-            </a:r>
-            <a:r>
-              <a:rPr lang="en-US" sz="1500" dirty="0"/>
-              <a:t>: </a:t>
-            </a:r>
-            <a:r>
-              <a:rPr lang="en-US" sz="1500" dirty="0" err="1"/>
-              <a:t>Corellium</a:t>
-            </a:r>
-            <a:r>
-              <a:rPr lang="en-US" sz="1500" dirty="0"/>
-              <a:t> console logs enabled.</a:t>
-            </a:r>
-          </a:p>
-          <a:p>
+              <a:t>Pre-conditions: </a:t>
+            </a:r>
+            <a:r>
+              <a:rPr lang="en-US" sz="1500" dirty="0"/>
+              <a:t>User logged in to the app.</a:t>
+            </a:r>
+          </a:p>
+          <a:p>
+            <a:pPr marL="0" indent="0">
+              <a:buNone/>
+            </a:pPr>
             <a:r>
               <a:rPr lang="en-US" sz="1500" b="1" dirty="0"/>
-              <a:t>Steps:</a:t>
-            </a:r>
-          </a:p>
-          <a:p>
-            <a:pPr lvl="1"/>
-            <a:r>
-              <a:rPr lang="en-US" sz="1500" dirty="0"/>
-              <a:t> Launch the app on the </a:t>
-            </a:r>
-            <a:r>
-              <a:rPr lang="en-US" sz="1500" dirty="0" err="1"/>
-              <a:t>Corellium</a:t>
-            </a:r>
-            <a:r>
-              <a:rPr lang="en-US" sz="1500" dirty="0"/>
-              <a:t> virtual device.</a:t>
-            </a:r>
-          </a:p>
-          <a:p>
-            <a:pPr lvl="1"/>
-            <a:r>
-              <a:rPr lang="en-US" sz="1500" dirty="0"/>
-              <a:t>Perform sensitive actions (e.g., login, registration).</a:t>
-            </a:r>
-          </a:p>
-          <a:p>
-            <a:pPr lvl="1"/>
-            <a:r>
-              <a:rPr lang="en-US" sz="1500" dirty="0"/>
-              <a:t>Monitor logs in real-time for sensitive data like passwords or API keys.</a:t>
-            </a:r>
-          </a:p>
-          <a:p>
+              <a:t>Steps: </a:t>
+            </a:r>
+            <a:r>
+              <a:rPr lang="en-US" sz="1500" dirty="0"/>
+              <a:t>Log in to the app.</a:t>
+            </a:r>
+          </a:p>
+          <a:p>
+            <a:pPr lvl="2">
+              <a:buFont typeface="+mj-lt"/>
+              <a:buAutoNum type="arabicPeriod"/>
+            </a:pPr>
+            <a:r>
+              <a:rPr lang="en-US" sz="1500" dirty="0"/>
+              <a:t>Stay idle for the session timeout period (e.g., 15 minutes).</a:t>
+            </a:r>
+          </a:p>
+          <a:p>
+            <a:pPr lvl="2">
+              <a:buFont typeface="+mj-lt"/>
+              <a:buAutoNum type="arabicPeriod"/>
+            </a:pPr>
+            <a:r>
+              <a:rPr lang="en-US" sz="1500" dirty="0"/>
+              <a:t>Attempt to interact with the app post-timeout.</a:t>
+            </a:r>
+          </a:p>
+          <a:p>
+            <a:pPr marL="0" indent="0">
+              <a:buNone/>
+            </a:pPr>
             <a:r>
               <a:rPr lang="en-US" sz="1500" b="1" dirty="0"/>
-              <a:t>Expected Results: </a:t>
-            </a:r>
-            <a:r>
-              <a:rPr lang="en-US" sz="1500" dirty="0"/>
-              <a:t>No sensitive data is logged.</a:t>
-            </a:r>
-          </a:p>
-          <a:p>
+              <a:t>Expected Results:</a:t>
+            </a:r>
+          </a:p>
+          <a:p>
+            <a:pPr marL="800100" lvl="1" indent="-342900">
+              <a:buFont typeface="+mj-lt"/>
+              <a:buAutoNum type="arabicPeriod"/>
+            </a:pPr>
+            <a:r>
+              <a:rPr lang="en-US" sz="1500" dirty="0"/>
+              <a:t>User is logged out.</a:t>
+            </a:r>
+          </a:p>
+          <a:p>
+            <a:pPr marL="800100" lvl="1" indent="-342900">
+              <a:buFont typeface="+mj-lt"/>
+              <a:buAutoNum type="arabicPeriod"/>
+            </a:pPr>
+            <a:r>
+              <a:rPr lang="en-US" sz="1500" dirty="0"/>
+              <a:t>Reauthentication is required to access sensitive data.</a:t>
+            </a:r>
+          </a:p>
+          <a:p>
+            <a:pPr marL="0" indent="0">
+              <a:buNone/>
+            </a:pPr>
             <a:r>
               <a:rPr lang="en-US" sz="1500" b="1" dirty="0"/>
-              <a:t>Test Data</a:t>
-            </a:r>
-            <a:r>
-              <a:rPr lang="en-US" sz="1500" dirty="0"/>
-              <a:t>: User credentials for login.</a:t>
-            </a:r>
-          </a:p>
-          <a:p>
+              <a:t>Test Data:</a:t>
+            </a:r>
+            <a:r>
+              <a:rPr lang="en-US" sz="1500" dirty="0"/>
+              <a:t> Active user session.</a:t>
+            </a:r>
+          </a:p>
+          <a:p>
+            <a:pPr marL="0" indent="0">
+              <a:buNone/>
+            </a:pPr>
             <a:r>
               <a:rPr lang="en-US" sz="1500" b="1" dirty="0"/>
-              <a:t>Test Environment</a:t>
-            </a:r>
-            <a:r>
-              <a:rPr lang="en-US" sz="1500" dirty="0"/>
-              <a:t>: </a:t>
-            </a:r>
-            <a:r>
-              <a:rPr lang="en-US" sz="1500" dirty="0" err="1"/>
-              <a:t>Corellium</a:t>
-            </a:r>
-            <a:r>
-              <a:rPr lang="en-US" sz="1500" dirty="0"/>
-              <a:t> with console logs active.</a:t>
+              <a:t>Test Environment:</a:t>
+            </a:r>
+            <a:r>
+              <a:rPr lang="en-US" sz="1500" dirty="0"/>
+              <a:t> Corallium virtual device.</a:t>
             </a:r>
           </a:p>
         </p:txBody>
@@ -4142,6 +4220,986 @@
   </p:cSld>
   <p:clrMapOvr>
     <a:overrideClrMapping bg1="lt1" tx1="dk1" bg2="lt2" tx2="dk2" accent1="accent1" accent2="accent2" accent3="accent3" accent4="accent4" accent5="accent5" accent6="accent6" hlink="hlink" folHlink="folHlink"/>
+  </p:clrMapOvr>
+</p:sld>
+</file>
+
+<file path=ppt/slides/slide5.xml><?xml version="1.0" encoding="utf-8"?>
+<p:sld xmlns:a="http://schemas.openxmlformats.org/drawingml/2006/main" xmlns:r="http://schemas.openxmlformats.org/officeDocument/2006/relationships" xmlns:p="http://schemas.openxmlformats.org/presentationml/2006/main">
+  <p:cSld>
+    <p:spTree>
+      <p:nvGrpSpPr>
+        <p:cNvPr id="1" name=""/>
+        <p:cNvGrpSpPr/>
+        <p:nvPr/>
+      </p:nvGrpSpPr>
+      <p:grpSpPr>
+        <a:xfrm>
+          <a:off x="0" y="0"/>
+          <a:ext cx="0" cy="0"/>
+          <a:chOff x="0" y="0"/>
+          <a:chExt cx="0" cy="0"/>
+        </a:xfrm>
+      </p:grpSpPr>
+      <p:sp>
+        <p:nvSpPr>
+          <p:cNvPr id="2" name="Title 1">
+            <a:extLst>
+              <a:ext uri="{FF2B5EF4-FFF2-40B4-BE49-F238E27FC236}">
+                <a16:creationId xmlns:a16="http://schemas.microsoft.com/office/drawing/2014/main" id="{D012EE35-FA44-D723-2A36-AF62E1495E74}"/>
+              </a:ext>
+            </a:extLst>
+          </p:cNvPr>
+          <p:cNvSpPr>
+            <a:spLocks noGrp="1"/>
+          </p:cNvSpPr>
+          <p:nvPr>
+            <p:ph type="title"/>
+          </p:nvPr>
+        </p:nvSpPr>
+        <p:spPr/>
+        <p:txBody>
+          <a:bodyPr/>
+          <a:lstStyle/>
+          <a:p>
+            <a:r>
+              <a:rPr lang="en-US" b="0" i="0" u="none" strike="noStrike" dirty="0">
+                <a:solidFill>
+                  <a:srgbClr val="000000"/>
+                </a:solidFill>
+                <a:effectLst/>
+                <a:latin typeface="-webkit-standard"/>
+              </a:rPr>
+              <a:t>Check for Hardcoded Sensitive Data</a:t>
+            </a:r>
+            <a:endParaRPr lang="en-US" dirty="0"/>
+          </a:p>
+        </p:txBody>
+      </p:sp>
+      <p:sp>
+        <p:nvSpPr>
+          <p:cNvPr id="3" name="Content Placeholder 2">
+            <a:extLst>
+              <a:ext uri="{FF2B5EF4-FFF2-40B4-BE49-F238E27FC236}">
+                <a16:creationId xmlns:a16="http://schemas.microsoft.com/office/drawing/2014/main" id="{06F1490B-0037-3258-EFA7-B2711861C9F7}"/>
+              </a:ext>
+            </a:extLst>
+          </p:cNvPr>
+          <p:cNvSpPr>
+            <a:spLocks noGrp="1"/>
+          </p:cNvSpPr>
+          <p:nvPr>
+            <p:ph idx="1"/>
+          </p:nvPr>
+        </p:nvSpPr>
+        <p:spPr/>
+        <p:txBody>
+          <a:bodyPr>
+            <a:normAutofit/>
+          </a:bodyPr>
+          <a:lstStyle/>
+          <a:p>
+            <a:pPr marL="0" indent="0">
+              <a:buNone/>
+            </a:pPr>
+            <a:r>
+              <a:rPr lang="en-US" sz="1500" b="1" dirty="0"/>
+              <a:t>Test Case ID:</a:t>
+            </a:r>
+            <a:r>
+              <a:rPr lang="en-US" sz="1500" dirty="0"/>
+              <a:t> TC-004</a:t>
+            </a:r>
+          </a:p>
+          <a:p>
+            <a:pPr marL="0" indent="0">
+              <a:buNone/>
+            </a:pPr>
+            <a:r>
+              <a:rPr lang="en-US" sz="1500" b="1" dirty="0"/>
+              <a:t>Objective:</a:t>
+            </a:r>
+            <a:r>
+              <a:rPr lang="en-US" sz="1500" dirty="0"/>
+              <a:t> Ensure sensitive data is not hardcoded in app files.</a:t>
+            </a:r>
+          </a:p>
+          <a:p>
+            <a:pPr marL="0" indent="0">
+              <a:buNone/>
+            </a:pPr>
+            <a:r>
+              <a:rPr lang="en-US" sz="1500" b="1" dirty="0" err="1"/>
+              <a:t>Pre-conditions:</a:t>
+            </a:r>
+            <a:r>
+              <a:rPr lang="en-US" sz="1500" dirty="0" err="1"/>
+              <a:t>Corellium</a:t>
+            </a:r>
+            <a:r>
+              <a:rPr lang="en-US" sz="1500" dirty="0"/>
+              <a:t> file system access enabled.</a:t>
+            </a:r>
+          </a:p>
+          <a:p>
+            <a:pPr marL="0" indent="0">
+              <a:buNone/>
+            </a:pPr>
+            <a:r>
+              <a:rPr lang="en-US" sz="1500" b="1" dirty="0"/>
+              <a:t>Steps:</a:t>
+            </a:r>
+          </a:p>
+          <a:p>
+            <a:pPr>
+              <a:buFont typeface="+mj-lt"/>
+              <a:buAutoNum type="arabicPeriod"/>
+            </a:pPr>
+            <a:r>
+              <a:rPr lang="en-US" sz="1500" dirty="0"/>
+              <a:t>Explore app directories using </a:t>
+            </a:r>
+            <a:r>
+              <a:rPr lang="en-US" sz="1500" dirty="0" err="1"/>
+              <a:t>Corellium’s</a:t>
+            </a:r>
+            <a:r>
+              <a:rPr lang="en-US" sz="1500" dirty="0"/>
+              <a:t> file explorer.</a:t>
+            </a:r>
+          </a:p>
+          <a:p>
+            <a:pPr>
+              <a:buFont typeface="+mj-lt"/>
+              <a:buAutoNum type="arabicPeriod"/>
+            </a:pPr>
+            <a:r>
+              <a:rPr lang="en-US" sz="1500" dirty="0"/>
+              <a:t>Search for hardcoded sensitive data in:</a:t>
+            </a:r>
+          </a:p>
+          <a:p>
+            <a:pPr marL="742950" lvl="1" indent="-285750">
+              <a:buFont typeface="+mj-lt"/>
+              <a:buAutoNum type="arabicPeriod"/>
+            </a:pPr>
+            <a:r>
+              <a:rPr lang="en-US" sz="1500" dirty="0"/>
+              <a:t>Configuration files.</a:t>
+            </a:r>
+          </a:p>
+          <a:p>
+            <a:pPr marL="742950" lvl="1" indent="-285750">
+              <a:buFont typeface="+mj-lt"/>
+              <a:buAutoNum type="arabicPeriod"/>
+            </a:pPr>
+            <a:r>
+              <a:rPr lang="en-US" sz="1500" dirty="0"/>
+              <a:t>Resource files (e.g., res/values/</a:t>
+            </a:r>
+            <a:r>
+              <a:rPr lang="en-US" sz="1500" dirty="0" err="1"/>
+              <a:t>strings.xml</a:t>
+            </a:r>
+            <a:r>
+              <a:rPr lang="en-US" sz="1500" dirty="0"/>
+              <a:t> on Android).</a:t>
+            </a:r>
+          </a:p>
+          <a:p>
+            <a:pPr>
+              <a:buFont typeface="+mj-lt"/>
+              <a:buAutoNum type="arabicPeriod"/>
+            </a:pPr>
+            <a:r>
+              <a:rPr lang="en-US" sz="1500" dirty="0"/>
+              <a:t>Trigger error conditions to check for sensitive data in crash reports.</a:t>
+            </a:r>
+          </a:p>
+          <a:p>
+            <a:pPr marL="0" indent="0">
+              <a:buNone/>
+            </a:pPr>
+            <a:r>
+              <a:rPr lang="en-US" sz="1500" b="1" dirty="0"/>
+              <a:t>Expected Results:</a:t>
+            </a:r>
+            <a:r>
+              <a:rPr lang="en-US" sz="1500" dirty="0"/>
+              <a:t> No sensitive data is hardcoded or exposed.</a:t>
+            </a:r>
+          </a:p>
+          <a:p>
+            <a:pPr marL="0" indent="0">
+              <a:buNone/>
+            </a:pPr>
+            <a:r>
+              <a:rPr lang="en-US" sz="1500" b="1" dirty="0"/>
+              <a:t>Test Data:</a:t>
+            </a:r>
+            <a:r>
+              <a:rPr lang="en-US" sz="1500" dirty="0"/>
+              <a:t> Not applicable.</a:t>
+            </a:r>
+          </a:p>
+          <a:p>
+            <a:pPr marL="0" indent="0">
+              <a:buNone/>
+            </a:pPr>
+            <a:r>
+              <a:rPr lang="en-US" sz="1500" b="1" dirty="0"/>
+              <a:t>Test Environment:</a:t>
+            </a:r>
+            <a:r>
+              <a:rPr lang="en-US" sz="1500" dirty="0"/>
+              <a:t> </a:t>
+            </a:r>
+            <a:r>
+              <a:rPr lang="en-US" sz="1500" dirty="0" err="1"/>
+              <a:t>Corellium</a:t>
+            </a:r>
+            <a:r>
+              <a:rPr lang="en-US" sz="1500" dirty="0"/>
+              <a:t> with file system access.</a:t>
+            </a:r>
+          </a:p>
+        </p:txBody>
+      </p:sp>
+    </p:spTree>
+    <p:extLst>
+      <p:ext uri="{BB962C8B-B14F-4D97-AF65-F5344CB8AC3E}">
+        <p14:creationId xmlns:p14="http://schemas.microsoft.com/office/powerpoint/2010/main" val="1737460901"/>
+      </p:ext>
+    </p:extLst>
+  </p:cSld>
+  <p:clrMapOvr>
+    <a:masterClrMapping/>
+  </p:clrMapOvr>
+</p:sld>
+</file>
+
+<file path=ppt/slides/slide6.xml><?xml version="1.0" encoding="utf-8"?>
+<p:sld xmlns:a="http://schemas.openxmlformats.org/drawingml/2006/main" xmlns:r="http://schemas.openxmlformats.org/officeDocument/2006/relationships" xmlns:p="http://schemas.openxmlformats.org/presentationml/2006/main">
+  <p:cSld>
+    <p:spTree>
+      <p:nvGrpSpPr>
+        <p:cNvPr id="1" name=""/>
+        <p:cNvGrpSpPr/>
+        <p:nvPr/>
+      </p:nvGrpSpPr>
+      <p:grpSpPr>
+        <a:xfrm>
+          <a:off x="0" y="0"/>
+          <a:ext cx="0" cy="0"/>
+          <a:chOff x="0" y="0"/>
+          <a:chExt cx="0" cy="0"/>
+        </a:xfrm>
+      </p:grpSpPr>
+      <p:sp>
+        <p:nvSpPr>
+          <p:cNvPr id="2" name="Title 1">
+            <a:extLst>
+              <a:ext uri="{FF2B5EF4-FFF2-40B4-BE49-F238E27FC236}">
+                <a16:creationId xmlns:a16="http://schemas.microsoft.com/office/drawing/2014/main" id="{65301F93-ED8F-AEFE-CC0B-0541F28A5B5C}"/>
+              </a:ext>
+            </a:extLst>
+          </p:cNvPr>
+          <p:cNvSpPr>
+            <a:spLocks noGrp="1"/>
+          </p:cNvSpPr>
+          <p:nvPr>
+            <p:ph type="title"/>
+          </p:nvPr>
+        </p:nvSpPr>
+        <p:spPr/>
+        <p:txBody>
+          <a:bodyPr/>
+          <a:lstStyle/>
+          <a:p>
+            <a:r>
+              <a:rPr lang="en-US" b="0" i="0" u="none" strike="noStrike" dirty="0">
+                <a:solidFill>
+                  <a:srgbClr val="000000"/>
+                </a:solidFill>
+                <a:effectLst/>
+                <a:latin typeface="-webkit-standard"/>
+              </a:rPr>
+              <a:t>Validate Secure Data Storage</a:t>
+            </a:r>
+            <a:endParaRPr lang="en-US" dirty="0"/>
+          </a:p>
+        </p:txBody>
+      </p:sp>
+      <p:sp>
+        <p:nvSpPr>
+          <p:cNvPr id="3" name="Content Placeholder 2">
+            <a:extLst>
+              <a:ext uri="{FF2B5EF4-FFF2-40B4-BE49-F238E27FC236}">
+                <a16:creationId xmlns:a16="http://schemas.microsoft.com/office/drawing/2014/main" id="{DF0BDEC4-D334-CADA-9B75-6323CD29649C}"/>
+              </a:ext>
+            </a:extLst>
+          </p:cNvPr>
+          <p:cNvSpPr>
+            <a:spLocks noGrp="1"/>
+          </p:cNvSpPr>
+          <p:nvPr>
+            <p:ph idx="1"/>
+          </p:nvPr>
+        </p:nvSpPr>
+        <p:spPr/>
+        <p:txBody>
+          <a:bodyPr>
+            <a:normAutofit/>
+          </a:bodyPr>
+          <a:lstStyle/>
+          <a:p>
+            <a:pPr marL="0" indent="0">
+              <a:buNone/>
+            </a:pPr>
+            <a:r>
+              <a:rPr lang="en-US" sz="1500" b="1" dirty="0"/>
+              <a:t>Test Case ID:</a:t>
+            </a:r>
+            <a:r>
+              <a:rPr lang="en-US" sz="1500" dirty="0"/>
+              <a:t> TC-005</a:t>
+            </a:r>
+          </a:p>
+          <a:p>
+            <a:pPr marL="0" indent="0">
+              <a:buNone/>
+            </a:pPr>
+            <a:r>
+              <a:rPr lang="en-US" sz="1500" b="1" dirty="0"/>
+              <a:t>Objective:</a:t>
+            </a:r>
+            <a:r>
+              <a:rPr lang="en-US" sz="1500" dirty="0"/>
+              <a:t> Ensure sensitive data is stored securely.</a:t>
+            </a:r>
+          </a:p>
+          <a:p>
+            <a:pPr marL="0" indent="0">
+              <a:buNone/>
+            </a:pPr>
+            <a:r>
+              <a:rPr lang="en-US" sz="1500" b="1" dirty="0" err="1"/>
+              <a:t>Pre-conditions:</a:t>
+            </a:r>
+            <a:r>
+              <a:rPr lang="en-US" sz="1500" dirty="0" err="1"/>
+              <a:t>App</a:t>
+            </a:r>
+            <a:r>
+              <a:rPr lang="en-US" sz="1500" dirty="0"/>
+              <a:t> installed and </a:t>
+            </a:r>
+            <a:r>
+              <a:rPr lang="en-US" sz="1500" dirty="0" err="1"/>
+              <a:t>Corellium</a:t>
+            </a:r>
+            <a:r>
+              <a:rPr lang="en-US" sz="1500" dirty="0"/>
+              <a:t> file explorer available.</a:t>
+            </a:r>
+          </a:p>
+          <a:p>
+            <a:pPr marL="0" indent="0">
+              <a:buNone/>
+            </a:pPr>
+            <a:r>
+              <a:rPr lang="en-US" sz="1500" b="1" dirty="0" err="1"/>
+              <a:t>Steps:</a:t>
+            </a:r>
+            <a:r>
+              <a:rPr lang="en-US" sz="1500" dirty="0" err="1"/>
+              <a:t>Perform</a:t>
+            </a:r>
+            <a:r>
+              <a:rPr lang="en-US" sz="1500" dirty="0"/>
+              <a:t> actions that generate sensitive data (e.g., login, payment).</a:t>
+            </a:r>
+          </a:p>
+          <a:p>
+            <a:pPr marL="342900" indent="-342900">
+              <a:buFont typeface="+mj-lt"/>
+              <a:buAutoNum type="arabicPeriod"/>
+            </a:pPr>
+            <a:r>
+              <a:rPr lang="en-US" sz="1500" dirty="0"/>
+              <a:t>Inspect storage locations (e.g., /data/data/&lt;</a:t>
+            </a:r>
+            <a:r>
+              <a:rPr lang="en-US" sz="1500" dirty="0" err="1"/>
+              <a:t>app_package_name</a:t>
+            </a:r>
+            <a:r>
+              <a:rPr lang="en-US" sz="1500" dirty="0"/>
+              <a:t>&gt;).</a:t>
+            </a:r>
+          </a:p>
+          <a:p>
+            <a:pPr marL="342900" indent="-342900">
+              <a:buFont typeface="+mj-lt"/>
+              <a:buAutoNum type="arabicPeriod"/>
+            </a:pPr>
+            <a:r>
+              <a:rPr lang="en-US" sz="1500" dirty="0"/>
+              <a:t>Check for encrypted storage of sensitive data.</a:t>
+            </a:r>
+          </a:p>
+          <a:p>
+            <a:pPr marL="0" indent="0">
+              <a:buNone/>
+            </a:pPr>
+            <a:r>
+              <a:rPr lang="en-US" sz="1500" b="1" dirty="0"/>
+              <a:t>Expected Results:</a:t>
+            </a:r>
+          </a:p>
+          <a:p>
+            <a:pPr marL="342900" indent="-342900">
+              <a:buFont typeface="+mj-lt"/>
+              <a:buAutoNum type="arabicPeriod"/>
+            </a:pPr>
+            <a:r>
+              <a:rPr lang="en-US" sz="1500" dirty="0"/>
+              <a:t>Sensitive data is encrypted or securely stored.</a:t>
+            </a:r>
+          </a:p>
+          <a:p>
+            <a:pPr marL="342900" indent="-342900">
+              <a:buFont typeface="+mj-lt"/>
+              <a:buAutoNum type="arabicPeriod"/>
+            </a:pPr>
+            <a:r>
+              <a:rPr lang="en-US" sz="1500" dirty="0"/>
+              <a:t>No plaintext storage of sensitive data.</a:t>
+            </a:r>
+          </a:p>
+          <a:p>
+            <a:pPr marL="0" indent="0">
+              <a:buNone/>
+            </a:pPr>
+            <a:r>
+              <a:rPr lang="en-US" sz="1500" b="1" dirty="0"/>
+              <a:t>Test Data:</a:t>
+            </a:r>
+            <a:r>
+              <a:rPr lang="en-US" sz="1500" dirty="0"/>
+              <a:t> User credentials, payment information.</a:t>
+            </a:r>
+          </a:p>
+          <a:p>
+            <a:pPr marL="0" indent="0">
+              <a:buNone/>
+            </a:pPr>
+            <a:r>
+              <a:rPr lang="en-US" sz="1500" b="1" dirty="0"/>
+              <a:t>Test Environment:</a:t>
+            </a:r>
+            <a:r>
+              <a:rPr lang="en-US" sz="1500" dirty="0"/>
+              <a:t> </a:t>
+            </a:r>
+            <a:r>
+              <a:rPr lang="en-US" sz="1500" dirty="0" err="1"/>
+              <a:t>Corellium</a:t>
+            </a:r>
+            <a:r>
+              <a:rPr lang="en-US" sz="1500" dirty="0"/>
+              <a:t> virtual device.</a:t>
+            </a:r>
+          </a:p>
+        </p:txBody>
+      </p:sp>
+    </p:spTree>
+    <p:extLst>
+      <p:ext uri="{BB962C8B-B14F-4D97-AF65-F5344CB8AC3E}">
+        <p14:creationId xmlns:p14="http://schemas.microsoft.com/office/powerpoint/2010/main" val="271266660"/>
+      </p:ext>
+    </p:extLst>
+  </p:cSld>
+  <p:clrMapOvr>
+    <a:masterClrMapping/>
+  </p:clrMapOvr>
+</p:sld>
+</file>
+
+<file path=ppt/slides/slide7.xml><?xml version="1.0" encoding="utf-8"?>
+<p:sld xmlns:a="http://schemas.openxmlformats.org/drawingml/2006/main" xmlns:r="http://schemas.openxmlformats.org/officeDocument/2006/relationships" xmlns:p="http://schemas.openxmlformats.org/presentationml/2006/main">
+  <p:cSld>
+    <p:spTree>
+      <p:nvGrpSpPr>
+        <p:cNvPr id="1" name=""/>
+        <p:cNvGrpSpPr/>
+        <p:nvPr/>
+      </p:nvGrpSpPr>
+      <p:grpSpPr>
+        <a:xfrm>
+          <a:off x="0" y="0"/>
+          <a:ext cx="0" cy="0"/>
+          <a:chOff x="0" y="0"/>
+          <a:chExt cx="0" cy="0"/>
+        </a:xfrm>
+      </p:grpSpPr>
+      <p:sp>
+        <p:nvSpPr>
+          <p:cNvPr id="2" name="Title 1">
+            <a:extLst>
+              <a:ext uri="{FF2B5EF4-FFF2-40B4-BE49-F238E27FC236}">
+                <a16:creationId xmlns:a16="http://schemas.microsoft.com/office/drawing/2014/main" id="{40A3CD2E-5201-7568-FC91-60522DD5CA29}"/>
+              </a:ext>
+            </a:extLst>
+          </p:cNvPr>
+          <p:cNvSpPr>
+            <a:spLocks noGrp="1"/>
+          </p:cNvSpPr>
+          <p:nvPr>
+            <p:ph type="title"/>
+          </p:nvPr>
+        </p:nvSpPr>
+        <p:spPr/>
+        <p:txBody>
+          <a:bodyPr/>
+          <a:lstStyle/>
+          <a:p>
+            <a:r>
+              <a:rPr lang="en-US" b="0" i="0" u="none" strike="noStrike" dirty="0">
+                <a:solidFill>
+                  <a:srgbClr val="000000"/>
+                </a:solidFill>
+                <a:effectLst/>
+                <a:latin typeface="-webkit-standard"/>
+              </a:rPr>
+              <a:t>Test Input Validation and Error Handling</a:t>
+            </a:r>
+            <a:endParaRPr lang="en-US" dirty="0"/>
+          </a:p>
+        </p:txBody>
+      </p:sp>
+      <p:sp>
+        <p:nvSpPr>
+          <p:cNvPr id="3" name="Content Placeholder 2">
+            <a:extLst>
+              <a:ext uri="{FF2B5EF4-FFF2-40B4-BE49-F238E27FC236}">
+                <a16:creationId xmlns:a16="http://schemas.microsoft.com/office/drawing/2014/main" id="{2D4EE5C3-6238-511E-19A8-091E5D9D5C6C}"/>
+              </a:ext>
+            </a:extLst>
+          </p:cNvPr>
+          <p:cNvSpPr>
+            <a:spLocks noGrp="1"/>
+          </p:cNvSpPr>
+          <p:nvPr>
+            <p:ph idx="1"/>
+          </p:nvPr>
+        </p:nvSpPr>
+        <p:spPr/>
+        <p:txBody>
+          <a:bodyPr>
+            <a:normAutofit/>
+          </a:bodyPr>
+          <a:lstStyle/>
+          <a:p>
+            <a:pPr marL="0" indent="0">
+              <a:buNone/>
+            </a:pPr>
+            <a:r>
+              <a:rPr lang="en-US" sz="1500" b="1" dirty="0"/>
+              <a:t>Test Case ID:</a:t>
+            </a:r>
+            <a:r>
+              <a:rPr lang="en-US" sz="1500" dirty="0"/>
+              <a:t> TC-006</a:t>
+            </a:r>
+          </a:p>
+          <a:p>
+            <a:pPr marL="0" indent="0">
+              <a:buNone/>
+            </a:pPr>
+            <a:r>
+              <a:rPr lang="en-US" sz="1500" b="1" dirty="0"/>
+              <a:t>Objective:</a:t>
+            </a:r>
+            <a:r>
+              <a:rPr lang="en-US" sz="1500" dirty="0"/>
+              <a:t> Ensure the app validates user input and handles errors gracefully.</a:t>
+            </a:r>
+          </a:p>
+          <a:p>
+            <a:pPr marL="0" indent="0">
+              <a:buNone/>
+            </a:pPr>
+            <a:r>
+              <a:rPr lang="en-US" sz="1500" b="1" dirty="0"/>
+              <a:t>Pre-conditions:</a:t>
+            </a:r>
+            <a:r>
+              <a:rPr lang="en-US" sz="1500" dirty="0"/>
+              <a:t> App installed and functional.</a:t>
+            </a:r>
+          </a:p>
+          <a:p>
+            <a:pPr marL="0" indent="0">
+              <a:buNone/>
+            </a:pPr>
+            <a:r>
+              <a:rPr lang="en-US" sz="1500" b="1" dirty="0"/>
+              <a:t>Steps:</a:t>
+            </a:r>
+          </a:p>
+          <a:p>
+            <a:pPr>
+              <a:buFont typeface="+mj-lt"/>
+              <a:buAutoNum type="arabicPeriod"/>
+            </a:pPr>
+            <a:r>
+              <a:rPr lang="en-US" sz="1500" dirty="0"/>
+              <a:t>Enter invalid data into input fields:</a:t>
+            </a:r>
+          </a:p>
+          <a:p>
+            <a:pPr marL="742950" lvl="1" indent="-285750">
+              <a:buFont typeface="+mj-lt"/>
+              <a:buAutoNum type="arabicPeriod"/>
+            </a:pPr>
+            <a:r>
+              <a:rPr lang="en-US" sz="1500" dirty="0"/>
+              <a:t>Special characters (e.g., &lt;&gt;!@#$%^&amp;*).</a:t>
+            </a:r>
+          </a:p>
+          <a:p>
+            <a:pPr marL="742950" lvl="1" indent="-285750">
+              <a:buFont typeface="+mj-lt"/>
+              <a:buAutoNum type="arabicPeriod"/>
+            </a:pPr>
+            <a:r>
+              <a:rPr lang="en-US" sz="1500" dirty="0"/>
+              <a:t>Long strings (e.g., 1,000 characters).</a:t>
+            </a:r>
+          </a:p>
+          <a:p>
+            <a:pPr>
+              <a:buFont typeface="+mj-lt"/>
+              <a:buAutoNum type="arabicPeriod"/>
+            </a:pPr>
+            <a:r>
+              <a:rPr lang="en-US" sz="1500" dirty="0"/>
+              <a:t>Observe app behavior.</a:t>
+            </a:r>
+          </a:p>
+          <a:p>
+            <a:pPr marL="0" indent="0">
+              <a:buNone/>
+            </a:pPr>
+            <a:r>
+              <a:rPr lang="en-US" sz="1500" b="1" dirty="0"/>
+              <a:t>Expected Results:</a:t>
+            </a:r>
+          </a:p>
+          <a:p>
+            <a:pPr marL="342900" indent="-342900">
+              <a:buFont typeface="+mj-lt"/>
+              <a:buAutoNum type="arabicPeriod"/>
+            </a:pPr>
+            <a:r>
+              <a:rPr lang="en-US" sz="1500" dirty="0"/>
+              <a:t>Inputs are validated.</a:t>
+            </a:r>
+          </a:p>
+          <a:p>
+            <a:pPr marL="342900" indent="-342900">
+              <a:buFont typeface="+mj-lt"/>
+              <a:buAutoNum type="arabicPeriod"/>
+            </a:pPr>
+            <a:r>
+              <a:rPr lang="en-US" sz="1500" dirty="0"/>
+              <a:t>App doesn’t crash or expose sensitive error messages.</a:t>
+            </a:r>
+          </a:p>
+          <a:p>
+            <a:pPr marL="0" indent="0">
+              <a:buNone/>
+            </a:pPr>
+            <a:r>
+              <a:rPr lang="en-US" sz="1500" b="1" dirty="0"/>
+              <a:t>Test Data:</a:t>
+            </a:r>
+            <a:r>
+              <a:rPr lang="en-US" sz="1500" dirty="0"/>
+              <a:t> Invalid inputs, long strings.</a:t>
+            </a:r>
+          </a:p>
+          <a:p>
+            <a:pPr marL="0" indent="0">
+              <a:buNone/>
+            </a:pPr>
+            <a:r>
+              <a:rPr lang="en-US" sz="1500" b="1" dirty="0"/>
+              <a:t>Test Environment:</a:t>
+            </a:r>
+            <a:r>
+              <a:rPr lang="en-US" sz="1500" dirty="0"/>
+              <a:t> </a:t>
+            </a:r>
+            <a:r>
+              <a:rPr lang="en-US" sz="1500" dirty="0" err="1"/>
+              <a:t>Corellium</a:t>
+            </a:r>
+            <a:r>
+              <a:rPr lang="en-US" sz="1500" dirty="0"/>
+              <a:t> virtual device.</a:t>
+            </a:r>
+          </a:p>
+        </p:txBody>
+      </p:sp>
+    </p:spTree>
+    <p:extLst>
+      <p:ext uri="{BB962C8B-B14F-4D97-AF65-F5344CB8AC3E}">
+        <p14:creationId xmlns:p14="http://schemas.microsoft.com/office/powerpoint/2010/main" val="4234553422"/>
+      </p:ext>
+    </p:extLst>
+  </p:cSld>
+  <p:clrMapOvr>
+    <a:masterClrMapping/>
+  </p:clrMapOvr>
+</p:sld>
+</file>
+
+<file path=ppt/slides/slide8.xml><?xml version="1.0" encoding="utf-8"?>
+<p:sld xmlns:a="http://schemas.openxmlformats.org/drawingml/2006/main" xmlns:r="http://schemas.openxmlformats.org/officeDocument/2006/relationships" xmlns:p="http://schemas.openxmlformats.org/presentationml/2006/main">
+  <p:cSld>
+    <p:spTree>
+      <p:nvGrpSpPr>
+        <p:cNvPr id="1" name=""/>
+        <p:cNvGrpSpPr/>
+        <p:nvPr/>
+      </p:nvGrpSpPr>
+      <p:grpSpPr>
+        <a:xfrm>
+          <a:off x="0" y="0"/>
+          <a:ext cx="0" cy="0"/>
+          <a:chOff x="0" y="0"/>
+          <a:chExt cx="0" cy="0"/>
+        </a:xfrm>
+      </p:grpSpPr>
+      <p:sp>
+        <p:nvSpPr>
+          <p:cNvPr id="2" name="Title 1">
+            <a:extLst>
+              <a:ext uri="{FF2B5EF4-FFF2-40B4-BE49-F238E27FC236}">
+                <a16:creationId xmlns:a16="http://schemas.microsoft.com/office/drawing/2014/main" id="{6395F70D-CD10-DEE9-BE21-894FC780EA61}"/>
+              </a:ext>
+            </a:extLst>
+          </p:cNvPr>
+          <p:cNvSpPr>
+            <a:spLocks noGrp="1"/>
+          </p:cNvSpPr>
+          <p:nvPr>
+            <p:ph type="title"/>
+          </p:nvPr>
+        </p:nvSpPr>
+        <p:spPr/>
+        <p:txBody>
+          <a:bodyPr/>
+          <a:lstStyle/>
+          <a:p>
+            <a:r>
+              <a:rPr lang="en-US" b="0" i="0" u="none" strike="noStrike" dirty="0">
+                <a:solidFill>
+                  <a:srgbClr val="000000"/>
+                </a:solidFill>
+                <a:effectLst/>
+                <a:latin typeface="-webkit-standard"/>
+              </a:rPr>
+              <a:t>Validate Secure App Updates</a:t>
+            </a:r>
+            <a:endParaRPr lang="en-US" dirty="0"/>
+          </a:p>
+        </p:txBody>
+      </p:sp>
+      <p:sp>
+        <p:nvSpPr>
+          <p:cNvPr id="3" name="Content Placeholder 2">
+            <a:extLst>
+              <a:ext uri="{FF2B5EF4-FFF2-40B4-BE49-F238E27FC236}">
+                <a16:creationId xmlns:a16="http://schemas.microsoft.com/office/drawing/2014/main" id="{12E2EA01-C5E7-B1AE-7E99-152049C0E3AB}"/>
+              </a:ext>
+            </a:extLst>
+          </p:cNvPr>
+          <p:cNvSpPr>
+            <a:spLocks noGrp="1"/>
+          </p:cNvSpPr>
+          <p:nvPr>
+            <p:ph idx="1"/>
+          </p:nvPr>
+        </p:nvSpPr>
+        <p:spPr/>
+        <p:txBody>
+          <a:bodyPr>
+            <a:normAutofit/>
+          </a:bodyPr>
+          <a:lstStyle/>
+          <a:p>
+            <a:pPr marL="0" indent="0">
+              <a:buNone/>
+            </a:pPr>
+            <a:r>
+              <a:rPr lang="en-US" sz="1500" b="1" dirty="0"/>
+              <a:t>Test Case ID:</a:t>
+            </a:r>
+            <a:r>
+              <a:rPr lang="en-US" sz="1500" dirty="0"/>
+              <a:t> TC-007</a:t>
+            </a:r>
+          </a:p>
+          <a:p>
+            <a:pPr marL="0" indent="0">
+              <a:buNone/>
+            </a:pPr>
+            <a:r>
+              <a:rPr lang="en-US" sz="1500" b="1" dirty="0"/>
+              <a:t>Objective:</a:t>
+            </a:r>
+            <a:r>
+              <a:rPr lang="en-US" sz="1500" dirty="0"/>
+              <a:t> Ensure app updates are secure.</a:t>
+            </a:r>
+          </a:p>
+          <a:p>
+            <a:pPr marL="0" indent="0">
+              <a:buNone/>
+            </a:pPr>
+            <a:r>
+              <a:rPr lang="en-US" sz="1500" b="1" dirty="0"/>
+              <a:t>Pre-conditions:</a:t>
+            </a:r>
+            <a:r>
+              <a:rPr lang="en-US" sz="1500" dirty="0"/>
+              <a:t> Older app version available.</a:t>
+            </a:r>
+          </a:p>
+          <a:p>
+            <a:pPr marL="0" indent="0">
+              <a:buNone/>
+            </a:pPr>
+            <a:r>
+              <a:rPr lang="en-US" sz="1500" b="1" dirty="0"/>
+              <a:t>Steps:</a:t>
+            </a:r>
+          </a:p>
+          <a:p>
+            <a:pPr>
+              <a:buFont typeface="+mj-lt"/>
+              <a:buAutoNum type="arabicPeriod"/>
+            </a:pPr>
+            <a:r>
+              <a:rPr lang="en-US" sz="1500" dirty="0"/>
+              <a:t>Install an older version of the app on </a:t>
+            </a:r>
+            <a:r>
+              <a:rPr lang="en-US" sz="1500" dirty="0" err="1"/>
+              <a:t>Corellium</a:t>
+            </a:r>
+            <a:r>
+              <a:rPr lang="en-US" sz="1500" dirty="0"/>
+              <a:t>.</a:t>
+            </a:r>
+          </a:p>
+          <a:p>
+            <a:pPr>
+              <a:buFont typeface="+mj-lt"/>
+              <a:buAutoNum type="arabicPeriod"/>
+            </a:pPr>
+            <a:r>
+              <a:rPr lang="en-US" sz="1500" dirty="0"/>
+              <a:t>Launch the app and check for update prompts.</a:t>
+            </a:r>
+          </a:p>
+          <a:p>
+            <a:pPr>
+              <a:buFont typeface="+mj-lt"/>
+              <a:buAutoNum type="arabicPeriod"/>
+            </a:pPr>
+            <a:r>
+              <a:rPr lang="en-US" sz="1500" dirty="0"/>
+              <a:t>Verify updates occur securely.</a:t>
+            </a:r>
+          </a:p>
+          <a:p>
+            <a:pPr marL="0" indent="0">
+              <a:buNone/>
+            </a:pPr>
+            <a:r>
+              <a:rPr lang="en-US" sz="1500" b="1" dirty="0"/>
+              <a:t>Expected Results:</a:t>
+            </a:r>
+          </a:p>
+          <a:p>
+            <a:pPr marL="342900" indent="-342900">
+              <a:buFont typeface="+mj-lt"/>
+              <a:buAutoNum type="arabicPeriod"/>
+            </a:pPr>
+            <a:r>
+              <a:rPr lang="en-US" sz="1500" dirty="0"/>
+              <a:t>App enforces updates.</a:t>
+            </a:r>
+          </a:p>
+          <a:p>
+            <a:pPr marL="342900" indent="-342900">
+              <a:buFont typeface="+mj-lt"/>
+              <a:buAutoNum type="arabicPeriod"/>
+            </a:pPr>
+            <a:r>
+              <a:rPr lang="en-US" sz="1500" dirty="0"/>
+              <a:t>Updates are delivered securely.</a:t>
+            </a:r>
+          </a:p>
+          <a:p>
+            <a:pPr marL="0" indent="0">
+              <a:buNone/>
+            </a:pPr>
+            <a:r>
+              <a:rPr lang="en-US" sz="1500" b="1" dirty="0"/>
+              <a:t>Test Data:</a:t>
+            </a:r>
+            <a:r>
+              <a:rPr lang="en-US" sz="1500" dirty="0"/>
+              <a:t> Old app version.</a:t>
+            </a:r>
+          </a:p>
+          <a:p>
+            <a:pPr marL="0" indent="0">
+              <a:buNone/>
+            </a:pPr>
+            <a:r>
+              <a:rPr lang="en-US" sz="1500" b="1" dirty="0"/>
+              <a:t>Test Environment:</a:t>
+            </a:r>
+            <a:r>
+              <a:rPr lang="en-US" sz="1500" dirty="0"/>
+              <a:t> </a:t>
+            </a:r>
+            <a:r>
+              <a:rPr lang="en-US" sz="1500" dirty="0" err="1"/>
+              <a:t>Corellium</a:t>
+            </a:r>
+            <a:r>
+              <a:rPr lang="en-US" sz="1500" dirty="0"/>
+              <a:t> virtual device.</a:t>
+            </a:r>
+          </a:p>
+        </p:txBody>
+      </p:sp>
+    </p:spTree>
+    <p:extLst>
+      <p:ext uri="{BB962C8B-B14F-4D97-AF65-F5344CB8AC3E}">
+        <p14:creationId xmlns:p14="http://schemas.microsoft.com/office/powerpoint/2010/main" val="63301169"/>
+      </p:ext>
+    </p:extLst>
+  </p:cSld>
+  <p:clrMapOvr>
+    <a:masterClrMapping/>
   </p:clrMapOvr>
 </p:sld>
 </file>

--- a/Mobile Security Test cases.pptx
+++ b/Mobile Security Test cases.pptx
@@ -4,6 +4,9 @@
   <p:sldMasterIdLst>
     <p:sldMasterId id="2147483648" r:id="rId1"/>
   </p:sldMasterIdLst>
+  <p:notesMasterIdLst>
+    <p:notesMasterId r:id="rId23"/>
+  </p:notesMasterIdLst>
   <p:sldIdLst>
     <p:sldId id="256" r:id="rId2"/>
     <p:sldId id="257" r:id="rId3"/>
@@ -13,6 +16,19 @@
     <p:sldId id="261" r:id="rId7"/>
     <p:sldId id="262" r:id="rId8"/>
     <p:sldId id="263" r:id="rId9"/>
+    <p:sldId id="269" r:id="rId10"/>
+    <p:sldId id="268" r:id="rId11"/>
+    <p:sldId id="267" r:id="rId12"/>
+    <p:sldId id="266" r:id="rId13"/>
+    <p:sldId id="265" r:id="rId14"/>
+    <p:sldId id="264" r:id="rId15"/>
+    <p:sldId id="270" r:id="rId16"/>
+    <p:sldId id="271" r:id="rId17"/>
+    <p:sldId id="272" r:id="rId18"/>
+    <p:sldId id="273" r:id="rId19"/>
+    <p:sldId id="274" r:id="rId20"/>
+    <p:sldId id="275" r:id="rId21"/>
+    <p:sldId id="276" r:id="rId22"/>
   </p:sldIdLst>
   <p:sldSz cx="12192000" cy="6858000"/>
   <p:notesSz cx="6858000" cy="9144000"/>
@@ -111,7 +127,445 @@
       </a:defRPr>
     </a:lvl9pPr>
   </p:defaultTextStyle>
+  <p:extLst>
+    <p:ext uri="{EFAFB233-063F-42B5-8137-9DF3F51BA10A}">
+      <p15:sldGuideLst xmlns:p15="http://schemas.microsoft.com/office/powerpoint/2012/main"/>
+    </p:ext>
+  </p:extLst>
 </p:presentation>
+</file>
+
+<file path=ppt/notesMasters/notesMaster1.xml><?xml version="1.0" encoding="utf-8"?>
+<p:notesMaster xmlns:a="http://schemas.openxmlformats.org/drawingml/2006/main" xmlns:r="http://schemas.openxmlformats.org/officeDocument/2006/relationships" xmlns:p="http://schemas.openxmlformats.org/presentationml/2006/main">
+  <p:cSld>
+    <p:bg>
+      <p:bgRef idx="1001">
+        <a:schemeClr val="bg1"/>
+      </p:bgRef>
+    </p:bg>
+    <p:spTree>
+      <p:nvGrpSpPr>
+        <p:cNvPr id="1" name=""/>
+        <p:cNvGrpSpPr/>
+        <p:nvPr/>
+      </p:nvGrpSpPr>
+      <p:grpSpPr>
+        <a:xfrm>
+          <a:off x="0" y="0"/>
+          <a:ext cx="0" cy="0"/>
+          <a:chOff x="0" y="0"/>
+          <a:chExt cx="0" cy="0"/>
+        </a:xfrm>
+      </p:grpSpPr>
+      <p:sp>
+        <p:nvSpPr>
+          <p:cNvPr id="2" name="Header Placeholder 1"/>
+          <p:cNvSpPr>
+            <a:spLocks noGrp="1"/>
+          </p:cNvSpPr>
+          <p:nvPr>
+            <p:ph type="hdr" sz="quarter"/>
+          </p:nvPr>
+        </p:nvSpPr>
+        <p:spPr>
+          <a:xfrm>
+            <a:off x="0" y="0"/>
+            <a:ext cx="2971800" cy="458788"/>
+          </a:xfrm>
+          <a:prstGeom prst="rect">
+            <a:avLst/>
+          </a:prstGeom>
+        </p:spPr>
+        <p:txBody>
+          <a:bodyPr vert="horz" lIns="91440" tIns="45720" rIns="91440" bIns="45720" rtlCol="0"/>
+          <a:lstStyle>
+            <a:lvl1pPr algn="l">
+              <a:defRPr sz="1200"/>
+            </a:lvl1pPr>
+          </a:lstStyle>
+          <a:p>
+            <a:endParaRPr lang="en-US"/>
+          </a:p>
+        </p:txBody>
+      </p:sp>
+      <p:sp>
+        <p:nvSpPr>
+          <p:cNvPr id="3" name="Date Placeholder 2"/>
+          <p:cNvSpPr>
+            <a:spLocks noGrp="1"/>
+          </p:cNvSpPr>
+          <p:nvPr>
+            <p:ph type="dt" idx="1"/>
+          </p:nvPr>
+        </p:nvSpPr>
+        <p:spPr>
+          <a:xfrm>
+            <a:off x="3884613" y="0"/>
+            <a:ext cx="2971800" cy="458788"/>
+          </a:xfrm>
+          <a:prstGeom prst="rect">
+            <a:avLst/>
+          </a:prstGeom>
+        </p:spPr>
+        <p:txBody>
+          <a:bodyPr vert="horz" lIns="91440" tIns="45720" rIns="91440" bIns="45720" rtlCol="0"/>
+          <a:lstStyle>
+            <a:lvl1pPr algn="r">
+              <a:defRPr sz="1200"/>
+            </a:lvl1pPr>
+          </a:lstStyle>
+          <a:p>
+            <a:fld id="{EB8213BD-09E6-C240-89B2-C4F920C1D95E}" type="datetimeFigureOut">
+              <a:rPr lang="en-US" smtClean="0"/>
+              <a:t>1/21/25</a:t>
+            </a:fld>
+            <a:endParaRPr lang="en-US"/>
+          </a:p>
+        </p:txBody>
+      </p:sp>
+      <p:sp>
+        <p:nvSpPr>
+          <p:cNvPr id="4" name="Slide Image Placeholder 3"/>
+          <p:cNvSpPr>
+            <a:spLocks noGrp="1" noRot="1" noChangeAspect="1"/>
+          </p:cNvSpPr>
+          <p:nvPr>
+            <p:ph type="sldImg" idx="2"/>
+          </p:nvPr>
+        </p:nvSpPr>
+        <p:spPr>
+          <a:xfrm>
+            <a:off x="685800" y="1143000"/>
+            <a:ext cx="5486400" cy="3086100"/>
+          </a:xfrm>
+          <a:prstGeom prst="rect">
+            <a:avLst/>
+          </a:prstGeom>
+          <a:noFill/>
+          <a:ln w="12700">
+            <a:solidFill>
+              <a:prstClr val="black"/>
+            </a:solidFill>
+          </a:ln>
+        </p:spPr>
+        <p:txBody>
+          <a:bodyPr vert="horz" lIns="91440" tIns="45720" rIns="91440" bIns="45720" rtlCol="0" anchor="ctr"/>
+          <a:lstStyle/>
+          <a:p>
+            <a:endParaRPr lang="en-US"/>
+          </a:p>
+        </p:txBody>
+      </p:sp>
+      <p:sp>
+        <p:nvSpPr>
+          <p:cNvPr id="5" name="Notes Placeholder 4"/>
+          <p:cNvSpPr>
+            <a:spLocks noGrp="1"/>
+          </p:cNvSpPr>
+          <p:nvPr>
+            <p:ph type="body" sz="quarter" idx="3"/>
+          </p:nvPr>
+        </p:nvSpPr>
+        <p:spPr>
+          <a:xfrm>
+            <a:off x="685800" y="4400550"/>
+            <a:ext cx="5486400" cy="3600450"/>
+          </a:xfrm>
+          <a:prstGeom prst="rect">
+            <a:avLst/>
+          </a:prstGeom>
+        </p:spPr>
+        <p:txBody>
+          <a:bodyPr vert="horz" lIns="91440" tIns="45720" rIns="91440" bIns="45720" rtlCol="0"/>
+          <a:lstStyle/>
+          <a:p>
+            <a:pPr lvl="0"/>
+            <a:r>
+              <a:rPr lang="en-US"/>
+              <a:t>Click to edit Master text styles</a:t>
+            </a:r>
+          </a:p>
+          <a:p>
+            <a:pPr lvl="1"/>
+            <a:r>
+              <a:rPr lang="en-US"/>
+              <a:t>Second level</a:t>
+            </a:r>
+          </a:p>
+          <a:p>
+            <a:pPr lvl="2"/>
+            <a:r>
+              <a:rPr lang="en-US"/>
+              <a:t>Third level</a:t>
+            </a:r>
+          </a:p>
+          <a:p>
+            <a:pPr lvl="3"/>
+            <a:r>
+              <a:rPr lang="en-US"/>
+              <a:t>Fourth level</a:t>
+            </a:r>
+          </a:p>
+          <a:p>
+            <a:pPr lvl="4"/>
+            <a:r>
+              <a:rPr lang="en-US"/>
+              <a:t>Fifth level</a:t>
+            </a:r>
+          </a:p>
+        </p:txBody>
+      </p:sp>
+      <p:sp>
+        <p:nvSpPr>
+          <p:cNvPr id="6" name="Footer Placeholder 5"/>
+          <p:cNvSpPr>
+            <a:spLocks noGrp="1"/>
+          </p:cNvSpPr>
+          <p:nvPr>
+            <p:ph type="ftr" sz="quarter" idx="4"/>
+          </p:nvPr>
+        </p:nvSpPr>
+        <p:spPr>
+          <a:xfrm>
+            <a:off x="0" y="8685213"/>
+            <a:ext cx="2971800" cy="458787"/>
+          </a:xfrm>
+          <a:prstGeom prst="rect">
+            <a:avLst/>
+          </a:prstGeom>
+        </p:spPr>
+        <p:txBody>
+          <a:bodyPr vert="horz" lIns="91440" tIns="45720" rIns="91440" bIns="45720" rtlCol="0" anchor="b"/>
+          <a:lstStyle>
+            <a:lvl1pPr algn="l">
+              <a:defRPr sz="1200"/>
+            </a:lvl1pPr>
+          </a:lstStyle>
+          <a:p>
+            <a:endParaRPr lang="en-US"/>
+          </a:p>
+        </p:txBody>
+      </p:sp>
+      <p:sp>
+        <p:nvSpPr>
+          <p:cNvPr id="7" name="Slide Number Placeholder 6"/>
+          <p:cNvSpPr>
+            <a:spLocks noGrp="1"/>
+          </p:cNvSpPr>
+          <p:nvPr>
+            <p:ph type="sldNum" sz="quarter" idx="5"/>
+          </p:nvPr>
+        </p:nvSpPr>
+        <p:spPr>
+          <a:xfrm>
+            <a:off x="3884613" y="8685213"/>
+            <a:ext cx="2971800" cy="458787"/>
+          </a:xfrm>
+          <a:prstGeom prst="rect">
+            <a:avLst/>
+          </a:prstGeom>
+        </p:spPr>
+        <p:txBody>
+          <a:bodyPr vert="horz" lIns="91440" tIns="45720" rIns="91440" bIns="45720" rtlCol="0" anchor="b"/>
+          <a:lstStyle>
+            <a:lvl1pPr algn="r">
+              <a:defRPr sz="1200"/>
+            </a:lvl1pPr>
+          </a:lstStyle>
+          <a:p>
+            <a:fld id="{EB5841B6-796A-FE43-BE43-D7853DEB0FBE}" type="slidenum">
+              <a:rPr lang="en-US" smtClean="0"/>
+              <a:t>‹#›</a:t>
+            </a:fld>
+            <a:endParaRPr lang="en-US"/>
+          </a:p>
+        </p:txBody>
+      </p:sp>
+    </p:spTree>
+    <p:extLst>
+      <p:ext uri="{BB962C8B-B14F-4D97-AF65-F5344CB8AC3E}">
+        <p14:creationId xmlns:p14="http://schemas.microsoft.com/office/powerpoint/2010/main" val="2979995615"/>
+      </p:ext>
+    </p:extLst>
+  </p:cSld>
+  <p:clrMap bg1="lt1" tx1="dk1" bg2="lt2" tx2="dk2" accent1="accent1" accent2="accent2" accent3="accent3" accent4="accent4" accent5="accent5" accent6="accent6" hlink="hlink" folHlink="folHlink"/>
+  <p:notesStyle>
+    <a:lvl1pPr marL="0" algn="l" defTabSz="914400" rtl="0" eaLnBrk="1" latinLnBrk="0" hangingPunct="1">
+      <a:defRPr sz="1200" kern="1200">
+        <a:solidFill>
+          <a:schemeClr val="tx1"/>
+        </a:solidFill>
+        <a:latin typeface="+mn-lt"/>
+        <a:ea typeface="+mn-ea"/>
+        <a:cs typeface="+mn-cs"/>
+      </a:defRPr>
+    </a:lvl1pPr>
+    <a:lvl2pPr marL="457200" algn="l" defTabSz="914400" rtl="0" eaLnBrk="1" latinLnBrk="0" hangingPunct="1">
+      <a:defRPr sz="1200" kern="1200">
+        <a:solidFill>
+          <a:schemeClr val="tx1"/>
+        </a:solidFill>
+        <a:latin typeface="+mn-lt"/>
+        <a:ea typeface="+mn-ea"/>
+        <a:cs typeface="+mn-cs"/>
+      </a:defRPr>
+    </a:lvl2pPr>
+    <a:lvl3pPr marL="914400" algn="l" defTabSz="914400" rtl="0" eaLnBrk="1" latinLnBrk="0" hangingPunct="1">
+      <a:defRPr sz="1200" kern="1200">
+        <a:solidFill>
+          <a:schemeClr val="tx1"/>
+        </a:solidFill>
+        <a:latin typeface="+mn-lt"/>
+        <a:ea typeface="+mn-ea"/>
+        <a:cs typeface="+mn-cs"/>
+      </a:defRPr>
+    </a:lvl3pPr>
+    <a:lvl4pPr marL="1371600" algn="l" defTabSz="914400" rtl="0" eaLnBrk="1" latinLnBrk="0" hangingPunct="1">
+      <a:defRPr sz="1200" kern="1200">
+        <a:solidFill>
+          <a:schemeClr val="tx1"/>
+        </a:solidFill>
+        <a:latin typeface="+mn-lt"/>
+        <a:ea typeface="+mn-ea"/>
+        <a:cs typeface="+mn-cs"/>
+      </a:defRPr>
+    </a:lvl4pPr>
+    <a:lvl5pPr marL="1828800" algn="l" defTabSz="914400" rtl="0" eaLnBrk="1" latinLnBrk="0" hangingPunct="1">
+      <a:defRPr sz="1200" kern="1200">
+        <a:solidFill>
+          <a:schemeClr val="tx1"/>
+        </a:solidFill>
+        <a:latin typeface="+mn-lt"/>
+        <a:ea typeface="+mn-ea"/>
+        <a:cs typeface="+mn-cs"/>
+      </a:defRPr>
+    </a:lvl5pPr>
+    <a:lvl6pPr marL="2286000" algn="l" defTabSz="914400" rtl="0" eaLnBrk="1" latinLnBrk="0" hangingPunct="1">
+      <a:defRPr sz="1200" kern="1200">
+        <a:solidFill>
+          <a:schemeClr val="tx1"/>
+        </a:solidFill>
+        <a:latin typeface="+mn-lt"/>
+        <a:ea typeface="+mn-ea"/>
+        <a:cs typeface="+mn-cs"/>
+      </a:defRPr>
+    </a:lvl6pPr>
+    <a:lvl7pPr marL="2743200" algn="l" defTabSz="914400" rtl="0" eaLnBrk="1" latinLnBrk="0" hangingPunct="1">
+      <a:defRPr sz="1200" kern="1200">
+        <a:solidFill>
+          <a:schemeClr val="tx1"/>
+        </a:solidFill>
+        <a:latin typeface="+mn-lt"/>
+        <a:ea typeface="+mn-ea"/>
+        <a:cs typeface="+mn-cs"/>
+      </a:defRPr>
+    </a:lvl7pPr>
+    <a:lvl8pPr marL="3200400" algn="l" defTabSz="914400" rtl="0" eaLnBrk="1" latinLnBrk="0" hangingPunct="1">
+      <a:defRPr sz="1200" kern="1200">
+        <a:solidFill>
+          <a:schemeClr val="tx1"/>
+        </a:solidFill>
+        <a:latin typeface="+mn-lt"/>
+        <a:ea typeface="+mn-ea"/>
+        <a:cs typeface="+mn-cs"/>
+      </a:defRPr>
+    </a:lvl8pPr>
+    <a:lvl9pPr marL="3657600" algn="l" defTabSz="914400" rtl="0" eaLnBrk="1" latinLnBrk="0" hangingPunct="1">
+      <a:defRPr sz="1200" kern="1200">
+        <a:solidFill>
+          <a:schemeClr val="tx1"/>
+        </a:solidFill>
+        <a:latin typeface="+mn-lt"/>
+        <a:ea typeface="+mn-ea"/>
+        <a:cs typeface="+mn-cs"/>
+      </a:defRPr>
+    </a:lvl9pPr>
+  </p:notesStyle>
+</p:notesMaster>
+</file>
+
+<file path=ppt/notesSlides/notesSlide1.xml><?xml version="1.0" encoding="utf-8"?>
+<p:notes xmlns:a="http://schemas.openxmlformats.org/drawingml/2006/main" xmlns:r="http://schemas.openxmlformats.org/officeDocument/2006/relationships" xmlns:p="http://schemas.openxmlformats.org/presentationml/2006/main">
+  <p:cSld>
+    <p:spTree>
+      <p:nvGrpSpPr>
+        <p:cNvPr id="1" name=""/>
+        <p:cNvGrpSpPr/>
+        <p:nvPr/>
+      </p:nvGrpSpPr>
+      <p:grpSpPr>
+        <a:xfrm>
+          <a:off x="0" y="0"/>
+          <a:ext cx="0" cy="0"/>
+          <a:chOff x="0" y="0"/>
+          <a:chExt cx="0" cy="0"/>
+        </a:xfrm>
+      </p:grpSpPr>
+      <p:sp>
+        <p:nvSpPr>
+          <p:cNvPr id="2" name="Slide Image Placeholder 1"/>
+          <p:cNvSpPr>
+            <a:spLocks noGrp="1" noRot="1" noChangeAspect="1"/>
+          </p:cNvSpPr>
+          <p:nvPr>
+            <p:ph type="sldImg"/>
+          </p:nvPr>
+        </p:nvSpPr>
+        <p:spPr/>
+      </p:sp>
+      <p:sp>
+        <p:nvSpPr>
+          <p:cNvPr id="3" name="Notes Placeholder 2"/>
+          <p:cNvSpPr>
+            <a:spLocks noGrp="1"/>
+          </p:cNvSpPr>
+          <p:nvPr>
+            <p:ph type="body" idx="1"/>
+          </p:nvPr>
+        </p:nvSpPr>
+        <p:spPr/>
+        <p:txBody>
+          <a:bodyPr/>
+          <a:lstStyle/>
+          <a:p>
+            <a:endParaRPr lang="en-US" dirty="0"/>
+          </a:p>
+        </p:txBody>
+      </p:sp>
+      <p:sp>
+        <p:nvSpPr>
+          <p:cNvPr id="4" name="Slide Number Placeholder 3"/>
+          <p:cNvSpPr>
+            <a:spLocks noGrp="1"/>
+          </p:cNvSpPr>
+          <p:nvPr>
+            <p:ph type="sldNum" sz="quarter" idx="5"/>
+          </p:nvPr>
+        </p:nvSpPr>
+        <p:spPr/>
+        <p:txBody>
+          <a:bodyPr/>
+          <a:lstStyle/>
+          <a:p>
+            <a:fld id="{EB5841B6-796A-FE43-BE43-D7853DEB0FBE}" type="slidenum">
+              <a:rPr lang="en-US" smtClean="0"/>
+              <a:t>14</a:t>
+            </a:fld>
+            <a:endParaRPr lang="en-US"/>
+          </a:p>
+        </p:txBody>
+      </p:sp>
+    </p:spTree>
+    <p:extLst>
+      <p:ext uri="{BB962C8B-B14F-4D97-AF65-F5344CB8AC3E}">
+        <p14:creationId xmlns:p14="http://schemas.microsoft.com/office/powerpoint/2010/main" val="654893191"/>
+      </p:ext>
+    </p:extLst>
+  </p:cSld>
+  <p:clrMapOvr>
+    <a:masterClrMapping/>
+  </p:clrMapOvr>
+</p:notes>
 </file>
 
 <file path=ppt/slideLayouts/slideLayout1.xml><?xml version="1.0" encoding="utf-8"?>
@@ -3394,6 +3848,4642 @@
 </p:sld>
 </file>
 
+<file path=ppt/slides/slide10.xml><?xml version="1.0" encoding="utf-8"?>
+<p:sld xmlns:a="http://schemas.openxmlformats.org/drawingml/2006/main" xmlns:r="http://schemas.openxmlformats.org/officeDocument/2006/relationships" xmlns:p="http://schemas.openxmlformats.org/presentationml/2006/main">
+  <p:cSld>
+    <p:spTree>
+      <p:nvGrpSpPr>
+        <p:cNvPr id="1" name=""/>
+        <p:cNvGrpSpPr/>
+        <p:nvPr/>
+      </p:nvGrpSpPr>
+      <p:grpSpPr>
+        <a:xfrm>
+          <a:off x="0" y="0"/>
+          <a:ext cx="0" cy="0"/>
+          <a:chOff x="0" y="0"/>
+          <a:chExt cx="0" cy="0"/>
+        </a:xfrm>
+      </p:grpSpPr>
+      <p:sp>
+        <p:nvSpPr>
+          <p:cNvPr id="2" name="Title 1">
+            <a:extLst>
+              <a:ext uri="{FF2B5EF4-FFF2-40B4-BE49-F238E27FC236}">
+                <a16:creationId xmlns:a16="http://schemas.microsoft.com/office/drawing/2014/main" id="{45D0979A-1568-A2F6-BAC9-F344BED0DD57}"/>
+              </a:ext>
+            </a:extLst>
+          </p:cNvPr>
+          <p:cNvSpPr>
+            <a:spLocks noGrp="1"/>
+          </p:cNvSpPr>
+          <p:nvPr>
+            <p:ph type="title"/>
+          </p:nvPr>
+        </p:nvSpPr>
+        <p:spPr/>
+        <p:txBody>
+          <a:bodyPr/>
+          <a:lstStyle/>
+          <a:p>
+            <a:r>
+              <a:rPr lang="en-US" b="0" i="0" u="none" strike="noStrike" dirty="0">
+                <a:solidFill>
+                  <a:srgbClr val="000000"/>
+                </a:solidFill>
+                <a:effectLst/>
+                <a:latin typeface="-webkit-standard"/>
+              </a:rPr>
+              <a:t>Validate Clipboard Data Handling</a:t>
+            </a:r>
+            <a:endParaRPr lang="en-US" dirty="0"/>
+          </a:p>
+        </p:txBody>
+      </p:sp>
+      <p:sp>
+        <p:nvSpPr>
+          <p:cNvPr id="3" name="Content Placeholder 2">
+            <a:extLst>
+              <a:ext uri="{FF2B5EF4-FFF2-40B4-BE49-F238E27FC236}">
+                <a16:creationId xmlns:a16="http://schemas.microsoft.com/office/drawing/2014/main" id="{1BA12E27-6A80-CEE9-7A9E-7B843DA89444}"/>
+              </a:ext>
+            </a:extLst>
+          </p:cNvPr>
+          <p:cNvSpPr>
+            <a:spLocks noGrp="1"/>
+          </p:cNvSpPr>
+          <p:nvPr>
+            <p:ph idx="1"/>
+          </p:nvPr>
+        </p:nvSpPr>
+        <p:spPr>
+          <a:xfrm>
+            <a:off x="838200" y="1412266"/>
+            <a:ext cx="10515600" cy="4351338"/>
+          </a:xfrm>
+        </p:spPr>
+        <p:txBody>
+          <a:bodyPr>
+            <a:normAutofit fontScale="25000" lnSpcReduction="20000"/>
+          </a:bodyPr>
+          <a:lstStyle/>
+          <a:p>
+            <a:pPr marL="0" indent="0" algn="l">
+              <a:buNone/>
+            </a:pPr>
+            <a:r>
+              <a:rPr lang="en-US" b="1" i="0" u="none" strike="noStrike" dirty="0">
+                <a:solidFill>
+                  <a:srgbClr val="000000"/>
+                </a:solidFill>
+                <a:effectLst/>
+              </a:rPr>
+              <a:t>Test Case ID: TC-009</a:t>
+            </a:r>
+          </a:p>
+          <a:p>
+            <a:pPr marL="0" indent="0" algn="l">
+              <a:buNone/>
+            </a:pPr>
+            <a:r>
+              <a:rPr lang="en-US" b="1" i="0" u="none" strike="noStrike" dirty="0">
+                <a:solidFill>
+                  <a:srgbClr val="000000"/>
+                </a:solidFill>
+                <a:effectLst/>
+              </a:rPr>
+              <a:t>Objective:</a:t>
+            </a:r>
+          </a:p>
+          <a:p>
+            <a:pPr marL="514350" indent="-514350" algn="l">
+              <a:buFont typeface="+mj-lt"/>
+              <a:buAutoNum type="arabicPeriod"/>
+            </a:pPr>
+            <a:r>
+              <a:rPr lang="en-US" b="0" i="0" u="none" strike="noStrike" dirty="0">
+                <a:solidFill>
+                  <a:srgbClr val="000000"/>
+                </a:solidFill>
+                <a:effectLst/>
+              </a:rPr>
+              <a:t>To ensure the app does not retain sensitive information (e.g., passwords or credit card numbers) in the clipboard, preventing potential data leakage.</a:t>
+            </a:r>
+          </a:p>
+          <a:p>
+            <a:pPr marL="0" indent="0" algn="l">
+              <a:buNone/>
+            </a:pPr>
+            <a:r>
+              <a:rPr lang="en-US" b="1" i="0" u="none" strike="noStrike" dirty="0">
+                <a:solidFill>
+                  <a:srgbClr val="000000"/>
+                </a:solidFill>
+                <a:effectLst/>
+              </a:rPr>
+              <a:t>Pre-conditions:</a:t>
+            </a:r>
+          </a:p>
+          <a:p>
+            <a:pPr algn="l">
+              <a:buFont typeface="+mj-lt"/>
+              <a:buAutoNum type="arabicPeriod"/>
+            </a:pPr>
+            <a:r>
+              <a:rPr lang="en-US" b="0" i="0" u="none" strike="noStrike" dirty="0">
+                <a:solidFill>
+                  <a:srgbClr val="000000"/>
+                </a:solidFill>
+                <a:effectLst/>
+              </a:rPr>
+              <a:t>APK/AAB/IPA file must be uploaded and installed on the </a:t>
+            </a:r>
+            <a:r>
+              <a:rPr lang="en-US" b="0" i="0" u="none" strike="noStrike" dirty="0" err="1">
+                <a:solidFill>
+                  <a:srgbClr val="000000"/>
+                </a:solidFill>
+                <a:effectLst/>
+              </a:rPr>
+              <a:t>Corellium</a:t>
+            </a:r>
+            <a:r>
+              <a:rPr lang="en-US" b="0" i="0" u="none" strike="noStrike" dirty="0">
+                <a:solidFill>
+                  <a:srgbClr val="000000"/>
+                </a:solidFill>
+                <a:effectLst/>
+              </a:rPr>
+              <a:t> virtual device.</a:t>
+            </a:r>
+          </a:p>
+          <a:p>
+            <a:pPr algn="l">
+              <a:buFont typeface="+mj-lt"/>
+              <a:buAutoNum type="arabicPeriod"/>
+            </a:pPr>
+            <a:r>
+              <a:rPr lang="en-US" b="0" i="0" u="none" strike="noStrike" dirty="0">
+                <a:solidFill>
+                  <a:srgbClr val="000000"/>
+                </a:solidFill>
+                <a:effectLst/>
+              </a:rPr>
+              <a:t>The app must contain fields where sensitive information can be entered (e.g., password fields, payment forms).</a:t>
+            </a:r>
+          </a:p>
+          <a:p>
+            <a:pPr algn="l">
+              <a:buFont typeface="+mj-lt"/>
+              <a:buAutoNum type="arabicPeriod"/>
+            </a:pPr>
+            <a:r>
+              <a:rPr lang="en-US" b="0" i="0" u="none" strike="noStrike" dirty="0">
+                <a:solidFill>
+                  <a:srgbClr val="000000"/>
+                </a:solidFill>
+                <a:effectLst/>
+              </a:rPr>
+              <a:t>Clipboard functionality is enabled on the </a:t>
+            </a:r>
+            <a:r>
+              <a:rPr lang="en-US" b="0" i="0" u="none" strike="noStrike" dirty="0" err="1">
+                <a:solidFill>
+                  <a:srgbClr val="000000"/>
+                </a:solidFill>
+                <a:effectLst/>
+              </a:rPr>
+              <a:t>Corellium</a:t>
+            </a:r>
+            <a:r>
+              <a:rPr lang="en-US" b="0" i="0" u="none" strike="noStrike" dirty="0">
+                <a:solidFill>
+                  <a:srgbClr val="000000"/>
+                </a:solidFill>
+                <a:effectLst/>
+              </a:rPr>
+              <a:t> virtual device.</a:t>
+            </a:r>
+          </a:p>
+          <a:p>
+            <a:pPr marL="0" indent="0" algn="l">
+              <a:buNone/>
+            </a:pPr>
+            <a:r>
+              <a:rPr lang="en-US" b="1" i="0" u="none" strike="noStrike" dirty="0">
+                <a:solidFill>
+                  <a:srgbClr val="000000"/>
+                </a:solidFill>
+                <a:effectLst/>
+              </a:rPr>
+              <a:t>Steps:</a:t>
+            </a:r>
+          </a:p>
+          <a:p>
+            <a:pPr algn="l">
+              <a:buFont typeface="+mj-lt"/>
+              <a:buAutoNum type="arabicPeriod"/>
+            </a:pPr>
+            <a:r>
+              <a:rPr lang="en-US" b="0" i="0" u="none" strike="noStrike" dirty="0">
+                <a:solidFill>
+                  <a:srgbClr val="000000"/>
+                </a:solidFill>
+                <a:effectLst/>
+              </a:rPr>
+              <a:t>Launch the app on the </a:t>
+            </a:r>
+            <a:r>
+              <a:rPr lang="en-US" b="0" i="0" u="none" strike="noStrike" dirty="0" err="1">
+                <a:solidFill>
+                  <a:srgbClr val="000000"/>
+                </a:solidFill>
+                <a:effectLst/>
+              </a:rPr>
+              <a:t>Corellium</a:t>
+            </a:r>
+            <a:r>
+              <a:rPr lang="en-US" b="0" i="0" u="none" strike="noStrike" dirty="0">
+                <a:solidFill>
+                  <a:srgbClr val="000000"/>
+                </a:solidFill>
+                <a:effectLst/>
+              </a:rPr>
+              <a:t> virtual device.</a:t>
+            </a:r>
+          </a:p>
+          <a:p>
+            <a:pPr algn="l">
+              <a:buFont typeface="+mj-lt"/>
+              <a:buAutoNum type="arabicPeriod"/>
+            </a:pPr>
+            <a:r>
+              <a:rPr lang="en-US" b="0" i="0" u="none" strike="noStrike" dirty="0">
+                <a:solidFill>
+                  <a:srgbClr val="000000"/>
+                </a:solidFill>
+                <a:effectLst/>
+              </a:rPr>
+              <a:t>Navigate to a field where sensitive information is entered (e.g., password or credit card fields).</a:t>
+            </a:r>
+          </a:p>
+          <a:p>
+            <a:pPr algn="l">
+              <a:buFont typeface="+mj-lt"/>
+              <a:buAutoNum type="arabicPeriod"/>
+            </a:pPr>
+            <a:r>
+              <a:rPr lang="en-US" b="0" i="0" u="none" strike="noStrike" dirty="0">
+                <a:solidFill>
+                  <a:srgbClr val="000000"/>
+                </a:solidFill>
+                <a:effectLst/>
+              </a:rPr>
+              <a:t>Enter sensitive data into the field and copy it to the clipboard.</a:t>
+            </a:r>
+          </a:p>
+          <a:p>
+            <a:pPr algn="l">
+              <a:buFont typeface="+mj-lt"/>
+              <a:buAutoNum type="arabicPeriod"/>
+            </a:pPr>
+            <a:r>
+              <a:rPr lang="en-US" b="0" i="0" u="none" strike="noStrike" dirty="0">
+                <a:solidFill>
+                  <a:srgbClr val="000000"/>
+                </a:solidFill>
+                <a:effectLst/>
+              </a:rPr>
+              <a:t>Switch to another app running on the </a:t>
+            </a:r>
+            <a:r>
+              <a:rPr lang="en-US" b="0" i="0" u="none" strike="noStrike" dirty="0" err="1">
+                <a:solidFill>
+                  <a:srgbClr val="000000"/>
+                </a:solidFill>
+                <a:effectLst/>
+              </a:rPr>
+              <a:t>Corellium</a:t>
+            </a:r>
+            <a:r>
+              <a:rPr lang="en-US" b="0" i="0" u="none" strike="noStrike" dirty="0">
+                <a:solidFill>
+                  <a:srgbClr val="000000"/>
+                </a:solidFill>
+                <a:effectLst/>
+              </a:rPr>
+              <a:t> virtual device.</a:t>
+            </a:r>
+          </a:p>
+          <a:p>
+            <a:pPr algn="l">
+              <a:buFont typeface="+mj-lt"/>
+              <a:buAutoNum type="arabicPeriod"/>
+            </a:pPr>
+            <a:r>
+              <a:rPr lang="en-US" b="0" i="0" u="none" strike="noStrike" dirty="0">
+                <a:solidFill>
+                  <a:srgbClr val="000000"/>
+                </a:solidFill>
+                <a:effectLst/>
+              </a:rPr>
+              <a:t>Paste the clipboard content into a text field in the other app.</a:t>
+            </a:r>
+          </a:p>
+          <a:p>
+            <a:pPr marL="0" indent="0" algn="l">
+              <a:buNone/>
+            </a:pPr>
+            <a:r>
+              <a:rPr lang="en-US" b="1" i="0" u="none" strike="noStrike" dirty="0">
+                <a:solidFill>
+                  <a:srgbClr val="000000"/>
+                </a:solidFill>
+                <a:effectLst/>
+              </a:rPr>
+              <a:t>Expected Results:</a:t>
+            </a:r>
+          </a:p>
+          <a:p>
+            <a:pPr algn="l">
+              <a:buFont typeface="+mj-lt"/>
+              <a:buAutoNum type="arabicPeriod"/>
+            </a:pPr>
+            <a:r>
+              <a:rPr lang="en-US" b="0" i="0" u="none" strike="noStrike" dirty="0">
+                <a:solidFill>
+                  <a:srgbClr val="000000"/>
+                </a:solidFill>
+                <a:effectLst/>
+              </a:rPr>
+              <a:t>Sensitive data (e.g., passwords, credit card numbers) should not remain in the clipboard after leaving the app.</a:t>
+            </a:r>
+          </a:p>
+          <a:p>
+            <a:pPr algn="l">
+              <a:buFont typeface="+mj-lt"/>
+              <a:buAutoNum type="arabicPeriod"/>
+            </a:pPr>
+            <a:r>
+              <a:rPr lang="en-US" b="0" i="0" u="none" strike="noStrike" dirty="0">
+                <a:solidFill>
+                  <a:srgbClr val="000000"/>
+                </a:solidFill>
+                <a:effectLst/>
+              </a:rPr>
+              <a:t>The clipboard should either be cleared or contain non-sensitive placeholder text.</a:t>
+            </a:r>
+          </a:p>
+          <a:p>
+            <a:pPr marL="0" indent="0" algn="l">
+              <a:buNone/>
+            </a:pPr>
+            <a:r>
+              <a:rPr lang="en-US" b="1" i="0" u="none" strike="noStrike" dirty="0">
+                <a:solidFill>
+                  <a:srgbClr val="000000"/>
+                </a:solidFill>
+                <a:effectLst/>
+              </a:rPr>
+              <a:t>Test Data:</a:t>
+            </a:r>
+          </a:p>
+          <a:p>
+            <a:pPr marL="514350" indent="-514350" algn="l">
+              <a:buFont typeface="+mj-lt"/>
+              <a:buAutoNum type="arabicPeriod"/>
+            </a:pPr>
+            <a:r>
+              <a:rPr lang="en-US" b="0" i="0" u="none" strike="noStrike" dirty="0">
+                <a:solidFill>
+                  <a:srgbClr val="000000"/>
+                </a:solidFill>
+                <a:effectLst/>
+              </a:rPr>
+              <a:t>Sample sensitive data, such as:</a:t>
+            </a:r>
+          </a:p>
+          <a:p>
+            <a:pPr marL="742950" lvl="1" indent="-285750" algn="l">
+              <a:buFont typeface="Arial" panose="020B0604020202020204" pitchFamily="34" charset="0"/>
+              <a:buChar char="•"/>
+            </a:pPr>
+            <a:r>
+              <a:rPr lang="en-US" b="0" i="0" u="none" strike="noStrike" dirty="0">
+                <a:solidFill>
+                  <a:srgbClr val="000000"/>
+                </a:solidFill>
+                <a:effectLst/>
+              </a:rPr>
+              <a:t>Password: Test@1234</a:t>
+            </a:r>
+          </a:p>
+          <a:p>
+            <a:pPr marL="742950" lvl="1" indent="-285750" algn="l">
+              <a:buFont typeface="Arial" panose="020B0604020202020204" pitchFamily="34" charset="0"/>
+              <a:buChar char="•"/>
+            </a:pPr>
+            <a:r>
+              <a:rPr lang="en-US" b="0" i="0" u="none" strike="noStrike" dirty="0">
+                <a:solidFill>
+                  <a:srgbClr val="000000"/>
+                </a:solidFill>
+                <a:effectLst/>
+              </a:rPr>
+              <a:t>Credit Card: 4111 1111 1111 1111</a:t>
+            </a:r>
+          </a:p>
+          <a:p>
+            <a:pPr marL="0" indent="0" algn="l">
+              <a:buNone/>
+            </a:pPr>
+            <a:r>
+              <a:rPr lang="en-US" b="1" i="0" u="none" strike="noStrike" dirty="0">
+                <a:solidFill>
+                  <a:srgbClr val="000000"/>
+                </a:solidFill>
+                <a:effectLst/>
+              </a:rPr>
+              <a:t>Test Environment:</a:t>
+            </a:r>
+          </a:p>
+          <a:p>
+            <a:pPr marL="514350" indent="-514350" algn="l">
+              <a:buFont typeface="+mj-lt"/>
+              <a:buAutoNum type="arabicPeriod"/>
+            </a:pPr>
+            <a:r>
+              <a:rPr lang="en-US" b="0" i="0" u="none" strike="noStrike" dirty="0" err="1">
+                <a:solidFill>
+                  <a:srgbClr val="000000"/>
+                </a:solidFill>
+                <a:effectLst/>
+              </a:rPr>
+              <a:t>Corellium</a:t>
+            </a:r>
+            <a:r>
+              <a:rPr lang="en-US" b="0" i="0" u="none" strike="noStrike" dirty="0">
+                <a:solidFill>
+                  <a:srgbClr val="000000"/>
+                </a:solidFill>
+                <a:effectLst/>
+              </a:rPr>
+              <a:t> virtual device with Android or iOS.</a:t>
+            </a:r>
+          </a:p>
+          <a:p>
+            <a:pPr marL="514350" indent="-514350" algn="l">
+              <a:buFont typeface="+mj-lt"/>
+              <a:buAutoNum type="arabicPeriod"/>
+            </a:pPr>
+            <a:r>
+              <a:rPr lang="en-US" b="0" i="0" u="none" strike="noStrike" dirty="0">
+                <a:solidFill>
+                  <a:srgbClr val="000000"/>
+                </a:solidFill>
+                <a:effectLst/>
+              </a:rPr>
+              <a:t>Clipboard monitoring tools available on </a:t>
+            </a:r>
+            <a:r>
+              <a:rPr lang="en-US" b="0" i="0" u="none" strike="noStrike" dirty="0" err="1">
+                <a:solidFill>
+                  <a:srgbClr val="000000"/>
+                </a:solidFill>
+                <a:effectLst/>
+              </a:rPr>
+              <a:t>Corellium</a:t>
+            </a:r>
+            <a:r>
+              <a:rPr lang="en-US" b="0" i="0" u="none" strike="noStrike" dirty="0">
+                <a:solidFill>
+                  <a:srgbClr val="000000"/>
+                </a:solidFill>
+                <a:effectLst/>
+              </a:rPr>
+              <a:t> for validation.</a:t>
+            </a:r>
+          </a:p>
+          <a:p>
+            <a:endParaRPr lang="en-US" dirty="0"/>
+          </a:p>
+        </p:txBody>
+      </p:sp>
+    </p:spTree>
+    <p:extLst>
+      <p:ext uri="{BB962C8B-B14F-4D97-AF65-F5344CB8AC3E}">
+        <p14:creationId xmlns:p14="http://schemas.microsoft.com/office/powerpoint/2010/main" val="2694987054"/>
+      </p:ext>
+    </p:extLst>
+  </p:cSld>
+  <p:clrMapOvr>
+    <a:masterClrMapping/>
+  </p:clrMapOvr>
+</p:sld>
+</file>
+
+<file path=ppt/slides/slide11.xml><?xml version="1.0" encoding="utf-8"?>
+<p:sld xmlns:a="http://schemas.openxmlformats.org/drawingml/2006/main" xmlns:r="http://schemas.openxmlformats.org/officeDocument/2006/relationships" xmlns:p="http://schemas.openxmlformats.org/presentationml/2006/main">
+  <p:cSld>
+    <p:spTree>
+      <p:nvGrpSpPr>
+        <p:cNvPr id="1" name=""/>
+        <p:cNvGrpSpPr/>
+        <p:nvPr/>
+      </p:nvGrpSpPr>
+      <p:grpSpPr>
+        <a:xfrm>
+          <a:off x="0" y="0"/>
+          <a:ext cx="0" cy="0"/>
+          <a:chOff x="0" y="0"/>
+          <a:chExt cx="0" cy="0"/>
+        </a:xfrm>
+      </p:grpSpPr>
+      <p:sp>
+        <p:nvSpPr>
+          <p:cNvPr id="2" name="Title 1">
+            <a:extLst>
+              <a:ext uri="{FF2B5EF4-FFF2-40B4-BE49-F238E27FC236}">
+                <a16:creationId xmlns:a16="http://schemas.microsoft.com/office/drawing/2014/main" id="{0F4E3120-2EF6-4F4B-FABF-BE68D45AE0BF}"/>
+              </a:ext>
+            </a:extLst>
+          </p:cNvPr>
+          <p:cNvSpPr>
+            <a:spLocks noGrp="1"/>
+          </p:cNvSpPr>
+          <p:nvPr>
+            <p:ph type="title"/>
+          </p:nvPr>
+        </p:nvSpPr>
+        <p:spPr/>
+        <p:txBody>
+          <a:bodyPr/>
+          <a:lstStyle/>
+          <a:p>
+            <a:r>
+              <a:rPr lang="en-US" b="0" i="0" u="none" strike="noStrike" dirty="0">
+                <a:solidFill>
+                  <a:srgbClr val="000000"/>
+                </a:solidFill>
+                <a:effectLst/>
+                <a:latin typeface="-webkit-standard"/>
+              </a:rPr>
+              <a:t>Test URL Manipulation</a:t>
+            </a:r>
+            <a:endParaRPr lang="en-US" dirty="0"/>
+          </a:p>
+        </p:txBody>
+      </p:sp>
+      <p:sp>
+        <p:nvSpPr>
+          <p:cNvPr id="3" name="Content Placeholder 2">
+            <a:extLst>
+              <a:ext uri="{FF2B5EF4-FFF2-40B4-BE49-F238E27FC236}">
+                <a16:creationId xmlns:a16="http://schemas.microsoft.com/office/drawing/2014/main" id="{B0B4D495-E688-E846-BB30-43953CDF98BD}"/>
+              </a:ext>
+            </a:extLst>
+          </p:cNvPr>
+          <p:cNvSpPr>
+            <a:spLocks noGrp="1"/>
+          </p:cNvSpPr>
+          <p:nvPr>
+            <p:ph idx="1"/>
+          </p:nvPr>
+        </p:nvSpPr>
+        <p:spPr>
+          <a:xfrm>
+            <a:off x="838200" y="1349636"/>
+            <a:ext cx="10515600" cy="4351338"/>
+          </a:xfrm>
+        </p:spPr>
+        <p:txBody>
+          <a:bodyPr>
+            <a:normAutofit fontScale="25000" lnSpcReduction="20000"/>
+          </a:bodyPr>
+          <a:lstStyle/>
+          <a:p>
+            <a:pPr marL="0" indent="0" algn="l">
+              <a:buNone/>
+            </a:pPr>
+            <a:r>
+              <a:rPr lang="en-US" b="1" i="0" u="none" strike="noStrike" dirty="0">
+                <a:solidFill>
+                  <a:srgbClr val="000000"/>
+                </a:solidFill>
+                <a:effectLst/>
+              </a:rPr>
+              <a:t>Test Case ID: TC-010</a:t>
+            </a:r>
+          </a:p>
+          <a:p>
+            <a:pPr marL="0" indent="0" algn="l">
+              <a:buNone/>
+            </a:pPr>
+            <a:r>
+              <a:rPr lang="en-US" b="1" i="0" u="none" strike="noStrike" dirty="0">
+                <a:solidFill>
+                  <a:srgbClr val="000000"/>
+                </a:solidFill>
+                <a:effectLst/>
+              </a:rPr>
+              <a:t>Objective:</a:t>
+            </a:r>
+          </a:p>
+          <a:p>
+            <a:pPr algn="l"/>
+            <a:r>
+              <a:rPr lang="en-US" b="0" i="0" u="none" strike="noStrike" dirty="0">
+                <a:solidFill>
+                  <a:srgbClr val="000000"/>
+                </a:solidFill>
+                <a:effectLst/>
+              </a:rPr>
+              <a:t>To validate that the app's backend and API endpoints are secure and prevent unauthorized access to sensitive data or resources through URL parameter manipulation.</a:t>
+            </a:r>
+          </a:p>
+          <a:p>
+            <a:pPr marL="0" indent="0" algn="l">
+              <a:buNone/>
+            </a:pPr>
+            <a:r>
+              <a:rPr lang="en-US" b="1" i="0" u="none" strike="noStrike" dirty="0">
+                <a:solidFill>
+                  <a:srgbClr val="000000"/>
+                </a:solidFill>
+                <a:effectLst/>
+              </a:rPr>
+              <a:t>Pre-conditions:</a:t>
+            </a:r>
+          </a:p>
+          <a:p>
+            <a:pPr algn="l">
+              <a:buFont typeface="+mj-lt"/>
+              <a:buAutoNum type="arabicPeriod"/>
+            </a:pPr>
+            <a:r>
+              <a:rPr lang="en-US" b="0" i="0" u="none" strike="noStrike" dirty="0">
+                <a:solidFill>
+                  <a:srgbClr val="000000"/>
+                </a:solidFill>
+                <a:effectLst/>
+              </a:rPr>
+              <a:t>APK/AAB/IPA file must be uploaded and installed on the </a:t>
+            </a:r>
+            <a:r>
+              <a:rPr lang="en-US" b="0" i="0" u="none" strike="noStrike" dirty="0" err="1">
+                <a:solidFill>
+                  <a:srgbClr val="000000"/>
+                </a:solidFill>
+                <a:effectLst/>
+              </a:rPr>
+              <a:t>Corellium</a:t>
+            </a:r>
+            <a:r>
+              <a:rPr lang="en-US" b="0" i="0" u="none" strike="noStrike" dirty="0">
+                <a:solidFill>
+                  <a:srgbClr val="000000"/>
+                </a:solidFill>
+                <a:effectLst/>
+              </a:rPr>
+              <a:t> virtual device.</a:t>
+            </a:r>
+          </a:p>
+          <a:p>
+            <a:pPr algn="l">
+              <a:buFont typeface="+mj-lt"/>
+              <a:buAutoNum type="arabicPeriod"/>
+            </a:pPr>
+            <a:r>
+              <a:rPr lang="en-US" b="0" i="0" u="none" strike="noStrike" dirty="0" err="1">
+                <a:solidFill>
+                  <a:srgbClr val="000000"/>
+                </a:solidFill>
+                <a:effectLst/>
+              </a:rPr>
+              <a:t>Corellium’s</a:t>
+            </a:r>
+            <a:r>
+              <a:rPr lang="en-US" b="0" i="0" u="none" strike="noStrike" dirty="0">
+                <a:solidFill>
+                  <a:srgbClr val="000000"/>
+                </a:solidFill>
+                <a:effectLst/>
+              </a:rPr>
+              <a:t> network proxy or intercept features must be configured and ready for monitoring network traffic.</a:t>
+            </a:r>
+          </a:p>
+          <a:p>
+            <a:pPr algn="l">
+              <a:buFont typeface="+mj-lt"/>
+              <a:buAutoNum type="arabicPeriod"/>
+            </a:pPr>
+            <a:r>
+              <a:rPr lang="en-US" b="0" i="0" u="none" strike="noStrike" dirty="0">
+                <a:solidFill>
+                  <a:srgbClr val="000000"/>
+                </a:solidFill>
+                <a:effectLst/>
+              </a:rPr>
+              <a:t>The app should use HTTP or HTTPS for communication with a server.</a:t>
+            </a:r>
+          </a:p>
+          <a:p>
+            <a:pPr marL="0" indent="0" algn="l">
+              <a:buNone/>
+            </a:pPr>
+            <a:r>
+              <a:rPr lang="en-US" b="1" i="0" u="none" strike="noStrike" dirty="0">
+                <a:solidFill>
+                  <a:srgbClr val="000000"/>
+                </a:solidFill>
+                <a:effectLst/>
+              </a:rPr>
+              <a:t>Steps:</a:t>
+            </a:r>
+          </a:p>
+          <a:p>
+            <a:pPr algn="l">
+              <a:buFont typeface="+mj-lt"/>
+              <a:buAutoNum type="arabicPeriod"/>
+            </a:pPr>
+            <a:r>
+              <a:rPr lang="en-US" b="0" i="0" u="none" strike="noStrike" dirty="0">
+                <a:solidFill>
+                  <a:srgbClr val="000000"/>
+                </a:solidFill>
+                <a:effectLst/>
+              </a:rPr>
+              <a:t>Launch the app on the </a:t>
+            </a:r>
+            <a:r>
+              <a:rPr lang="en-US" b="0" i="0" u="none" strike="noStrike" dirty="0" err="1">
+                <a:solidFill>
+                  <a:srgbClr val="000000"/>
+                </a:solidFill>
+                <a:effectLst/>
+              </a:rPr>
+              <a:t>Corellium</a:t>
+            </a:r>
+            <a:r>
+              <a:rPr lang="en-US" b="0" i="0" u="none" strike="noStrike" dirty="0">
+                <a:solidFill>
+                  <a:srgbClr val="000000"/>
+                </a:solidFill>
+                <a:effectLst/>
+              </a:rPr>
+              <a:t> virtual device.</a:t>
+            </a:r>
+          </a:p>
+          <a:p>
+            <a:pPr algn="l">
+              <a:buFont typeface="+mj-lt"/>
+              <a:buAutoNum type="arabicPeriod"/>
+            </a:pPr>
+            <a:r>
+              <a:rPr lang="en-US" b="0" i="0" u="none" strike="noStrike" dirty="0">
+                <a:solidFill>
+                  <a:srgbClr val="000000"/>
+                </a:solidFill>
+                <a:effectLst/>
+              </a:rPr>
+              <a:t>Perform actions in the app (e.g., viewing user details, loading content) and observe the URLs used in network requests.</a:t>
+            </a:r>
+          </a:p>
+          <a:p>
+            <a:pPr algn="l">
+              <a:buFont typeface="+mj-lt"/>
+              <a:buAutoNum type="arabicPeriod"/>
+            </a:pPr>
+            <a:r>
+              <a:rPr lang="en-US" b="0" i="0" u="none" strike="noStrike" dirty="0">
+                <a:solidFill>
+                  <a:srgbClr val="000000"/>
+                </a:solidFill>
+                <a:effectLst/>
+              </a:rPr>
+              <a:t>Use </a:t>
+            </a:r>
+            <a:r>
+              <a:rPr lang="en-US" b="0" i="0" u="none" strike="noStrike" dirty="0" err="1">
+                <a:solidFill>
+                  <a:srgbClr val="000000"/>
+                </a:solidFill>
+                <a:effectLst/>
+              </a:rPr>
+              <a:t>Corellium’s</a:t>
+            </a:r>
+            <a:r>
+              <a:rPr lang="en-US" b="0" i="0" u="none" strike="noStrike" dirty="0">
+                <a:solidFill>
+                  <a:srgbClr val="000000"/>
+                </a:solidFill>
+                <a:effectLst/>
+              </a:rPr>
+              <a:t> network proxy or intercept features to:</a:t>
+            </a:r>
+          </a:p>
+          <a:p>
+            <a:pPr marL="742950" lvl="1" indent="-285750" algn="l">
+              <a:buFont typeface="+mj-lt"/>
+              <a:buAutoNum type="arabicPeriod"/>
+            </a:pPr>
+            <a:r>
+              <a:rPr lang="en-US" b="0" i="0" u="none" strike="noStrike" dirty="0">
+                <a:solidFill>
+                  <a:srgbClr val="000000"/>
+                </a:solidFill>
+                <a:effectLst/>
+              </a:rPr>
+              <a:t>Identify URL parameters (e.g., id=123).</a:t>
+            </a:r>
+          </a:p>
+          <a:p>
+            <a:pPr marL="742950" lvl="1" indent="-285750" algn="l">
+              <a:buFont typeface="+mj-lt"/>
+              <a:buAutoNum type="arabicPeriod"/>
+            </a:pPr>
+            <a:r>
+              <a:rPr lang="en-US" b="0" i="0" u="none" strike="noStrike" dirty="0">
+                <a:solidFill>
+                  <a:srgbClr val="000000"/>
+                </a:solidFill>
+                <a:effectLst/>
+              </a:rPr>
+              <a:t>Modify URL parameters to unauthorized values (e.g., change id=123 to id=456).</a:t>
+            </a:r>
+          </a:p>
+          <a:p>
+            <a:pPr algn="l">
+              <a:buFont typeface="+mj-lt"/>
+              <a:buAutoNum type="arabicPeriod"/>
+            </a:pPr>
+            <a:r>
+              <a:rPr lang="en-US" b="0" i="0" u="none" strike="noStrike" dirty="0">
+                <a:solidFill>
+                  <a:srgbClr val="000000"/>
+                </a:solidFill>
+                <a:effectLst/>
+              </a:rPr>
+              <a:t>Submit the modified request and observe the app’s behavior.</a:t>
+            </a:r>
+          </a:p>
+          <a:p>
+            <a:pPr marL="0" indent="0" algn="l">
+              <a:buNone/>
+            </a:pPr>
+            <a:r>
+              <a:rPr lang="en-US" b="1" i="0" u="none" strike="noStrike" dirty="0">
+                <a:solidFill>
+                  <a:srgbClr val="000000"/>
+                </a:solidFill>
+                <a:effectLst/>
+              </a:rPr>
+              <a:t>Expected Results:</a:t>
+            </a:r>
+          </a:p>
+          <a:p>
+            <a:pPr algn="l">
+              <a:buFont typeface="+mj-lt"/>
+              <a:buAutoNum type="arabicPeriod"/>
+            </a:pPr>
+            <a:r>
+              <a:rPr lang="en-US" b="0" i="0" u="none" strike="noStrike" dirty="0">
+                <a:solidFill>
+                  <a:srgbClr val="000000"/>
+                </a:solidFill>
+                <a:effectLst/>
+              </a:rPr>
+              <a:t>The app should validate all incoming requests and ensure access is limited to authorized users.</a:t>
+            </a:r>
+          </a:p>
+          <a:p>
+            <a:pPr algn="l">
+              <a:buFont typeface="+mj-lt"/>
+              <a:buAutoNum type="arabicPeriod"/>
+            </a:pPr>
+            <a:r>
+              <a:rPr lang="en-US" b="0" i="0" u="none" strike="noStrike" dirty="0">
+                <a:solidFill>
+                  <a:srgbClr val="000000"/>
+                </a:solidFill>
+                <a:effectLst/>
+              </a:rPr>
+              <a:t>Unauthorized access to sensitive data or resources should be blocked.</a:t>
+            </a:r>
+          </a:p>
+          <a:p>
+            <a:pPr algn="l">
+              <a:buFont typeface="+mj-lt"/>
+              <a:buAutoNum type="arabicPeriod"/>
+            </a:pPr>
+            <a:r>
+              <a:rPr lang="en-US" b="0" i="0" u="none" strike="noStrike" dirty="0">
+                <a:solidFill>
+                  <a:srgbClr val="000000"/>
+                </a:solidFill>
+                <a:effectLst/>
+              </a:rPr>
+              <a:t>The server should return an error message (e.g., 403 Forbidden) for manipulated requests.</a:t>
+            </a:r>
+          </a:p>
+          <a:p>
+            <a:pPr marL="0" indent="0" algn="l">
+              <a:buNone/>
+            </a:pPr>
+            <a:r>
+              <a:rPr lang="en-US" b="1" i="0" u="none" strike="noStrike" dirty="0">
+                <a:solidFill>
+                  <a:srgbClr val="000000"/>
+                </a:solidFill>
+                <a:effectLst/>
+              </a:rPr>
+              <a:t>Test Data:</a:t>
+            </a:r>
+          </a:p>
+          <a:p>
+            <a:pPr algn="l">
+              <a:buFont typeface="Arial" panose="020B0604020202020204" pitchFamily="34" charset="0"/>
+              <a:buChar char="•"/>
+            </a:pPr>
+            <a:r>
+              <a:rPr lang="en-US" b="0" i="0" u="none" strike="noStrike" dirty="0">
+                <a:solidFill>
+                  <a:srgbClr val="000000"/>
+                </a:solidFill>
+                <a:effectLst/>
+              </a:rPr>
+              <a:t>Valid and invalid URL parameters for testing.</a:t>
+            </a:r>
+          </a:p>
+          <a:p>
+            <a:pPr algn="l">
+              <a:buFont typeface="Arial" panose="020B0604020202020204" pitchFamily="34" charset="0"/>
+              <a:buChar char="•"/>
+            </a:pPr>
+            <a:r>
+              <a:rPr lang="en-US" b="0" i="0" u="none" strike="noStrike" dirty="0">
+                <a:solidFill>
+                  <a:srgbClr val="000000"/>
+                </a:solidFill>
+                <a:effectLst/>
+              </a:rPr>
+              <a:t>Example:</a:t>
+            </a:r>
+          </a:p>
+          <a:p>
+            <a:pPr marL="742950" lvl="1" indent="-285750" algn="l">
+              <a:buFont typeface="Arial" panose="020B0604020202020204" pitchFamily="34" charset="0"/>
+              <a:buChar char="•"/>
+            </a:pPr>
+            <a:r>
+              <a:rPr lang="en-US" b="0" i="0" u="none" strike="noStrike" dirty="0">
+                <a:solidFill>
+                  <a:srgbClr val="000000"/>
+                </a:solidFill>
+                <a:effectLst/>
+              </a:rPr>
+              <a:t>Valid: https://</a:t>
+            </a:r>
+            <a:r>
+              <a:rPr lang="en-US" b="0" i="0" u="none" strike="noStrike" dirty="0" err="1">
+                <a:solidFill>
+                  <a:srgbClr val="000000"/>
+                </a:solidFill>
+                <a:effectLst/>
+              </a:rPr>
+              <a:t>api.app.com</a:t>
+            </a:r>
+            <a:r>
+              <a:rPr lang="en-US" b="0" i="0" u="none" strike="noStrike" dirty="0">
+                <a:solidFill>
+                  <a:srgbClr val="000000"/>
+                </a:solidFill>
+                <a:effectLst/>
+              </a:rPr>
+              <a:t>/</a:t>
+            </a:r>
+            <a:r>
+              <a:rPr lang="en-US" b="0" i="0" u="none" strike="noStrike" dirty="0" err="1">
+                <a:solidFill>
+                  <a:srgbClr val="000000"/>
+                </a:solidFill>
+                <a:effectLst/>
+              </a:rPr>
+              <a:t>user?id</a:t>
+            </a:r>
+            <a:r>
+              <a:rPr lang="en-US" b="0" i="0" u="none" strike="noStrike" dirty="0">
+                <a:solidFill>
+                  <a:srgbClr val="000000"/>
+                </a:solidFill>
+                <a:effectLst/>
+              </a:rPr>
+              <a:t>=123</a:t>
+            </a:r>
+          </a:p>
+          <a:p>
+            <a:pPr marL="742950" lvl="1" indent="-285750" algn="l">
+              <a:buFont typeface="Arial" panose="020B0604020202020204" pitchFamily="34" charset="0"/>
+              <a:buChar char="•"/>
+            </a:pPr>
+            <a:r>
+              <a:rPr lang="en-US" b="0" i="0" u="none" strike="noStrike" dirty="0">
+                <a:solidFill>
+                  <a:srgbClr val="000000"/>
+                </a:solidFill>
+                <a:effectLst/>
+              </a:rPr>
+              <a:t>Invalid: https://</a:t>
+            </a:r>
+            <a:r>
+              <a:rPr lang="en-US" b="0" i="0" u="none" strike="noStrike" dirty="0" err="1">
+                <a:solidFill>
+                  <a:srgbClr val="000000"/>
+                </a:solidFill>
+                <a:effectLst/>
+              </a:rPr>
+              <a:t>api.app.com</a:t>
+            </a:r>
+            <a:r>
+              <a:rPr lang="en-US" b="0" i="0" u="none" strike="noStrike" dirty="0">
+                <a:solidFill>
+                  <a:srgbClr val="000000"/>
+                </a:solidFill>
+                <a:effectLst/>
+              </a:rPr>
+              <a:t>/</a:t>
+            </a:r>
+            <a:r>
+              <a:rPr lang="en-US" b="0" i="0" u="none" strike="noStrike" dirty="0" err="1">
+                <a:solidFill>
+                  <a:srgbClr val="000000"/>
+                </a:solidFill>
+                <a:effectLst/>
+              </a:rPr>
+              <a:t>user?id</a:t>
+            </a:r>
+            <a:r>
+              <a:rPr lang="en-US" b="0" i="0" u="none" strike="noStrike" dirty="0">
+                <a:solidFill>
+                  <a:srgbClr val="000000"/>
+                </a:solidFill>
+                <a:effectLst/>
+              </a:rPr>
+              <a:t>=456</a:t>
+            </a:r>
+          </a:p>
+          <a:p>
+            <a:pPr marL="0" indent="0" algn="l">
+              <a:buNone/>
+            </a:pPr>
+            <a:r>
+              <a:rPr lang="en-US" b="1" i="0" u="none" strike="noStrike" dirty="0">
+                <a:solidFill>
+                  <a:srgbClr val="000000"/>
+                </a:solidFill>
+                <a:effectLst/>
+              </a:rPr>
+              <a:t>Test Environment:</a:t>
+            </a:r>
+          </a:p>
+          <a:p>
+            <a:pPr algn="l">
+              <a:buFont typeface="Arial" panose="020B0604020202020204" pitchFamily="34" charset="0"/>
+              <a:buChar char="•"/>
+            </a:pPr>
+            <a:r>
+              <a:rPr lang="en-US" b="0" i="0" u="none" strike="noStrike" dirty="0" err="1">
+                <a:solidFill>
+                  <a:srgbClr val="000000"/>
+                </a:solidFill>
+                <a:effectLst/>
+              </a:rPr>
+              <a:t>Corellium</a:t>
+            </a:r>
+            <a:r>
+              <a:rPr lang="en-US" b="0" i="0" u="none" strike="noStrike" dirty="0">
+                <a:solidFill>
+                  <a:srgbClr val="000000"/>
+                </a:solidFill>
+                <a:effectLst/>
+              </a:rPr>
+              <a:t> virtual device with Android or iOS.</a:t>
+            </a:r>
+          </a:p>
+          <a:p>
+            <a:pPr algn="l">
+              <a:buFont typeface="Arial" panose="020B0604020202020204" pitchFamily="34" charset="0"/>
+              <a:buChar char="•"/>
+            </a:pPr>
+            <a:r>
+              <a:rPr lang="en-US" b="0" i="0" u="none" strike="noStrike" dirty="0" err="1">
+                <a:solidFill>
+                  <a:srgbClr val="000000"/>
+                </a:solidFill>
+                <a:effectLst/>
+              </a:rPr>
+              <a:t>Corellium’s</a:t>
+            </a:r>
+            <a:r>
+              <a:rPr lang="en-US" b="0" i="0" u="none" strike="noStrike" dirty="0">
+                <a:solidFill>
+                  <a:srgbClr val="000000"/>
+                </a:solidFill>
+                <a:effectLst/>
+              </a:rPr>
+              <a:t> network proxy or intercept tool enabled for monitoring and modifying requests.</a:t>
+            </a:r>
+          </a:p>
+          <a:p>
+            <a:endParaRPr lang="en-US" dirty="0"/>
+          </a:p>
+        </p:txBody>
+      </p:sp>
+    </p:spTree>
+    <p:extLst>
+      <p:ext uri="{BB962C8B-B14F-4D97-AF65-F5344CB8AC3E}">
+        <p14:creationId xmlns:p14="http://schemas.microsoft.com/office/powerpoint/2010/main" val="1533476540"/>
+      </p:ext>
+    </p:extLst>
+  </p:cSld>
+  <p:clrMapOvr>
+    <a:masterClrMapping/>
+  </p:clrMapOvr>
+</p:sld>
+</file>
+
+<file path=ppt/slides/slide12.xml><?xml version="1.0" encoding="utf-8"?>
+<p:sld xmlns:a="http://schemas.openxmlformats.org/drawingml/2006/main" xmlns:r="http://schemas.openxmlformats.org/officeDocument/2006/relationships" xmlns:p="http://schemas.openxmlformats.org/presentationml/2006/main">
+  <p:cSld>
+    <p:spTree>
+      <p:nvGrpSpPr>
+        <p:cNvPr id="1" name=""/>
+        <p:cNvGrpSpPr/>
+        <p:nvPr/>
+      </p:nvGrpSpPr>
+      <p:grpSpPr>
+        <a:xfrm>
+          <a:off x="0" y="0"/>
+          <a:ext cx="0" cy="0"/>
+          <a:chOff x="0" y="0"/>
+          <a:chExt cx="0" cy="0"/>
+        </a:xfrm>
+      </p:grpSpPr>
+      <p:sp>
+        <p:nvSpPr>
+          <p:cNvPr id="2" name="Title 1">
+            <a:extLst>
+              <a:ext uri="{FF2B5EF4-FFF2-40B4-BE49-F238E27FC236}">
+                <a16:creationId xmlns:a16="http://schemas.microsoft.com/office/drawing/2014/main" id="{2FCC249A-976C-11F5-147F-B9F4D4F0BAAF}"/>
+              </a:ext>
+            </a:extLst>
+          </p:cNvPr>
+          <p:cNvSpPr>
+            <a:spLocks noGrp="1"/>
+          </p:cNvSpPr>
+          <p:nvPr>
+            <p:ph type="title"/>
+          </p:nvPr>
+        </p:nvSpPr>
+        <p:spPr/>
+        <p:txBody>
+          <a:bodyPr/>
+          <a:lstStyle/>
+          <a:p>
+            <a:r>
+              <a:rPr lang="en-US" b="0" i="0" u="none" strike="noStrike" dirty="0">
+                <a:solidFill>
+                  <a:srgbClr val="000000"/>
+                </a:solidFill>
+                <a:effectLst/>
+                <a:latin typeface="-webkit-standard"/>
+              </a:rPr>
+              <a:t>Check Network Communication Security</a:t>
+            </a:r>
+            <a:endParaRPr lang="en-US" dirty="0"/>
+          </a:p>
+        </p:txBody>
+      </p:sp>
+      <p:sp>
+        <p:nvSpPr>
+          <p:cNvPr id="3" name="Content Placeholder 2">
+            <a:extLst>
+              <a:ext uri="{FF2B5EF4-FFF2-40B4-BE49-F238E27FC236}">
+                <a16:creationId xmlns:a16="http://schemas.microsoft.com/office/drawing/2014/main" id="{E9B39E45-DC51-4BDA-1612-ABC42977A850}"/>
+              </a:ext>
+            </a:extLst>
+          </p:cNvPr>
+          <p:cNvSpPr>
+            <a:spLocks noGrp="1"/>
+          </p:cNvSpPr>
+          <p:nvPr>
+            <p:ph idx="1"/>
+          </p:nvPr>
+        </p:nvSpPr>
+        <p:spPr>
+          <a:xfrm>
+            <a:off x="838200" y="1412266"/>
+            <a:ext cx="10515600" cy="4351338"/>
+          </a:xfrm>
+        </p:spPr>
+        <p:txBody>
+          <a:bodyPr>
+            <a:normAutofit fontScale="25000" lnSpcReduction="20000"/>
+          </a:bodyPr>
+          <a:lstStyle/>
+          <a:p>
+            <a:pPr marL="0" indent="0" algn="l">
+              <a:buNone/>
+            </a:pPr>
+            <a:r>
+              <a:rPr lang="en-US" b="1" i="0" u="none" strike="noStrike" dirty="0">
+                <a:solidFill>
+                  <a:srgbClr val="000000"/>
+                </a:solidFill>
+                <a:effectLst/>
+              </a:rPr>
+              <a:t>Test Case ID: TC-011</a:t>
+            </a:r>
+          </a:p>
+          <a:p>
+            <a:pPr marL="0" indent="0" algn="l">
+              <a:buNone/>
+            </a:pPr>
+            <a:r>
+              <a:rPr lang="en-US" b="1" i="0" u="none" strike="noStrike" dirty="0">
+                <a:solidFill>
+                  <a:srgbClr val="000000"/>
+                </a:solidFill>
+                <a:effectLst/>
+              </a:rPr>
+              <a:t>Objective:</a:t>
+            </a:r>
+          </a:p>
+          <a:p>
+            <a:pPr algn="l"/>
+            <a:r>
+              <a:rPr lang="en-US" b="0" i="0" u="none" strike="noStrike" dirty="0">
+                <a:solidFill>
+                  <a:srgbClr val="000000"/>
+                </a:solidFill>
+                <a:effectLst/>
+              </a:rPr>
+              <a:t>To verify that the app uses secure network communication protocols (e.g., HTTPS) and does not transmit sensitive data (e.g., passwords, tokens) in plaintext.</a:t>
+            </a:r>
+          </a:p>
+          <a:p>
+            <a:pPr marL="0" indent="0" algn="l">
+              <a:buNone/>
+            </a:pPr>
+            <a:r>
+              <a:rPr lang="en-US" b="1" i="0" u="none" strike="noStrike" dirty="0">
+                <a:solidFill>
+                  <a:srgbClr val="000000"/>
+                </a:solidFill>
+                <a:effectLst/>
+              </a:rPr>
+              <a:t>Pre-conditions:</a:t>
+            </a:r>
+          </a:p>
+          <a:p>
+            <a:pPr algn="l">
+              <a:buFont typeface="+mj-lt"/>
+              <a:buAutoNum type="arabicPeriod"/>
+            </a:pPr>
+            <a:r>
+              <a:rPr lang="en-US" b="0" i="0" u="none" strike="noStrike" dirty="0">
+                <a:solidFill>
+                  <a:srgbClr val="000000"/>
+                </a:solidFill>
+                <a:effectLst/>
+              </a:rPr>
+              <a:t>APK/AAB/IPA file must be uploaded and installed on the </a:t>
+            </a:r>
+            <a:r>
+              <a:rPr lang="en-US" b="0" i="0" u="none" strike="noStrike" dirty="0" err="1">
+                <a:solidFill>
+                  <a:srgbClr val="000000"/>
+                </a:solidFill>
+                <a:effectLst/>
+              </a:rPr>
+              <a:t>Corellium</a:t>
+            </a:r>
+            <a:r>
+              <a:rPr lang="en-US" b="0" i="0" u="none" strike="noStrike" dirty="0">
+                <a:solidFill>
+                  <a:srgbClr val="000000"/>
+                </a:solidFill>
+                <a:effectLst/>
+              </a:rPr>
+              <a:t> virtual device.</a:t>
+            </a:r>
+          </a:p>
+          <a:p>
+            <a:pPr algn="l">
+              <a:buFont typeface="+mj-lt"/>
+              <a:buAutoNum type="arabicPeriod"/>
+            </a:pPr>
+            <a:r>
+              <a:rPr lang="en-US" b="0" i="0" u="none" strike="noStrike" dirty="0" err="1">
+                <a:solidFill>
+                  <a:srgbClr val="000000"/>
+                </a:solidFill>
+                <a:effectLst/>
+              </a:rPr>
+              <a:t>Corellium’s</a:t>
+            </a:r>
+            <a:r>
+              <a:rPr lang="en-US" b="0" i="0" u="none" strike="noStrike" dirty="0">
+                <a:solidFill>
+                  <a:srgbClr val="000000"/>
+                </a:solidFill>
+                <a:effectLst/>
+              </a:rPr>
+              <a:t> network packet capture or proxy tool must be enabled and configured.</a:t>
+            </a:r>
+          </a:p>
+          <a:p>
+            <a:pPr algn="l">
+              <a:buFont typeface="+mj-lt"/>
+              <a:buAutoNum type="arabicPeriod"/>
+            </a:pPr>
+            <a:r>
+              <a:rPr lang="en-US" b="0" i="0" u="none" strike="noStrike" dirty="0">
+                <a:solidFill>
+                  <a:srgbClr val="000000"/>
+                </a:solidFill>
+                <a:effectLst/>
+              </a:rPr>
+              <a:t>The app must involve network communication (e.g., login, data submission).</a:t>
+            </a:r>
+          </a:p>
+          <a:p>
+            <a:pPr marL="0" indent="0" algn="l">
+              <a:buNone/>
+            </a:pPr>
+            <a:r>
+              <a:rPr lang="en-US" b="1" i="0" u="none" strike="noStrike" dirty="0">
+                <a:solidFill>
+                  <a:srgbClr val="000000"/>
+                </a:solidFill>
+                <a:effectLst/>
+              </a:rPr>
+              <a:t>Steps:</a:t>
+            </a:r>
+          </a:p>
+          <a:p>
+            <a:pPr algn="l">
+              <a:buFont typeface="+mj-lt"/>
+              <a:buAutoNum type="arabicPeriod"/>
+            </a:pPr>
+            <a:r>
+              <a:rPr lang="en-US" b="0" i="0" u="none" strike="noStrike" dirty="0">
+                <a:solidFill>
+                  <a:srgbClr val="000000"/>
+                </a:solidFill>
+                <a:effectLst/>
+              </a:rPr>
+              <a:t>Launch the app on the </a:t>
+            </a:r>
+            <a:r>
+              <a:rPr lang="en-US" b="0" i="0" u="none" strike="noStrike" dirty="0" err="1">
+                <a:solidFill>
+                  <a:srgbClr val="000000"/>
+                </a:solidFill>
+                <a:effectLst/>
+              </a:rPr>
+              <a:t>Corellium</a:t>
+            </a:r>
+            <a:r>
+              <a:rPr lang="en-US" b="0" i="0" u="none" strike="noStrike" dirty="0">
+                <a:solidFill>
+                  <a:srgbClr val="000000"/>
+                </a:solidFill>
+                <a:effectLst/>
+              </a:rPr>
+              <a:t> virtual device.</a:t>
+            </a:r>
+          </a:p>
+          <a:p>
+            <a:pPr algn="l">
+              <a:buFont typeface="+mj-lt"/>
+              <a:buAutoNum type="arabicPeriod"/>
+            </a:pPr>
+            <a:r>
+              <a:rPr lang="en-US" b="0" i="0" u="none" strike="noStrike" dirty="0">
+                <a:solidFill>
+                  <a:srgbClr val="000000"/>
+                </a:solidFill>
+                <a:effectLst/>
+              </a:rPr>
+              <a:t>Enable </a:t>
+            </a:r>
+            <a:r>
+              <a:rPr lang="en-US" b="1" i="0" u="none" strike="noStrike" dirty="0">
+                <a:solidFill>
+                  <a:srgbClr val="000000"/>
+                </a:solidFill>
+                <a:effectLst/>
+              </a:rPr>
+              <a:t>network packet capture</a:t>
+            </a:r>
+            <a:r>
+              <a:rPr lang="en-US" b="0" i="0" u="none" strike="noStrike" dirty="0">
+                <a:solidFill>
+                  <a:srgbClr val="000000"/>
+                </a:solidFill>
+                <a:effectLst/>
+              </a:rPr>
+              <a:t> in </a:t>
+            </a:r>
+            <a:r>
+              <a:rPr lang="en-US" b="0" i="0" u="none" strike="noStrike" dirty="0" err="1">
+                <a:solidFill>
+                  <a:srgbClr val="000000"/>
+                </a:solidFill>
+                <a:effectLst/>
+              </a:rPr>
+              <a:t>Corellium</a:t>
+            </a:r>
+            <a:r>
+              <a:rPr lang="en-US" b="0" i="0" u="none" strike="noStrike" dirty="0">
+                <a:solidFill>
+                  <a:srgbClr val="000000"/>
+                </a:solidFill>
+                <a:effectLst/>
+              </a:rPr>
+              <a:t>.</a:t>
+            </a:r>
+          </a:p>
+          <a:p>
+            <a:pPr algn="l">
+              <a:buFont typeface="+mj-lt"/>
+              <a:buAutoNum type="arabicPeriod"/>
+            </a:pPr>
+            <a:r>
+              <a:rPr lang="en-US" b="0" i="0" u="none" strike="noStrike" dirty="0">
+                <a:solidFill>
+                  <a:srgbClr val="000000"/>
+                </a:solidFill>
+                <a:effectLst/>
+              </a:rPr>
+              <a:t>Perform critical actions in the app, such as:</a:t>
+            </a:r>
+          </a:p>
+          <a:p>
+            <a:pPr marL="742950" lvl="1" indent="-285750" algn="l">
+              <a:buFont typeface="+mj-lt"/>
+              <a:buAutoNum type="arabicPeriod"/>
+            </a:pPr>
+            <a:r>
+              <a:rPr lang="en-US" b="0" i="0" u="none" strike="noStrike" dirty="0">
+                <a:solidFill>
+                  <a:srgbClr val="000000"/>
+                </a:solidFill>
+                <a:effectLst/>
+              </a:rPr>
+              <a:t>Logging in with valid credentials.</a:t>
+            </a:r>
+          </a:p>
+          <a:p>
+            <a:pPr marL="742950" lvl="1" indent="-285750" algn="l">
+              <a:buFont typeface="+mj-lt"/>
+              <a:buAutoNum type="arabicPeriod"/>
+            </a:pPr>
+            <a:r>
+              <a:rPr lang="en-US" b="0" i="0" u="none" strike="noStrike" dirty="0">
+                <a:solidFill>
+                  <a:srgbClr val="000000"/>
+                </a:solidFill>
+                <a:effectLst/>
+              </a:rPr>
+              <a:t>Submitting sensitive data (e.g., payment details or forms).</a:t>
+            </a:r>
+          </a:p>
+          <a:p>
+            <a:pPr algn="l">
+              <a:buFont typeface="+mj-lt"/>
+              <a:buAutoNum type="arabicPeriod"/>
+            </a:pPr>
+            <a:r>
+              <a:rPr lang="en-US" b="0" i="0" u="none" strike="noStrike" dirty="0">
+                <a:solidFill>
+                  <a:srgbClr val="000000"/>
+                </a:solidFill>
+                <a:effectLst/>
+              </a:rPr>
+              <a:t>Review the captured network traffic for:</a:t>
+            </a:r>
+          </a:p>
+          <a:p>
+            <a:pPr marL="742950" lvl="1" indent="-285750" algn="l">
+              <a:buFont typeface="+mj-lt"/>
+              <a:buAutoNum type="arabicPeriod"/>
+            </a:pPr>
+            <a:r>
+              <a:rPr lang="en-US" b="0" i="0" u="none" strike="noStrike" dirty="0">
+                <a:solidFill>
+                  <a:srgbClr val="000000"/>
+                </a:solidFill>
+                <a:effectLst/>
+              </a:rPr>
+              <a:t>Whether all requests use HTTPS.</a:t>
+            </a:r>
+          </a:p>
+          <a:p>
+            <a:pPr marL="742950" lvl="1" indent="-285750" algn="l">
+              <a:buFont typeface="+mj-lt"/>
+              <a:buAutoNum type="arabicPeriod"/>
+            </a:pPr>
+            <a:r>
+              <a:rPr lang="en-US" b="0" i="0" u="none" strike="noStrike" dirty="0">
+                <a:solidFill>
+                  <a:srgbClr val="000000"/>
+                </a:solidFill>
+                <a:effectLst/>
+              </a:rPr>
+              <a:t>Whether sensitive data is encrypted or sent in plaintext.</a:t>
+            </a:r>
+          </a:p>
+          <a:p>
+            <a:pPr marL="0" indent="0" algn="l">
+              <a:buNone/>
+            </a:pPr>
+            <a:r>
+              <a:rPr lang="en-US" b="1" i="0" u="none" strike="noStrike" dirty="0">
+                <a:solidFill>
+                  <a:srgbClr val="000000"/>
+                </a:solidFill>
+                <a:effectLst/>
+              </a:rPr>
+              <a:t>Expected Results:</a:t>
+            </a:r>
+          </a:p>
+          <a:p>
+            <a:pPr algn="l">
+              <a:buFont typeface="+mj-lt"/>
+              <a:buAutoNum type="arabicPeriod"/>
+            </a:pPr>
+            <a:r>
+              <a:rPr lang="en-US" b="0" i="0" u="none" strike="noStrike" dirty="0">
+                <a:solidFill>
+                  <a:srgbClr val="000000"/>
+                </a:solidFill>
+                <a:effectLst/>
+              </a:rPr>
+              <a:t>All network traffic should use HTTPS (secure communication).</a:t>
+            </a:r>
+          </a:p>
+          <a:p>
+            <a:pPr algn="l">
+              <a:buFont typeface="+mj-lt"/>
+              <a:buAutoNum type="arabicPeriod"/>
+            </a:pPr>
+            <a:r>
+              <a:rPr lang="en-US" b="0" i="0" u="none" strike="noStrike" dirty="0">
+                <a:solidFill>
+                  <a:srgbClr val="000000"/>
+                </a:solidFill>
+                <a:effectLst/>
+              </a:rPr>
+              <a:t>Sensitive data such as passwords, tokens, or credit card numbers should never be transmitted in plaintext.</a:t>
+            </a:r>
+          </a:p>
+          <a:p>
+            <a:pPr algn="l">
+              <a:buFont typeface="+mj-lt"/>
+              <a:buAutoNum type="arabicPeriod"/>
+            </a:pPr>
+            <a:r>
+              <a:rPr lang="en-US" b="0" i="0" u="none" strike="noStrike" dirty="0">
+                <a:solidFill>
+                  <a:srgbClr val="000000"/>
+                </a:solidFill>
+                <a:effectLst/>
+              </a:rPr>
+              <a:t>Any intercepted data should be encrypted and unreadable.</a:t>
+            </a:r>
+          </a:p>
+          <a:p>
+            <a:pPr marL="0" indent="0" algn="l">
+              <a:buNone/>
+            </a:pPr>
+            <a:r>
+              <a:rPr lang="en-US" b="1" i="0" u="none" strike="noStrike" dirty="0">
+                <a:solidFill>
+                  <a:srgbClr val="000000"/>
+                </a:solidFill>
+                <a:effectLst/>
+              </a:rPr>
+              <a:t>Test Data:</a:t>
+            </a:r>
+          </a:p>
+          <a:p>
+            <a:pPr algn="l">
+              <a:buFont typeface="Arial" panose="020B0604020202020204" pitchFamily="34" charset="0"/>
+              <a:buChar char="•"/>
+            </a:pPr>
+            <a:r>
+              <a:rPr lang="en-US" b="0" i="0" u="none" strike="noStrike" dirty="0">
+                <a:solidFill>
+                  <a:srgbClr val="000000"/>
+                </a:solidFill>
+                <a:effectLst/>
+              </a:rPr>
+              <a:t>Test credentials:</a:t>
+            </a:r>
+          </a:p>
+          <a:p>
+            <a:pPr marL="742950" lvl="1" indent="-285750" algn="l">
+              <a:buFont typeface="Arial" panose="020B0604020202020204" pitchFamily="34" charset="0"/>
+              <a:buChar char="•"/>
+            </a:pPr>
+            <a:r>
+              <a:rPr lang="en-US" b="0" i="0" u="none" strike="noStrike" dirty="0">
+                <a:solidFill>
+                  <a:srgbClr val="000000"/>
+                </a:solidFill>
+                <a:effectLst/>
+              </a:rPr>
+              <a:t>Username: </a:t>
+            </a:r>
+            <a:r>
+              <a:rPr lang="en-US" b="0" i="0" u="none" strike="noStrike" dirty="0" err="1">
+                <a:solidFill>
+                  <a:srgbClr val="000000"/>
+                </a:solidFill>
+                <a:effectLst/>
+              </a:rPr>
+              <a:t>testuser@example.com</a:t>
+            </a:r>
+            <a:endParaRPr lang="en-US" b="0" i="0" u="none" strike="noStrike" dirty="0">
+              <a:solidFill>
+                <a:srgbClr val="000000"/>
+              </a:solidFill>
+              <a:effectLst/>
+            </a:endParaRPr>
+          </a:p>
+          <a:p>
+            <a:pPr marL="742950" lvl="1" indent="-285750" algn="l">
+              <a:buFont typeface="Arial" panose="020B0604020202020204" pitchFamily="34" charset="0"/>
+              <a:buChar char="•"/>
+            </a:pPr>
+            <a:r>
+              <a:rPr lang="en-US" b="0" i="0" u="none" strike="noStrike" dirty="0">
+                <a:solidFill>
+                  <a:srgbClr val="000000"/>
+                </a:solidFill>
+                <a:effectLst/>
+              </a:rPr>
+              <a:t>Password: Secure@1234</a:t>
+            </a:r>
+          </a:p>
+          <a:p>
+            <a:pPr algn="l">
+              <a:buFont typeface="Arial" panose="020B0604020202020204" pitchFamily="34" charset="0"/>
+              <a:buChar char="•"/>
+            </a:pPr>
+            <a:r>
+              <a:rPr lang="en-US" b="0" i="0" u="none" strike="noStrike" dirty="0">
+                <a:solidFill>
+                  <a:srgbClr val="000000"/>
+                </a:solidFill>
+                <a:effectLst/>
+              </a:rPr>
+              <a:t>Example sensitive data: Credit card number, email, or personal identifiers.</a:t>
+            </a:r>
+          </a:p>
+          <a:p>
+            <a:pPr marL="0" indent="0" algn="l">
+              <a:buNone/>
+            </a:pPr>
+            <a:r>
+              <a:rPr lang="en-US" b="1" i="0" u="none" strike="noStrike" dirty="0">
+                <a:solidFill>
+                  <a:srgbClr val="000000"/>
+                </a:solidFill>
+                <a:effectLst/>
+              </a:rPr>
+              <a:t>Test Environment:</a:t>
+            </a:r>
+          </a:p>
+          <a:p>
+            <a:pPr algn="l">
+              <a:buFont typeface="Arial" panose="020B0604020202020204" pitchFamily="34" charset="0"/>
+              <a:buChar char="•"/>
+            </a:pPr>
+            <a:r>
+              <a:rPr lang="en-US" b="0" i="0" u="none" strike="noStrike" dirty="0" err="1">
+                <a:solidFill>
+                  <a:srgbClr val="000000"/>
+                </a:solidFill>
+                <a:effectLst/>
+              </a:rPr>
+              <a:t>Corellium</a:t>
+            </a:r>
+            <a:r>
+              <a:rPr lang="en-US" b="0" i="0" u="none" strike="noStrike" dirty="0">
+                <a:solidFill>
+                  <a:srgbClr val="000000"/>
+                </a:solidFill>
+                <a:effectLst/>
+              </a:rPr>
+              <a:t> virtual device with Android or iOS.</a:t>
+            </a:r>
+          </a:p>
+          <a:p>
+            <a:pPr algn="l">
+              <a:buFont typeface="Arial" panose="020B0604020202020204" pitchFamily="34" charset="0"/>
+              <a:buChar char="•"/>
+            </a:pPr>
+            <a:r>
+              <a:rPr lang="en-US" b="0" i="0" u="none" strike="noStrike" dirty="0">
+                <a:solidFill>
+                  <a:srgbClr val="000000"/>
+                </a:solidFill>
+                <a:effectLst/>
+              </a:rPr>
+              <a:t>Network packet capture tool in </a:t>
+            </a:r>
+            <a:r>
+              <a:rPr lang="en-US" b="0" i="0" u="none" strike="noStrike" dirty="0" err="1">
+                <a:solidFill>
+                  <a:srgbClr val="000000"/>
+                </a:solidFill>
+                <a:effectLst/>
+              </a:rPr>
+              <a:t>Corellium</a:t>
+            </a:r>
+            <a:r>
+              <a:rPr lang="en-US" b="0" i="0" u="none" strike="noStrike" dirty="0">
+                <a:solidFill>
+                  <a:srgbClr val="000000"/>
+                </a:solidFill>
+                <a:effectLst/>
+              </a:rPr>
+              <a:t> for monitoring and reviewing traffic.</a:t>
+            </a:r>
+          </a:p>
+          <a:p>
+            <a:endParaRPr lang="en-US" dirty="0"/>
+          </a:p>
+        </p:txBody>
+      </p:sp>
+    </p:spTree>
+    <p:extLst>
+      <p:ext uri="{BB962C8B-B14F-4D97-AF65-F5344CB8AC3E}">
+        <p14:creationId xmlns:p14="http://schemas.microsoft.com/office/powerpoint/2010/main" val="2319139331"/>
+      </p:ext>
+    </p:extLst>
+  </p:cSld>
+  <p:clrMapOvr>
+    <a:masterClrMapping/>
+  </p:clrMapOvr>
+</p:sld>
+</file>
+
+<file path=ppt/slides/slide13.xml><?xml version="1.0" encoding="utf-8"?>
+<p:sld xmlns:a="http://schemas.openxmlformats.org/drawingml/2006/main" xmlns:r="http://schemas.openxmlformats.org/officeDocument/2006/relationships" xmlns:p="http://schemas.openxmlformats.org/presentationml/2006/main">
+  <p:cSld>
+    <p:spTree>
+      <p:nvGrpSpPr>
+        <p:cNvPr id="1" name=""/>
+        <p:cNvGrpSpPr/>
+        <p:nvPr/>
+      </p:nvGrpSpPr>
+      <p:grpSpPr>
+        <a:xfrm>
+          <a:off x="0" y="0"/>
+          <a:ext cx="0" cy="0"/>
+          <a:chOff x="0" y="0"/>
+          <a:chExt cx="0" cy="0"/>
+        </a:xfrm>
+      </p:grpSpPr>
+      <p:sp>
+        <p:nvSpPr>
+          <p:cNvPr id="2" name="Title 1">
+            <a:extLst>
+              <a:ext uri="{FF2B5EF4-FFF2-40B4-BE49-F238E27FC236}">
+                <a16:creationId xmlns:a16="http://schemas.microsoft.com/office/drawing/2014/main" id="{1B957F0A-F207-4BD2-D7FF-70B35A20FEE2}"/>
+              </a:ext>
+            </a:extLst>
+          </p:cNvPr>
+          <p:cNvSpPr>
+            <a:spLocks noGrp="1"/>
+          </p:cNvSpPr>
+          <p:nvPr>
+            <p:ph type="title"/>
+          </p:nvPr>
+        </p:nvSpPr>
+        <p:spPr/>
+        <p:txBody>
+          <a:bodyPr/>
+          <a:lstStyle/>
+          <a:p>
+            <a:r>
+              <a:rPr lang="en-US" b="0" i="0" u="none" strike="noStrike" dirty="0">
+                <a:solidFill>
+                  <a:srgbClr val="000000"/>
+                </a:solidFill>
+                <a:effectLst/>
+                <a:latin typeface="-webkit-standard"/>
+              </a:rPr>
+              <a:t>Validate Error Message Content</a:t>
+            </a:r>
+            <a:endParaRPr lang="en-US" dirty="0"/>
+          </a:p>
+        </p:txBody>
+      </p:sp>
+      <p:sp>
+        <p:nvSpPr>
+          <p:cNvPr id="3" name="Content Placeholder 2">
+            <a:extLst>
+              <a:ext uri="{FF2B5EF4-FFF2-40B4-BE49-F238E27FC236}">
+                <a16:creationId xmlns:a16="http://schemas.microsoft.com/office/drawing/2014/main" id="{4D0735E4-377F-99A3-9431-A5E4F612B585}"/>
+              </a:ext>
+            </a:extLst>
+          </p:cNvPr>
+          <p:cNvSpPr>
+            <a:spLocks noGrp="1"/>
+          </p:cNvSpPr>
+          <p:nvPr>
+            <p:ph idx="1"/>
+          </p:nvPr>
+        </p:nvSpPr>
+        <p:spPr>
+          <a:xfrm>
+            <a:off x="838200" y="1566481"/>
+            <a:ext cx="10515600" cy="4351338"/>
+          </a:xfrm>
+        </p:spPr>
+        <p:txBody>
+          <a:bodyPr>
+            <a:normAutofit fontScale="40000" lnSpcReduction="20000"/>
+          </a:bodyPr>
+          <a:lstStyle/>
+          <a:p>
+            <a:pPr marL="0" indent="0">
+              <a:buNone/>
+            </a:pPr>
+            <a:r>
+              <a:rPr lang="en-US" b="1" dirty="0"/>
+              <a:t>Test Case ID:</a:t>
+            </a:r>
+            <a:r>
+              <a:rPr lang="en-US" dirty="0"/>
+              <a:t> TC-012</a:t>
+            </a:r>
+          </a:p>
+          <a:p>
+            <a:pPr marL="0" indent="0">
+              <a:buNone/>
+            </a:pPr>
+            <a:r>
+              <a:rPr lang="en-US" b="1" dirty="0"/>
+              <a:t>Objective:</a:t>
+            </a:r>
+            <a:r>
+              <a:rPr lang="en-US" dirty="0"/>
+              <a:t> Ensure error messages are user-friendly and do not expose sensitive system details.</a:t>
+            </a:r>
+          </a:p>
+          <a:p>
+            <a:pPr marL="0" indent="0">
+              <a:buNone/>
+            </a:pPr>
+            <a:r>
+              <a:rPr lang="en-US" b="1" dirty="0" err="1"/>
+              <a:t>Pre-conditions:</a:t>
+            </a:r>
+            <a:r>
+              <a:rPr lang="en-US" dirty="0" err="1"/>
+              <a:t>APK</a:t>
+            </a:r>
+            <a:r>
+              <a:rPr lang="en-US" dirty="0"/>
+              <a:t>/AAB/IPA installed on </a:t>
+            </a:r>
+            <a:r>
+              <a:rPr lang="en-US" dirty="0" err="1"/>
+              <a:t>Corellium</a:t>
+            </a:r>
+            <a:r>
+              <a:rPr lang="en-US" dirty="0"/>
+              <a:t>.</a:t>
+            </a:r>
+          </a:p>
+          <a:p>
+            <a:pPr>
+              <a:buFont typeface="Arial" panose="020B0604020202020204" pitchFamily="34" charset="0"/>
+              <a:buChar char="•"/>
+            </a:pPr>
+            <a:r>
+              <a:rPr lang="en-US" dirty="0"/>
+              <a:t>Input fields or actions capable of triggering errors.</a:t>
+            </a:r>
+          </a:p>
+          <a:p>
+            <a:pPr marL="0" indent="0">
+              <a:buNone/>
+            </a:pPr>
+            <a:r>
+              <a:rPr lang="en-US" b="1" dirty="0" err="1"/>
+              <a:t>Steps:</a:t>
+            </a:r>
+            <a:r>
+              <a:rPr lang="en-US" dirty="0" err="1"/>
+              <a:t>Launch</a:t>
+            </a:r>
+            <a:r>
+              <a:rPr lang="en-US" dirty="0"/>
+              <a:t> the app on </a:t>
+            </a:r>
+            <a:r>
+              <a:rPr lang="en-US" dirty="0" err="1"/>
+              <a:t>Corellium</a:t>
+            </a:r>
+            <a:r>
+              <a:rPr lang="en-US" dirty="0"/>
+              <a:t>.</a:t>
+            </a:r>
+          </a:p>
+          <a:p>
+            <a:pPr>
+              <a:buFont typeface="+mj-lt"/>
+              <a:buAutoNum type="arabicPeriod"/>
+            </a:pPr>
+            <a:r>
+              <a:rPr lang="en-US" dirty="0"/>
+              <a:t>Trigger errors by:</a:t>
+            </a:r>
+          </a:p>
+          <a:p>
+            <a:pPr marL="742950" lvl="1" indent="-285750">
+              <a:buFont typeface="+mj-lt"/>
+              <a:buAutoNum type="arabicPeriod"/>
+            </a:pPr>
+            <a:r>
+              <a:rPr lang="en-US" dirty="0"/>
+              <a:t>Logging in with incorrect credentials.</a:t>
+            </a:r>
+          </a:p>
+          <a:p>
+            <a:pPr marL="742950" lvl="1" indent="-285750">
+              <a:buFont typeface="+mj-lt"/>
+              <a:buAutoNum type="arabicPeriod"/>
+            </a:pPr>
+            <a:r>
+              <a:rPr lang="en-US" dirty="0"/>
+              <a:t>Uploading invalid files (e.g., .exe).</a:t>
+            </a:r>
+          </a:p>
+          <a:p>
+            <a:pPr marL="742950" lvl="1" indent="-285750">
+              <a:buFont typeface="+mj-lt"/>
+              <a:buAutoNum type="arabicPeriod"/>
+            </a:pPr>
+            <a:r>
+              <a:rPr lang="en-US" dirty="0"/>
+              <a:t>Submitting forms with blank mandatory fields.</a:t>
+            </a:r>
+          </a:p>
+          <a:p>
+            <a:pPr marL="742950" lvl="1" indent="-285750">
+              <a:buFont typeface="+mj-lt"/>
+              <a:buAutoNum type="arabicPeriod"/>
+            </a:pPr>
+            <a:r>
+              <a:rPr lang="en-US" dirty="0"/>
+              <a:t>Forcing network failures (e.g., disconnecting the device).</a:t>
+            </a:r>
+          </a:p>
+          <a:p>
+            <a:pPr>
+              <a:buFont typeface="+mj-lt"/>
+              <a:buAutoNum type="arabicPeriod"/>
+            </a:pPr>
+            <a:r>
+              <a:rPr lang="en-US" dirty="0"/>
+              <a:t>Observe error messages displayed.</a:t>
+            </a:r>
+          </a:p>
+          <a:p>
+            <a:pPr>
+              <a:buFont typeface="+mj-lt"/>
+              <a:buAutoNum type="arabicPeriod"/>
+            </a:pPr>
+            <a:r>
+              <a:rPr lang="en-US" dirty="0"/>
+              <a:t>Verify they are user-friendly and do not expose sensitive details like stack traces or server configurations.</a:t>
+            </a:r>
+          </a:p>
+          <a:p>
+            <a:pPr marL="0" indent="0">
+              <a:buNone/>
+            </a:pPr>
+            <a:r>
+              <a:rPr lang="en-US" b="1" dirty="0"/>
+              <a:t>Expected Results:</a:t>
+            </a:r>
+          </a:p>
+          <a:p>
+            <a:pPr>
+              <a:buFont typeface="Arial" panose="020B0604020202020204" pitchFamily="34" charset="0"/>
+              <a:buChar char="•"/>
+            </a:pPr>
+            <a:r>
+              <a:rPr lang="en-US" dirty="0"/>
+              <a:t>Errors display general, user-friendly messages (e.g., "Invalid credentials").</a:t>
+            </a:r>
+          </a:p>
+          <a:p>
+            <a:pPr>
+              <a:buFont typeface="Arial" panose="020B0604020202020204" pitchFamily="34" charset="0"/>
+              <a:buChar char="•"/>
+            </a:pPr>
+            <a:r>
+              <a:rPr lang="en-US" dirty="0"/>
+              <a:t>No sensitive system information is revealed.</a:t>
+            </a:r>
+          </a:p>
+          <a:p>
+            <a:pPr marL="0" indent="0">
+              <a:buNone/>
+            </a:pPr>
+            <a:r>
+              <a:rPr lang="en-US" b="1" dirty="0"/>
+              <a:t>Test Data:</a:t>
+            </a:r>
+          </a:p>
+          <a:p>
+            <a:pPr>
+              <a:buFont typeface="Arial" panose="020B0604020202020204" pitchFamily="34" charset="0"/>
+              <a:buChar char="•"/>
+            </a:pPr>
+            <a:r>
+              <a:rPr lang="en-US" dirty="0"/>
+              <a:t>Invalid credentials: </a:t>
+            </a:r>
+            <a:r>
+              <a:rPr lang="en-US" dirty="0" err="1"/>
+              <a:t>invaliduser@example.com</a:t>
+            </a:r>
+            <a:r>
+              <a:rPr lang="en-US" dirty="0"/>
+              <a:t> / </a:t>
+            </a:r>
+            <a:r>
+              <a:rPr lang="en-US" dirty="0" err="1"/>
+              <a:t>wrongpassword</a:t>
+            </a:r>
+            <a:r>
+              <a:rPr lang="en-US" dirty="0"/>
+              <a:t>.</a:t>
+            </a:r>
+          </a:p>
+          <a:p>
+            <a:pPr>
+              <a:buFont typeface="Arial" panose="020B0604020202020204" pitchFamily="34" charset="0"/>
+              <a:buChar char="•"/>
+            </a:pPr>
+            <a:r>
+              <a:rPr lang="en-US" dirty="0"/>
+              <a:t>Unsupported files: .exe, .bat.</a:t>
+            </a:r>
+          </a:p>
+          <a:p>
+            <a:pPr marL="0" indent="0">
+              <a:buNone/>
+            </a:pPr>
+            <a:r>
+              <a:rPr lang="en-US" b="1" dirty="0"/>
+              <a:t>Test </a:t>
+            </a:r>
+            <a:r>
+              <a:rPr lang="en-US" b="1" dirty="0" err="1"/>
+              <a:t>Environment:</a:t>
+            </a:r>
+            <a:r>
+              <a:rPr lang="en-US" dirty="0" err="1"/>
+              <a:t>Corellium</a:t>
+            </a:r>
+            <a:r>
+              <a:rPr lang="en-US" dirty="0"/>
+              <a:t> virtual device with Android/iOS.</a:t>
+            </a:r>
+          </a:p>
+        </p:txBody>
+      </p:sp>
+    </p:spTree>
+    <p:extLst>
+      <p:ext uri="{BB962C8B-B14F-4D97-AF65-F5344CB8AC3E}">
+        <p14:creationId xmlns:p14="http://schemas.microsoft.com/office/powerpoint/2010/main" val="445331354"/>
+      </p:ext>
+    </p:extLst>
+  </p:cSld>
+  <p:clrMapOvr>
+    <a:masterClrMapping/>
+  </p:clrMapOvr>
+</p:sld>
+</file>
+
+<file path=ppt/slides/slide14.xml><?xml version="1.0" encoding="utf-8"?>
+<p:sld xmlns:a="http://schemas.openxmlformats.org/drawingml/2006/main" xmlns:r="http://schemas.openxmlformats.org/officeDocument/2006/relationships" xmlns:p="http://schemas.openxmlformats.org/presentationml/2006/main">
+  <p:cSld>
+    <p:spTree>
+      <p:nvGrpSpPr>
+        <p:cNvPr id="1" name=""/>
+        <p:cNvGrpSpPr/>
+        <p:nvPr/>
+      </p:nvGrpSpPr>
+      <p:grpSpPr>
+        <a:xfrm>
+          <a:off x="0" y="0"/>
+          <a:ext cx="0" cy="0"/>
+          <a:chOff x="0" y="0"/>
+          <a:chExt cx="0" cy="0"/>
+        </a:xfrm>
+      </p:grpSpPr>
+      <p:sp>
+        <p:nvSpPr>
+          <p:cNvPr id="2" name="Title 1">
+            <a:extLst>
+              <a:ext uri="{FF2B5EF4-FFF2-40B4-BE49-F238E27FC236}">
+                <a16:creationId xmlns:a16="http://schemas.microsoft.com/office/drawing/2014/main" id="{A23EAE0D-F821-1B45-4E98-0B5F9D6C41DB}"/>
+              </a:ext>
+            </a:extLst>
+          </p:cNvPr>
+          <p:cNvSpPr>
+            <a:spLocks noGrp="1"/>
+          </p:cNvSpPr>
+          <p:nvPr>
+            <p:ph type="title"/>
+          </p:nvPr>
+        </p:nvSpPr>
+        <p:spPr/>
+        <p:txBody>
+          <a:bodyPr/>
+          <a:lstStyle/>
+          <a:p>
+            <a:r>
+              <a:rPr lang="en-US" b="0" i="0" u="none" strike="noStrike" dirty="0">
+                <a:solidFill>
+                  <a:srgbClr val="000000"/>
+                </a:solidFill>
+                <a:effectLst/>
+                <a:latin typeface="-webkit-standard"/>
+              </a:rPr>
+              <a:t>Test for Device Binding</a:t>
+            </a:r>
+            <a:endParaRPr lang="en-US" dirty="0"/>
+          </a:p>
+        </p:txBody>
+      </p:sp>
+      <p:sp>
+        <p:nvSpPr>
+          <p:cNvPr id="3" name="Content Placeholder 2">
+            <a:extLst>
+              <a:ext uri="{FF2B5EF4-FFF2-40B4-BE49-F238E27FC236}">
+                <a16:creationId xmlns:a16="http://schemas.microsoft.com/office/drawing/2014/main" id="{DE159F40-4816-08A9-3227-EB730562621D}"/>
+              </a:ext>
+            </a:extLst>
+          </p:cNvPr>
+          <p:cNvSpPr>
+            <a:spLocks noGrp="1"/>
+          </p:cNvSpPr>
+          <p:nvPr>
+            <p:ph idx="1"/>
+          </p:nvPr>
+        </p:nvSpPr>
+        <p:spPr>
+          <a:xfrm>
+            <a:off x="838200" y="1825625"/>
+            <a:ext cx="10515600" cy="4863274"/>
+          </a:xfrm>
+        </p:spPr>
+        <p:txBody>
+          <a:bodyPr>
+            <a:normAutofit fontScale="47500" lnSpcReduction="20000"/>
+          </a:bodyPr>
+          <a:lstStyle/>
+          <a:p>
+            <a:pPr marL="0" indent="0" algn="l">
+              <a:buNone/>
+            </a:pPr>
+            <a:r>
+              <a:rPr lang="en-US" b="1" i="0" u="none" strike="noStrike" dirty="0">
+                <a:solidFill>
+                  <a:srgbClr val="000000"/>
+                </a:solidFill>
+                <a:effectLst/>
+              </a:rPr>
+              <a:t>Test Case ID:</a:t>
+            </a:r>
+            <a:r>
+              <a:rPr lang="en-US" b="0" i="0" u="none" strike="noStrike" dirty="0">
+                <a:solidFill>
+                  <a:srgbClr val="000000"/>
+                </a:solidFill>
+                <a:effectLst/>
+              </a:rPr>
+              <a:t> TC-013</a:t>
+            </a:r>
+          </a:p>
+          <a:p>
+            <a:pPr marL="0" indent="0" algn="l">
+              <a:buNone/>
+            </a:pPr>
+            <a:r>
+              <a:rPr lang="en-US" b="1" i="0" u="none" strike="noStrike" dirty="0">
+                <a:solidFill>
+                  <a:srgbClr val="000000"/>
+                </a:solidFill>
+                <a:effectLst/>
+              </a:rPr>
+              <a:t>Objective:</a:t>
+            </a:r>
+            <a:r>
+              <a:rPr lang="en-US" b="0" i="0" u="none" strike="noStrike" dirty="0">
+                <a:solidFill>
+                  <a:srgbClr val="000000"/>
+                </a:solidFill>
+                <a:effectLst/>
+              </a:rPr>
+              <a:t> Ensure the app enforces device binding to restrict unauthorized access and requires additional verification when the same credentials are used on a new device.</a:t>
+            </a:r>
+          </a:p>
+          <a:p>
+            <a:pPr marL="0" indent="0" algn="l">
+              <a:buNone/>
+            </a:pPr>
+            <a:r>
+              <a:rPr lang="en-US" b="1" i="0" u="none" strike="noStrike" dirty="0">
+                <a:solidFill>
+                  <a:srgbClr val="000000"/>
+                </a:solidFill>
+                <a:effectLst/>
+              </a:rPr>
+              <a:t>Pre-conditions:</a:t>
+            </a:r>
+            <a:endParaRPr lang="en-US" b="0" i="0" u="none" strike="noStrike" dirty="0">
+              <a:solidFill>
+                <a:srgbClr val="000000"/>
+              </a:solidFill>
+              <a:effectLst/>
+            </a:endParaRPr>
+          </a:p>
+          <a:p>
+            <a:pPr marL="742950" lvl="1" indent="-285750" algn="l">
+              <a:buFont typeface="Arial" panose="020B0604020202020204" pitchFamily="34" charset="0"/>
+              <a:buChar char="•"/>
+            </a:pPr>
+            <a:r>
+              <a:rPr lang="en-US" b="0" i="0" u="none" strike="noStrike" dirty="0">
+                <a:solidFill>
+                  <a:srgbClr val="000000"/>
+                </a:solidFill>
+                <a:effectLst/>
+              </a:rPr>
+              <a:t>APK/AAB/IPA installed on multiple </a:t>
+            </a:r>
+            <a:r>
+              <a:rPr lang="en-US" b="0" i="0" u="none" strike="noStrike" dirty="0" err="1">
+                <a:solidFill>
+                  <a:srgbClr val="000000"/>
+                </a:solidFill>
+                <a:effectLst/>
+              </a:rPr>
+              <a:t>Corellium</a:t>
+            </a:r>
+            <a:r>
+              <a:rPr lang="en-US" b="0" i="0" u="none" strike="noStrike" dirty="0">
+                <a:solidFill>
+                  <a:srgbClr val="000000"/>
+                </a:solidFill>
+                <a:effectLst/>
+              </a:rPr>
+              <a:t> virtual devices.</a:t>
+            </a:r>
+          </a:p>
+          <a:p>
+            <a:pPr marL="742950" lvl="1" indent="-285750" algn="l">
+              <a:buFont typeface="Arial" panose="020B0604020202020204" pitchFamily="34" charset="0"/>
+              <a:buChar char="•"/>
+            </a:pPr>
+            <a:r>
+              <a:rPr lang="en-US" b="0" i="0" u="none" strike="noStrike" dirty="0">
+                <a:solidFill>
+                  <a:srgbClr val="000000"/>
+                </a:solidFill>
+                <a:effectLst/>
+              </a:rPr>
+              <a:t>Valid user credentials for the app.</a:t>
+            </a:r>
+          </a:p>
+          <a:p>
+            <a:pPr marL="0" indent="0" algn="l">
+              <a:buNone/>
+            </a:pPr>
+            <a:r>
+              <a:rPr lang="en-US" b="1" i="0" u="none" strike="noStrike" dirty="0">
+                <a:solidFill>
+                  <a:srgbClr val="000000"/>
+                </a:solidFill>
+                <a:effectLst/>
+              </a:rPr>
+              <a:t>Steps:</a:t>
+            </a:r>
+            <a:endParaRPr lang="en-US" b="0" i="0" u="none" strike="noStrike" dirty="0">
+              <a:solidFill>
+                <a:srgbClr val="000000"/>
+              </a:solidFill>
+              <a:effectLst/>
+            </a:endParaRPr>
+          </a:p>
+          <a:p>
+            <a:pPr marL="742950" lvl="1" indent="-285750" algn="l">
+              <a:buFont typeface="Arial" panose="020B0604020202020204" pitchFamily="34" charset="0"/>
+              <a:buChar char="•"/>
+            </a:pPr>
+            <a:r>
+              <a:rPr lang="en-US" b="0" i="0" u="none" strike="noStrike" dirty="0">
+                <a:solidFill>
+                  <a:srgbClr val="000000"/>
+                </a:solidFill>
+                <a:effectLst/>
+              </a:rPr>
+              <a:t>Launch the app on one </a:t>
+            </a:r>
+            <a:r>
+              <a:rPr lang="en-US" b="0" i="0" u="none" strike="noStrike" dirty="0" err="1">
+                <a:solidFill>
+                  <a:srgbClr val="000000"/>
+                </a:solidFill>
+                <a:effectLst/>
+              </a:rPr>
+              <a:t>Corellium</a:t>
+            </a:r>
+            <a:r>
+              <a:rPr lang="en-US" b="0" i="0" u="none" strike="noStrike" dirty="0">
+                <a:solidFill>
+                  <a:srgbClr val="000000"/>
+                </a:solidFill>
+                <a:effectLst/>
+              </a:rPr>
+              <a:t> virtual device and log in with valid credentials.</a:t>
+            </a:r>
+          </a:p>
+          <a:p>
+            <a:pPr marL="742950" lvl="1" indent="-285750" algn="l">
+              <a:buFont typeface="Arial" panose="020B0604020202020204" pitchFamily="34" charset="0"/>
+              <a:buChar char="•"/>
+            </a:pPr>
+            <a:r>
+              <a:rPr lang="en-US" b="0" i="0" u="none" strike="noStrike" dirty="0">
+                <a:solidFill>
+                  <a:srgbClr val="000000"/>
+                </a:solidFill>
+                <a:effectLst/>
+              </a:rPr>
+              <a:t>Launch the app on a second </a:t>
+            </a:r>
+            <a:r>
+              <a:rPr lang="en-US" b="0" i="0" u="none" strike="noStrike" dirty="0" err="1">
+                <a:solidFill>
+                  <a:srgbClr val="000000"/>
+                </a:solidFill>
+                <a:effectLst/>
+              </a:rPr>
+              <a:t>Corellium</a:t>
+            </a:r>
+            <a:r>
+              <a:rPr lang="en-US" b="0" i="0" u="none" strike="noStrike" dirty="0">
+                <a:solidFill>
+                  <a:srgbClr val="000000"/>
+                </a:solidFill>
+                <a:effectLst/>
+              </a:rPr>
+              <a:t> virtual device and attempt to log in using the same credentials.</a:t>
+            </a:r>
+          </a:p>
+          <a:p>
+            <a:pPr marL="742950" lvl="1" indent="-285750" algn="l">
+              <a:buFont typeface="Arial" panose="020B0604020202020204" pitchFamily="34" charset="0"/>
+              <a:buChar char="•"/>
+            </a:pPr>
+            <a:r>
+              <a:rPr lang="en-US" b="0" i="0" u="none" strike="noStrike" dirty="0">
+                <a:solidFill>
+                  <a:srgbClr val="000000"/>
+                </a:solidFill>
+                <a:effectLst/>
+              </a:rPr>
+              <a:t>Verify the app's behavior:</a:t>
+            </a:r>
+          </a:p>
+          <a:p>
+            <a:pPr marL="1143000" lvl="2" indent="-228600" algn="l">
+              <a:buFont typeface="Arial" panose="020B0604020202020204" pitchFamily="34" charset="0"/>
+              <a:buChar char="•"/>
+            </a:pPr>
+            <a:r>
+              <a:rPr lang="en-US" b="0" i="0" u="none" strike="noStrike" dirty="0">
+                <a:solidFill>
+                  <a:srgbClr val="000000"/>
+                </a:solidFill>
+                <a:effectLst/>
+              </a:rPr>
+              <a:t>Restricts access on the second device.</a:t>
+            </a:r>
+          </a:p>
+          <a:p>
+            <a:pPr marL="1143000" lvl="2" indent="-228600" algn="l">
+              <a:buFont typeface="Arial" panose="020B0604020202020204" pitchFamily="34" charset="0"/>
+              <a:buChar char="•"/>
+            </a:pPr>
+            <a:r>
+              <a:rPr lang="en-US" b="0" i="0" u="none" strike="noStrike" dirty="0">
+                <a:solidFill>
+                  <a:srgbClr val="000000"/>
+                </a:solidFill>
+                <a:effectLst/>
+              </a:rPr>
+              <a:t>Sends a notification or requires additional verification (e.g., OTP or email confirmation) on the original device.</a:t>
+            </a:r>
+          </a:p>
+          <a:p>
+            <a:pPr marL="0" indent="0" algn="l">
+              <a:buNone/>
+            </a:pPr>
+            <a:r>
+              <a:rPr lang="en-US" b="1" i="0" u="none" strike="noStrike" dirty="0">
+                <a:solidFill>
+                  <a:srgbClr val="000000"/>
+                </a:solidFill>
+                <a:effectLst/>
+              </a:rPr>
+              <a:t>Expected Results:</a:t>
+            </a:r>
+            <a:endParaRPr lang="en-US" b="0" i="0" u="none" strike="noStrike" dirty="0">
+              <a:solidFill>
+                <a:srgbClr val="000000"/>
+              </a:solidFill>
+              <a:effectLst/>
+            </a:endParaRPr>
+          </a:p>
+          <a:p>
+            <a:pPr marL="742950" lvl="1" indent="-285750" algn="l">
+              <a:buFont typeface="Arial" panose="020B0604020202020204" pitchFamily="34" charset="0"/>
+              <a:buChar char="•"/>
+            </a:pPr>
+            <a:r>
+              <a:rPr lang="en-US" b="0" i="0" u="none" strike="noStrike" dirty="0">
+                <a:solidFill>
+                  <a:srgbClr val="000000"/>
+                </a:solidFill>
+                <a:effectLst/>
+              </a:rPr>
+              <a:t>The app restricts access on the new device unless additional verification is completed.</a:t>
+            </a:r>
+          </a:p>
+          <a:p>
+            <a:pPr marL="742950" lvl="1" indent="-285750" algn="l">
+              <a:buFont typeface="Arial" panose="020B0604020202020204" pitchFamily="34" charset="0"/>
+              <a:buChar char="•"/>
+            </a:pPr>
+            <a:r>
+              <a:rPr lang="en-US" b="0" i="0" u="none" strike="noStrike" dirty="0">
+                <a:solidFill>
+                  <a:srgbClr val="000000"/>
+                </a:solidFill>
+                <a:effectLst/>
+              </a:rPr>
+              <a:t>Notifications or verification prompts are sent to the original device.</a:t>
+            </a:r>
+          </a:p>
+          <a:p>
+            <a:pPr marL="742950" lvl="1" indent="-285750" algn="l">
+              <a:buFont typeface="Arial" panose="020B0604020202020204" pitchFamily="34" charset="0"/>
+              <a:buChar char="•"/>
+            </a:pPr>
+            <a:r>
+              <a:rPr lang="en-US" b="0" i="0" u="none" strike="noStrike" dirty="0">
+                <a:solidFill>
+                  <a:srgbClr val="000000"/>
+                </a:solidFill>
+                <a:effectLst/>
+              </a:rPr>
+              <a:t>No unauthorized session is created on the second device.</a:t>
+            </a:r>
+          </a:p>
+          <a:p>
+            <a:pPr marL="0" indent="0" algn="l">
+              <a:buNone/>
+            </a:pPr>
+            <a:r>
+              <a:rPr lang="en-US" b="1" i="0" u="none" strike="noStrike" dirty="0">
+                <a:solidFill>
+                  <a:srgbClr val="000000"/>
+                </a:solidFill>
+                <a:effectLst/>
+              </a:rPr>
+              <a:t>Test Data:</a:t>
+            </a:r>
+            <a:endParaRPr lang="en-US" b="0" i="0" u="none" strike="noStrike" dirty="0">
+              <a:solidFill>
+                <a:srgbClr val="000000"/>
+              </a:solidFill>
+              <a:effectLst/>
+            </a:endParaRPr>
+          </a:p>
+          <a:p>
+            <a:pPr marL="742950" lvl="1" indent="-285750" algn="l">
+              <a:buFont typeface="Arial" panose="020B0604020202020204" pitchFamily="34" charset="0"/>
+              <a:buChar char="•"/>
+            </a:pPr>
+            <a:r>
+              <a:rPr lang="en-US" b="0" i="0" u="none" strike="noStrike" dirty="0">
+                <a:solidFill>
+                  <a:srgbClr val="000000"/>
+                </a:solidFill>
+                <a:effectLst/>
+              </a:rPr>
+              <a:t>Valid credentials:</a:t>
+            </a:r>
+          </a:p>
+          <a:p>
+            <a:pPr marL="1143000" lvl="2" indent="-228600" algn="l">
+              <a:buFont typeface="Arial" panose="020B0604020202020204" pitchFamily="34" charset="0"/>
+              <a:buChar char="•"/>
+            </a:pPr>
+            <a:r>
+              <a:rPr lang="en-US" b="0" i="0" u="none" strike="noStrike" dirty="0">
+                <a:solidFill>
+                  <a:srgbClr val="000000"/>
+                </a:solidFill>
+                <a:effectLst/>
+              </a:rPr>
+              <a:t>Username: </a:t>
+            </a:r>
+            <a:r>
+              <a:rPr lang="en-US" b="0" i="0" u="none" strike="noStrike" dirty="0" err="1">
+                <a:solidFill>
+                  <a:srgbClr val="000000"/>
+                </a:solidFill>
+                <a:effectLst/>
+              </a:rPr>
+              <a:t>testuser@example.com</a:t>
+            </a:r>
+            <a:endParaRPr lang="en-US" b="0" i="0" u="none" strike="noStrike" dirty="0">
+              <a:solidFill>
+                <a:srgbClr val="000000"/>
+              </a:solidFill>
+              <a:effectLst/>
+            </a:endParaRPr>
+          </a:p>
+          <a:p>
+            <a:pPr marL="1143000" lvl="2" indent="-228600" algn="l">
+              <a:buFont typeface="Arial" panose="020B0604020202020204" pitchFamily="34" charset="0"/>
+              <a:buChar char="•"/>
+            </a:pPr>
+            <a:r>
+              <a:rPr lang="en-US" b="0" i="0" u="none" strike="noStrike" dirty="0">
+                <a:solidFill>
+                  <a:srgbClr val="000000"/>
+                </a:solidFill>
+                <a:effectLst/>
+              </a:rPr>
+              <a:t>Password: Secure@1234</a:t>
+            </a:r>
+          </a:p>
+          <a:p>
+            <a:pPr marL="0" indent="0" algn="l">
+              <a:buNone/>
+            </a:pPr>
+            <a:r>
+              <a:rPr lang="en-US" b="1" i="0" u="none" strike="noStrike" dirty="0">
+                <a:solidFill>
+                  <a:srgbClr val="000000"/>
+                </a:solidFill>
+                <a:effectLst/>
+              </a:rPr>
+              <a:t>Test Environment:</a:t>
+            </a:r>
+            <a:endParaRPr lang="en-US" b="0" i="0" u="none" strike="noStrike" dirty="0">
+              <a:solidFill>
+                <a:srgbClr val="000000"/>
+              </a:solidFill>
+              <a:effectLst/>
+            </a:endParaRPr>
+          </a:p>
+          <a:p>
+            <a:pPr marL="742950" lvl="1" indent="-285750" algn="l">
+              <a:buFont typeface="Arial" panose="020B0604020202020204" pitchFamily="34" charset="0"/>
+              <a:buChar char="•"/>
+            </a:pPr>
+            <a:r>
+              <a:rPr lang="en-US" b="0" i="0" u="none" strike="noStrike" dirty="0" err="1">
+                <a:solidFill>
+                  <a:srgbClr val="000000"/>
+                </a:solidFill>
+                <a:effectLst/>
+              </a:rPr>
+              <a:t>Corellium</a:t>
+            </a:r>
+            <a:r>
+              <a:rPr lang="en-US" b="0" i="0" u="none" strike="noStrike" dirty="0">
+                <a:solidFill>
+                  <a:srgbClr val="000000"/>
+                </a:solidFill>
+                <a:effectLst/>
+              </a:rPr>
+              <a:t> virtual devices with Android/iOS.</a:t>
+            </a:r>
+          </a:p>
+          <a:p>
+            <a:pPr marL="742950" lvl="1" indent="-285750" algn="l">
+              <a:buFont typeface="Arial" panose="020B0604020202020204" pitchFamily="34" charset="0"/>
+              <a:buChar char="•"/>
+            </a:pPr>
+            <a:r>
+              <a:rPr lang="en-US" b="0" i="0" u="none" strike="noStrike" dirty="0">
+                <a:solidFill>
+                  <a:srgbClr val="000000"/>
+                </a:solidFill>
+                <a:effectLst/>
+              </a:rPr>
+              <a:t>Network connectivity enabled for both devices.</a:t>
+            </a:r>
+          </a:p>
+        </p:txBody>
+      </p:sp>
+    </p:spTree>
+    <p:extLst>
+      <p:ext uri="{BB962C8B-B14F-4D97-AF65-F5344CB8AC3E}">
+        <p14:creationId xmlns:p14="http://schemas.microsoft.com/office/powerpoint/2010/main" val="2382488400"/>
+      </p:ext>
+    </p:extLst>
+  </p:cSld>
+  <p:clrMapOvr>
+    <a:masterClrMapping/>
+  </p:clrMapOvr>
+</p:sld>
+</file>
+
+<file path=ppt/slides/slide15.xml><?xml version="1.0" encoding="utf-8"?>
+<p:sld xmlns:a="http://schemas.openxmlformats.org/drawingml/2006/main" xmlns:r="http://schemas.openxmlformats.org/officeDocument/2006/relationships" xmlns:p="http://schemas.openxmlformats.org/presentationml/2006/main">
+  <p:cSld>
+    <p:spTree>
+      <p:nvGrpSpPr>
+        <p:cNvPr id="1" name=""/>
+        <p:cNvGrpSpPr/>
+        <p:nvPr/>
+      </p:nvGrpSpPr>
+      <p:grpSpPr>
+        <a:xfrm>
+          <a:off x="0" y="0"/>
+          <a:ext cx="0" cy="0"/>
+          <a:chOff x="0" y="0"/>
+          <a:chExt cx="0" cy="0"/>
+        </a:xfrm>
+      </p:grpSpPr>
+      <p:sp>
+        <p:nvSpPr>
+          <p:cNvPr id="2" name="Title 1">
+            <a:extLst>
+              <a:ext uri="{FF2B5EF4-FFF2-40B4-BE49-F238E27FC236}">
+                <a16:creationId xmlns:a16="http://schemas.microsoft.com/office/drawing/2014/main" id="{DCDBEF9E-8346-2142-2DA4-400A32783402}"/>
+              </a:ext>
+            </a:extLst>
+          </p:cNvPr>
+          <p:cNvSpPr>
+            <a:spLocks noGrp="1"/>
+          </p:cNvSpPr>
+          <p:nvPr>
+            <p:ph type="title"/>
+          </p:nvPr>
+        </p:nvSpPr>
+        <p:spPr/>
+        <p:txBody>
+          <a:bodyPr/>
+          <a:lstStyle/>
+          <a:p>
+            <a:r>
+              <a:rPr lang="en-US" b="0" i="0" u="none" strike="noStrike" dirty="0">
+                <a:solidFill>
+                  <a:srgbClr val="000000"/>
+                </a:solidFill>
+                <a:effectLst/>
+                <a:latin typeface="-webkit-standard"/>
+              </a:rPr>
+              <a:t>Test App Permissions</a:t>
+            </a:r>
+            <a:endParaRPr lang="en-US" dirty="0"/>
+          </a:p>
+        </p:txBody>
+      </p:sp>
+      <p:sp>
+        <p:nvSpPr>
+          <p:cNvPr id="3" name="Content Placeholder 2">
+            <a:extLst>
+              <a:ext uri="{FF2B5EF4-FFF2-40B4-BE49-F238E27FC236}">
+                <a16:creationId xmlns:a16="http://schemas.microsoft.com/office/drawing/2014/main" id="{D68C9882-FA9B-894F-9965-6EB86B76EF65}"/>
+              </a:ext>
+            </a:extLst>
+          </p:cNvPr>
+          <p:cNvSpPr>
+            <a:spLocks noGrp="1"/>
+          </p:cNvSpPr>
+          <p:nvPr>
+            <p:ph idx="1"/>
+          </p:nvPr>
+        </p:nvSpPr>
+        <p:spPr/>
+        <p:txBody>
+          <a:bodyPr>
+            <a:normAutofit fontScale="47500" lnSpcReduction="20000"/>
+          </a:bodyPr>
+          <a:lstStyle/>
+          <a:p>
+            <a:pPr marL="0" indent="0" algn="l">
+              <a:buNone/>
+            </a:pPr>
+            <a:r>
+              <a:rPr lang="en-US" b="1" i="0" u="none" strike="noStrike" dirty="0">
+                <a:solidFill>
+                  <a:srgbClr val="000000"/>
+                </a:solidFill>
+                <a:effectLst/>
+              </a:rPr>
+              <a:t>Test Case ID:</a:t>
+            </a:r>
+            <a:r>
+              <a:rPr lang="en-US" b="0" i="0" u="none" strike="noStrike" dirty="0">
+                <a:solidFill>
+                  <a:srgbClr val="000000"/>
+                </a:solidFill>
+                <a:effectLst/>
+              </a:rPr>
+              <a:t> TC-014</a:t>
+            </a:r>
+          </a:p>
+          <a:p>
+            <a:pPr marL="0" indent="0" algn="l">
+              <a:buNone/>
+            </a:pPr>
+            <a:r>
+              <a:rPr lang="en-US" b="1" i="0" u="none" strike="noStrike" dirty="0">
+                <a:solidFill>
+                  <a:srgbClr val="000000"/>
+                </a:solidFill>
+                <a:effectLst/>
+              </a:rPr>
+              <a:t>Objective:</a:t>
+            </a:r>
+            <a:r>
+              <a:rPr lang="en-US" b="0" i="0" u="none" strike="noStrike" dirty="0">
+                <a:solidFill>
+                  <a:srgbClr val="000000"/>
+                </a:solidFill>
+                <a:effectLst/>
+              </a:rPr>
+              <a:t> Verify that the app requests only relevant permissions and functions properly even if unnecessary permissions are denied.</a:t>
+            </a:r>
+          </a:p>
+          <a:p>
+            <a:pPr marL="0" indent="0" algn="l">
+              <a:buNone/>
+            </a:pPr>
+            <a:r>
+              <a:rPr lang="en-US" b="1" i="0" u="none" strike="noStrike" dirty="0">
+                <a:solidFill>
+                  <a:srgbClr val="000000"/>
+                </a:solidFill>
+                <a:effectLst/>
+              </a:rPr>
+              <a:t>Pre-conditions:</a:t>
+            </a:r>
+            <a:endParaRPr lang="en-US" b="0" i="0" u="none" strike="noStrike" dirty="0">
+              <a:solidFill>
+                <a:srgbClr val="000000"/>
+              </a:solidFill>
+              <a:effectLst/>
+            </a:endParaRPr>
+          </a:p>
+          <a:p>
+            <a:pPr marL="742950" lvl="1" indent="-285750" algn="l">
+              <a:buFont typeface="Arial" panose="020B0604020202020204" pitchFamily="34" charset="0"/>
+              <a:buChar char="•"/>
+            </a:pPr>
+            <a:r>
+              <a:rPr lang="en-US" b="0" i="0" u="none" strike="noStrike" dirty="0">
+                <a:solidFill>
+                  <a:srgbClr val="000000"/>
+                </a:solidFill>
+                <a:effectLst/>
+              </a:rPr>
+              <a:t>APK/AAB/IPA file installed on the </a:t>
+            </a:r>
+            <a:r>
+              <a:rPr lang="en-US" b="0" i="0" u="none" strike="noStrike" dirty="0" err="1">
+                <a:solidFill>
+                  <a:srgbClr val="000000"/>
+                </a:solidFill>
+                <a:effectLst/>
+              </a:rPr>
+              <a:t>Corellium</a:t>
+            </a:r>
+            <a:r>
+              <a:rPr lang="en-US" b="0" i="0" u="none" strike="noStrike" dirty="0">
+                <a:solidFill>
+                  <a:srgbClr val="000000"/>
+                </a:solidFill>
+                <a:effectLst/>
+              </a:rPr>
+              <a:t> virtual device.</a:t>
+            </a:r>
+          </a:p>
+          <a:p>
+            <a:pPr marL="742950" lvl="1" indent="-285750" algn="l">
+              <a:buFont typeface="Arial" panose="020B0604020202020204" pitchFamily="34" charset="0"/>
+              <a:buChar char="•"/>
+            </a:pPr>
+            <a:r>
+              <a:rPr lang="en-US" b="0" i="0" u="none" strike="noStrike" dirty="0">
+                <a:solidFill>
+                  <a:srgbClr val="000000"/>
+                </a:solidFill>
+                <a:effectLst/>
+              </a:rPr>
+              <a:t>Access to </a:t>
+            </a:r>
+            <a:r>
+              <a:rPr lang="en-US" b="0" i="0" u="none" strike="noStrike" dirty="0" err="1">
+                <a:solidFill>
+                  <a:srgbClr val="000000"/>
+                </a:solidFill>
+                <a:effectLst/>
+              </a:rPr>
+              <a:t>Corellium’s</a:t>
+            </a:r>
+            <a:r>
+              <a:rPr lang="en-US" b="0" i="0" u="none" strike="noStrike" dirty="0">
+                <a:solidFill>
+                  <a:srgbClr val="000000"/>
+                </a:solidFill>
+                <a:effectLst/>
+              </a:rPr>
+              <a:t> permission explorer.</a:t>
+            </a:r>
+          </a:p>
+          <a:p>
+            <a:pPr marL="0" indent="0" algn="l">
+              <a:buNone/>
+            </a:pPr>
+            <a:r>
+              <a:rPr lang="en-US" b="1" i="0" u="none" strike="noStrike" dirty="0">
+                <a:solidFill>
+                  <a:srgbClr val="000000"/>
+                </a:solidFill>
+                <a:effectLst/>
+              </a:rPr>
+              <a:t>Steps:</a:t>
+            </a:r>
+            <a:endParaRPr lang="en-US" b="0" i="0" u="none" strike="noStrike" dirty="0">
+              <a:solidFill>
+                <a:srgbClr val="000000"/>
+              </a:solidFill>
+              <a:effectLst/>
+            </a:endParaRPr>
+          </a:p>
+          <a:p>
+            <a:pPr marL="742950" lvl="1" indent="-285750" algn="l">
+              <a:buFont typeface="Arial" panose="020B0604020202020204" pitchFamily="34" charset="0"/>
+              <a:buChar char="•"/>
+            </a:pPr>
+            <a:r>
+              <a:rPr lang="en-US" b="0" i="0" u="none" strike="noStrike" dirty="0">
+                <a:solidFill>
+                  <a:srgbClr val="000000"/>
+                </a:solidFill>
+                <a:effectLst/>
+              </a:rPr>
+              <a:t>Launch the app installation process on </a:t>
+            </a:r>
+            <a:r>
+              <a:rPr lang="en-US" b="0" i="0" u="none" strike="noStrike" dirty="0" err="1">
+                <a:solidFill>
+                  <a:srgbClr val="000000"/>
+                </a:solidFill>
+                <a:effectLst/>
+              </a:rPr>
+              <a:t>Corellium</a:t>
+            </a:r>
+            <a:r>
+              <a:rPr lang="en-US" b="0" i="0" u="none" strike="noStrike" dirty="0">
+                <a:solidFill>
+                  <a:srgbClr val="000000"/>
+                </a:solidFill>
+                <a:effectLst/>
+              </a:rPr>
+              <a:t> and observe the permissions requested.</a:t>
+            </a:r>
+          </a:p>
+          <a:p>
+            <a:pPr marL="742950" lvl="1" indent="-285750" algn="l">
+              <a:buFont typeface="Arial" panose="020B0604020202020204" pitchFamily="34" charset="0"/>
+              <a:buChar char="•"/>
+            </a:pPr>
+            <a:r>
+              <a:rPr lang="en-US" b="0" i="0" u="none" strike="noStrike" dirty="0">
+                <a:solidFill>
+                  <a:srgbClr val="000000"/>
+                </a:solidFill>
+                <a:effectLst/>
+              </a:rPr>
+              <a:t>Use </a:t>
+            </a:r>
+            <a:r>
+              <a:rPr lang="en-US" b="0" i="0" u="none" strike="noStrike" dirty="0" err="1">
+                <a:solidFill>
+                  <a:srgbClr val="000000"/>
+                </a:solidFill>
+                <a:effectLst/>
+              </a:rPr>
+              <a:t>Corellium's</a:t>
+            </a:r>
+            <a:r>
+              <a:rPr lang="en-US" b="0" i="0" u="none" strike="noStrike" dirty="0">
+                <a:solidFill>
+                  <a:srgbClr val="000000"/>
+                </a:solidFill>
+                <a:effectLst/>
+              </a:rPr>
+              <a:t> permission explorer to review all granted permissions.</a:t>
+            </a:r>
+          </a:p>
+          <a:p>
+            <a:pPr marL="742950" lvl="1" indent="-285750" algn="l">
+              <a:buFont typeface="Arial" panose="020B0604020202020204" pitchFamily="34" charset="0"/>
+              <a:buChar char="•"/>
+            </a:pPr>
+            <a:r>
+              <a:rPr lang="en-US" b="0" i="0" u="none" strike="noStrike" dirty="0">
+                <a:solidFill>
+                  <a:srgbClr val="000000"/>
+                </a:solidFill>
+                <a:effectLst/>
+              </a:rPr>
+              <a:t>Verify whether the requested permissions are relevant to the app’s core functionality.</a:t>
+            </a:r>
+          </a:p>
+          <a:p>
+            <a:pPr marL="742950" lvl="1" indent="-285750" algn="l">
+              <a:buFont typeface="Arial" panose="020B0604020202020204" pitchFamily="34" charset="0"/>
+              <a:buChar char="•"/>
+            </a:pPr>
+            <a:r>
+              <a:rPr lang="en-US" b="0" i="0" u="none" strike="noStrike" dirty="0">
+                <a:solidFill>
+                  <a:srgbClr val="000000"/>
+                </a:solidFill>
+                <a:effectLst/>
+              </a:rPr>
+              <a:t>Deny unnecessary permissions (e.g., location, camera) using </a:t>
+            </a:r>
+            <a:r>
+              <a:rPr lang="en-US" b="0" i="0" u="none" strike="noStrike" dirty="0" err="1">
+                <a:solidFill>
+                  <a:srgbClr val="000000"/>
+                </a:solidFill>
+                <a:effectLst/>
+              </a:rPr>
+              <a:t>Corellium’s</a:t>
+            </a:r>
+            <a:r>
+              <a:rPr lang="en-US" b="0" i="0" u="none" strike="noStrike" dirty="0">
+                <a:solidFill>
+                  <a:srgbClr val="000000"/>
+                </a:solidFill>
+                <a:effectLst/>
+              </a:rPr>
+              <a:t> permission controls.</a:t>
+            </a:r>
+          </a:p>
+          <a:p>
+            <a:pPr marL="742950" lvl="1" indent="-285750" algn="l">
+              <a:buFont typeface="Arial" panose="020B0604020202020204" pitchFamily="34" charset="0"/>
+              <a:buChar char="•"/>
+            </a:pPr>
+            <a:r>
+              <a:rPr lang="en-US" b="0" i="0" u="none" strike="noStrike" dirty="0">
+                <a:solidFill>
+                  <a:srgbClr val="000000"/>
+                </a:solidFill>
+                <a:effectLst/>
+              </a:rPr>
+              <a:t>Test app functionality after denying unnecessary permissions to ensure it handles the restrictions gracefully.</a:t>
+            </a:r>
+          </a:p>
+          <a:p>
+            <a:pPr marL="0" indent="0" algn="l">
+              <a:buNone/>
+            </a:pPr>
+            <a:r>
+              <a:rPr lang="en-US" b="1" i="0" u="none" strike="noStrike" dirty="0">
+                <a:solidFill>
+                  <a:srgbClr val="000000"/>
+                </a:solidFill>
+                <a:effectLst/>
+              </a:rPr>
+              <a:t>Expected Results:</a:t>
+            </a:r>
+            <a:endParaRPr lang="en-US" b="0" i="0" u="none" strike="noStrike" dirty="0">
+              <a:solidFill>
+                <a:srgbClr val="000000"/>
+              </a:solidFill>
+              <a:effectLst/>
+            </a:endParaRPr>
+          </a:p>
+          <a:p>
+            <a:pPr marL="742950" lvl="1" indent="-285750" algn="l">
+              <a:buFont typeface="Arial" panose="020B0604020202020204" pitchFamily="34" charset="0"/>
+              <a:buChar char="•"/>
+            </a:pPr>
+            <a:r>
+              <a:rPr lang="en-US" b="0" i="0" u="none" strike="noStrike" dirty="0">
+                <a:solidFill>
+                  <a:srgbClr val="000000"/>
+                </a:solidFill>
+                <a:effectLst/>
+              </a:rPr>
+              <a:t>The app requests only necessary permissions relevant to its functionality.</a:t>
+            </a:r>
+          </a:p>
+          <a:p>
+            <a:pPr marL="742950" lvl="1" indent="-285750" algn="l">
+              <a:buFont typeface="Arial" panose="020B0604020202020204" pitchFamily="34" charset="0"/>
+              <a:buChar char="•"/>
+            </a:pPr>
+            <a:r>
+              <a:rPr lang="en-US" b="0" i="0" u="none" strike="noStrike" dirty="0">
+                <a:solidFill>
+                  <a:srgbClr val="000000"/>
+                </a:solidFill>
+                <a:effectLst/>
+              </a:rPr>
+              <a:t>The app functions correctly when unnecessary permissions are denied, without crashing or behaving unexpectedly.</a:t>
+            </a:r>
+          </a:p>
+          <a:p>
+            <a:pPr marL="742950" lvl="1" indent="-285750" algn="l">
+              <a:buFont typeface="Arial" panose="020B0604020202020204" pitchFamily="34" charset="0"/>
+              <a:buChar char="•"/>
+            </a:pPr>
+            <a:r>
+              <a:rPr lang="en-US" b="0" i="0" u="none" strike="noStrike" dirty="0">
+                <a:solidFill>
+                  <a:srgbClr val="000000"/>
+                </a:solidFill>
+                <a:effectLst/>
+              </a:rPr>
+              <a:t>Unnecessary permissions (if requested) should not impact the core functionality when denied.</a:t>
+            </a:r>
+          </a:p>
+          <a:p>
+            <a:pPr marL="0" indent="0" algn="l">
+              <a:buNone/>
+            </a:pPr>
+            <a:r>
+              <a:rPr lang="en-US" b="1" i="0" u="none" strike="noStrike" dirty="0">
+                <a:solidFill>
+                  <a:srgbClr val="000000"/>
+                </a:solidFill>
+                <a:effectLst/>
+              </a:rPr>
+              <a:t>Test Data:</a:t>
+            </a:r>
+            <a:endParaRPr lang="en-US" b="0" i="0" u="none" strike="noStrike" dirty="0">
+              <a:solidFill>
+                <a:srgbClr val="000000"/>
+              </a:solidFill>
+              <a:effectLst/>
+            </a:endParaRPr>
+          </a:p>
+          <a:p>
+            <a:pPr marL="742950" lvl="1" indent="-285750" algn="l">
+              <a:buFont typeface="Arial" panose="020B0604020202020204" pitchFamily="34" charset="0"/>
+              <a:buChar char="•"/>
+            </a:pPr>
+            <a:r>
+              <a:rPr lang="en-US" b="0" i="0" u="none" strike="noStrike" dirty="0">
+                <a:solidFill>
+                  <a:srgbClr val="000000"/>
+                </a:solidFill>
+                <a:effectLst/>
+              </a:rPr>
+              <a:t>App's permission request list (e.g., location, storage, camera).</a:t>
+            </a:r>
+          </a:p>
+          <a:p>
+            <a:pPr marL="0" indent="0" algn="l">
+              <a:buNone/>
+            </a:pPr>
+            <a:r>
+              <a:rPr lang="en-US" b="1" i="0" u="none" strike="noStrike" dirty="0">
+                <a:solidFill>
+                  <a:srgbClr val="000000"/>
+                </a:solidFill>
+                <a:effectLst/>
+              </a:rPr>
+              <a:t>Test Environment:</a:t>
+            </a:r>
+            <a:endParaRPr lang="en-US" b="0" i="0" u="none" strike="noStrike" dirty="0">
+              <a:solidFill>
+                <a:srgbClr val="000000"/>
+              </a:solidFill>
+              <a:effectLst/>
+            </a:endParaRPr>
+          </a:p>
+          <a:p>
+            <a:pPr marL="742950" lvl="1" indent="-285750" algn="l">
+              <a:buFont typeface="Arial" panose="020B0604020202020204" pitchFamily="34" charset="0"/>
+              <a:buChar char="•"/>
+            </a:pPr>
+            <a:r>
+              <a:rPr lang="en-US" b="0" i="0" u="none" strike="noStrike" dirty="0" err="1">
+                <a:solidFill>
+                  <a:srgbClr val="000000"/>
+                </a:solidFill>
+                <a:effectLst/>
+              </a:rPr>
+              <a:t>Corellium</a:t>
+            </a:r>
+            <a:r>
+              <a:rPr lang="en-US" b="0" i="0" u="none" strike="noStrike" dirty="0">
+                <a:solidFill>
+                  <a:srgbClr val="000000"/>
+                </a:solidFill>
+                <a:effectLst/>
+              </a:rPr>
+              <a:t> virtual device with Android/iOS.</a:t>
+            </a:r>
+          </a:p>
+          <a:p>
+            <a:pPr marL="742950" lvl="1" indent="-285750" algn="l">
+              <a:buFont typeface="Arial" panose="020B0604020202020204" pitchFamily="34" charset="0"/>
+              <a:buChar char="•"/>
+            </a:pPr>
+            <a:r>
+              <a:rPr lang="en-US" b="0" i="0" u="none" strike="noStrike" dirty="0">
+                <a:solidFill>
+                  <a:srgbClr val="000000"/>
+                </a:solidFill>
+                <a:effectLst/>
+              </a:rPr>
+              <a:t>Permission management and monitoring tools in </a:t>
+            </a:r>
+            <a:r>
+              <a:rPr lang="en-US" b="0" i="0" u="none" strike="noStrike" dirty="0" err="1">
+                <a:solidFill>
+                  <a:srgbClr val="000000"/>
+                </a:solidFill>
+                <a:effectLst/>
+              </a:rPr>
+              <a:t>Corellium</a:t>
+            </a:r>
+            <a:r>
+              <a:rPr lang="en-US" b="0" i="0" u="none" strike="noStrike" dirty="0">
+                <a:solidFill>
+                  <a:srgbClr val="000000"/>
+                </a:solidFill>
+                <a:effectLst/>
+              </a:rPr>
+              <a:t> enabled.</a:t>
+            </a:r>
+          </a:p>
+          <a:p>
+            <a:endParaRPr lang="en-US" dirty="0"/>
+          </a:p>
+        </p:txBody>
+      </p:sp>
+    </p:spTree>
+    <p:extLst>
+      <p:ext uri="{BB962C8B-B14F-4D97-AF65-F5344CB8AC3E}">
+        <p14:creationId xmlns:p14="http://schemas.microsoft.com/office/powerpoint/2010/main" val="620277625"/>
+      </p:ext>
+    </p:extLst>
+  </p:cSld>
+  <p:clrMapOvr>
+    <a:masterClrMapping/>
+  </p:clrMapOvr>
+</p:sld>
+</file>
+
+<file path=ppt/slides/slide16.xml><?xml version="1.0" encoding="utf-8"?>
+<p:sld xmlns:a="http://schemas.openxmlformats.org/drawingml/2006/main" xmlns:r="http://schemas.openxmlformats.org/officeDocument/2006/relationships" xmlns:p="http://schemas.openxmlformats.org/presentationml/2006/main">
+  <p:cSld>
+    <p:spTree>
+      <p:nvGrpSpPr>
+        <p:cNvPr id="1" name=""/>
+        <p:cNvGrpSpPr/>
+        <p:nvPr/>
+      </p:nvGrpSpPr>
+      <p:grpSpPr>
+        <a:xfrm>
+          <a:off x="0" y="0"/>
+          <a:ext cx="0" cy="0"/>
+          <a:chOff x="0" y="0"/>
+          <a:chExt cx="0" cy="0"/>
+        </a:xfrm>
+      </p:grpSpPr>
+      <p:sp>
+        <p:nvSpPr>
+          <p:cNvPr id="2" name="Title 1">
+            <a:extLst>
+              <a:ext uri="{FF2B5EF4-FFF2-40B4-BE49-F238E27FC236}">
+                <a16:creationId xmlns:a16="http://schemas.microsoft.com/office/drawing/2014/main" id="{10E88CBD-0758-6124-5036-7FFE7E6D5376}"/>
+              </a:ext>
+            </a:extLst>
+          </p:cNvPr>
+          <p:cNvSpPr>
+            <a:spLocks noGrp="1"/>
+          </p:cNvSpPr>
+          <p:nvPr>
+            <p:ph type="title"/>
+          </p:nvPr>
+        </p:nvSpPr>
+        <p:spPr/>
+        <p:txBody>
+          <a:bodyPr/>
+          <a:lstStyle/>
+          <a:p>
+            <a:r>
+              <a:rPr lang="en-US" b="0" i="0" u="none" strike="noStrike" dirty="0">
+                <a:solidFill>
+                  <a:srgbClr val="000000"/>
+                </a:solidFill>
+                <a:effectLst/>
+                <a:latin typeface="-webkit-standard"/>
+              </a:rPr>
+              <a:t>Validate Cache and Browser Data Clearance</a:t>
+            </a:r>
+            <a:endParaRPr lang="en-US" dirty="0"/>
+          </a:p>
+        </p:txBody>
+      </p:sp>
+      <p:sp>
+        <p:nvSpPr>
+          <p:cNvPr id="3" name="Content Placeholder 2">
+            <a:extLst>
+              <a:ext uri="{FF2B5EF4-FFF2-40B4-BE49-F238E27FC236}">
+                <a16:creationId xmlns:a16="http://schemas.microsoft.com/office/drawing/2014/main" id="{29B1D02B-9C21-7296-0A16-7F9F27A688DD}"/>
+              </a:ext>
+            </a:extLst>
+          </p:cNvPr>
+          <p:cNvSpPr>
+            <a:spLocks noGrp="1"/>
+          </p:cNvSpPr>
+          <p:nvPr>
+            <p:ph idx="1"/>
+          </p:nvPr>
+        </p:nvSpPr>
+        <p:spPr/>
+        <p:txBody>
+          <a:bodyPr>
+            <a:normAutofit fontScale="32500" lnSpcReduction="20000"/>
+          </a:bodyPr>
+          <a:lstStyle/>
+          <a:p>
+            <a:pPr marL="0" indent="0" algn="l">
+              <a:buNone/>
+            </a:pPr>
+            <a:r>
+              <a:rPr lang="en-US" b="1" i="0" u="none" strike="noStrike" dirty="0">
+                <a:solidFill>
+                  <a:srgbClr val="000000"/>
+                </a:solidFill>
+                <a:effectLst/>
+              </a:rPr>
+              <a:t>Test Case ID:</a:t>
+            </a:r>
+            <a:r>
+              <a:rPr lang="en-US" b="0" i="0" u="none" strike="noStrike" dirty="0">
+                <a:solidFill>
+                  <a:srgbClr val="000000"/>
+                </a:solidFill>
+                <a:effectLst/>
+              </a:rPr>
+              <a:t> TC-015</a:t>
+            </a:r>
+          </a:p>
+          <a:p>
+            <a:pPr marL="0" indent="0" algn="l">
+              <a:buNone/>
+            </a:pPr>
+            <a:r>
+              <a:rPr lang="en-US" b="1" i="0" u="none" strike="noStrike" dirty="0">
+                <a:solidFill>
+                  <a:srgbClr val="000000"/>
+                </a:solidFill>
+                <a:effectLst/>
+              </a:rPr>
+              <a:t>Objective:</a:t>
+            </a:r>
+            <a:r>
+              <a:rPr lang="en-US" b="0" i="0" u="none" strike="noStrike" dirty="0">
+                <a:solidFill>
+                  <a:srgbClr val="000000"/>
+                </a:solidFill>
+                <a:effectLst/>
+              </a:rPr>
+              <a:t> Ensure the app does not store sensitive data (e.g., session tokens, cached pages) in plaintext or accessible formats after closing the app.</a:t>
+            </a:r>
+          </a:p>
+          <a:p>
+            <a:pPr marL="0" indent="0" algn="l">
+              <a:buNone/>
+            </a:pPr>
+            <a:r>
+              <a:rPr lang="en-US" b="1" i="0" u="none" strike="noStrike" dirty="0">
+                <a:solidFill>
+                  <a:srgbClr val="000000"/>
+                </a:solidFill>
+                <a:effectLst/>
+              </a:rPr>
+              <a:t>Pre-conditions:</a:t>
+            </a:r>
+            <a:endParaRPr lang="en-US" b="0" i="0" u="none" strike="noStrike" dirty="0">
+              <a:solidFill>
+                <a:srgbClr val="000000"/>
+              </a:solidFill>
+              <a:effectLst/>
+            </a:endParaRPr>
+          </a:p>
+          <a:p>
+            <a:pPr marL="742950" lvl="1" indent="-285750" algn="l">
+              <a:buFont typeface="Arial" panose="020B0604020202020204" pitchFamily="34" charset="0"/>
+              <a:buChar char="•"/>
+            </a:pPr>
+            <a:r>
+              <a:rPr lang="en-US" b="0" i="0" u="none" strike="noStrike" dirty="0">
+                <a:solidFill>
+                  <a:srgbClr val="000000"/>
+                </a:solidFill>
+                <a:effectLst/>
+              </a:rPr>
+              <a:t>APK/AAB/IPA installed on </a:t>
+            </a:r>
+            <a:r>
+              <a:rPr lang="en-US" b="0" i="0" u="none" strike="noStrike" dirty="0" err="1">
+                <a:solidFill>
+                  <a:srgbClr val="000000"/>
+                </a:solidFill>
+                <a:effectLst/>
+              </a:rPr>
+              <a:t>Corellium</a:t>
+            </a:r>
+            <a:r>
+              <a:rPr lang="en-US" b="0" i="0" u="none" strike="noStrike" dirty="0">
+                <a:solidFill>
+                  <a:srgbClr val="000000"/>
+                </a:solidFill>
+                <a:effectLst/>
+              </a:rPr>
+              <a:t> virtual device.</a:t>
+            </a:r>
+          </a:p>
+          <a:p>
+            <a:pPr marL="742950" lvl="1" indent="-285750" algn="l">
+              <a:buFont typeface="Arial" panose="020B0604020202020204" pitchFamily="34" charset="0"/>
+              <a:buChar char="•"/>
+            </a:pPr>
+            <a:r>
+              <a:rPr lang="en-US" b="0" i="0" u="none" strike="noStrike" dirty="0" err="1">
+                <a:solidFill>
+                  <a:srgbClr val="000000"/>
+                </a:solidFill>
+                <a:effectLst/>
+              </a:rPr>
+              <a:t>Corellium’s</a:t>
+            </a:r>
+            <a:r>
+              <a:rPr lang="en-US" b="0" i="0" u="none" strike="noStrike" dirty="0">
+                <a:solidFill>
+                  <a:srgbClr val="000000"/>
+                </a:solidFill>
+                <a:effectLst/>
+              </a:rPr>
+              <a:t> file system access enabled for inspection.</a:t>
+            </a:r>
+          </a:p>
+          <a:p>
+            <a:pPr marL="0" indent="0" algn="l">
+              <a:buNone/>
+            </a:pPr>
+            <a:r>
+              <a:rPr lang="en-US" b="1" i="0" u="none" strike="noStrike" dirty="0">
+                <a:solidFill>
+                  <a:srgbClr val="000000"/>
+                </a:solidFill>
+                <a:effectLst/>
+              </a:rPr>
+              <a:t>Steps:</a:t>
+            </a:r>
+            <a:endParaRPr lang="en-US" b="0" i="0" u="none" strike="noStrike" dirty="0">
+              <a:solidFill>
+                <a:srgbClr val="000000"/>
+              </a:solidFill>
+              <a:effectLst/>
+            </a:endParaRPr>
+          </a:p>
+          <a:p>
+            <a:pPr marL="742950" lvl="1" indent="-285750" algn="l">
+              <a:buFont typeface="Arial" panose="020B0604020202020204" pitchFamily="34" charset="0"/>
+              <a:buChar char="•"/>
+            </a:pPr>
+            <a:r>
+              <a:rPr lang="en-US" b="0" i="0" u="none" strike="noStrike" dirty="0">
+                <a:solidFill>
+                  <a:srgbClr val="000000"/>
+                </a:solidFill>
+                <a:effectLst/>
+              </a:rPr>
+              <a:t>Launch the app on the </a:t>
+            </a:r>
+            <a:r>
+              <a:rPr lang="en-US" b="0" i="0" u="none" strike="noStrike" dirty="0" err="1">
+                <a:solidFill>
+                  <a:srgbClr val="000000"/>
+                </a:solidFill>
+                <a:effectLst/>
+              </a:rPr>
+              <a:t>Corellium</a:t>
+            </a:r>
+            <a:r>
+              <a:rPr lang="en-US" b="0" i="0" u="none" strike="noStrike" dirty="0">
+                <a:solidFill>
+                  <a:srgbClr val="000000"/>
+                </a:solidFill>
+                <a:effectLst/>
+              </a:rPr>
+              <a:t> virtual device and log in with valid credentials.</a:t>
+            </a:r>
+          </a:p>
+          <a:p>
+            <a:pPr marL="742950" lvl="1" indent="-285750" algn="l">
+              <a:buFont typeface="Arial" panose="020B0604020202020204" pitchFamily="34" charset="0"/>
+              <a:buChar char="•"/>
+            </a:pPr>
+            <a:r>
+              <a:rPr lang="en-US" b="0" i="0" u="none" strike="noStrike" dirty="0">
+                <a:solidFill>
+                  <a:srgbClr val="000000"/>
+                </a:solidFill>
+                <a:effectLst/>
+              </a:rPr>
+              <a:t>Perform sensitive actions within the app (e.g., viewing account details, making transactions).</a:t>
+            </a:r>
+          </a:p>
+          <a:p>
+            <a:pPr marL="742950" lvl="1" indent="-285750" algn="l">
+              <a:buFont typeface="Arial" panose="020B0604020202020204" pitchFamily="34" charset="0"/>
+              <a:buChar char="•"/>
+            </a:pPr>
+            <a:r>
+              <a:rPr lang="en-US" b="0" i="0" u="none" strike="noStrike" dirty="0">
+                <a:solidFill>
+                  <a:srgbClr val="000000"/>
+                </a:solidFill>
+                <a:effectLst/>
+              </a:rPr>
+              <a:t>Close the app without logging out.</a:t>
+            </a:r>
+          </a:p>
+          <a:p>
+            <a:pPr marL="742950" lvl="1" indent="-285750" algn="l">
+              <a:buFont typeface="Arial" panose="020B0604020202020204" pitchFamily="34" charset="0"/>
+              <a:buChar char="•"/>
+            </a:pPr>
+            <a:r>
+              <a:rPr lang="en-US" b="0" i="0" u="none" strike="noStrike" dirty="0">
+                <a:solidFill>
+                  <a:srgbClr val="000000"/>
+                </a:solidFill>
+                <a:effectLst/>
+              </a:rPr>
+              <a:t>Use </a:t>
+            </a:r>
+            <a:r>
+              <a:rPr lang="en-US" b="0" i="0" u="none" strike="noStrike" dirty="0" err="1">
+                <a:solidFill>
+                  <a:srgbClr val="000000"/>
+                </a:solidFill>
+                <a:effectLst/>
+              </a:rPr>
+              <a:t>Corellium's</a:t>
+            </a:r>
+            <a:r>
+              <a:rPr lang="en-US" b="0" i="0" u="none" strike="noStrike" dirty="0">
+                <a:solidFill>
+                  <a:srgbClr val="000000"/>
+                </a:solidFill>
+                <a:effectLst/>
+              </a:rPr>
+              <a:t> file explorer to inspect the app's cached data stored in:</a:t>
+            </a:r>
+          </a:p>
+          <a:p>
+            <a:pPr marL="1143000" lvl="2" indent="-228600" algn="l">
+              <a:buFont typeface="Arial" panose="020B0604020202020204" pitchFamily="34" charset="0"/>
+              <a:buChar char="•"/>
+            </a:pPr>
+            <a:r>
+              <a:rPr lang="en-US" b="0" i="0" u="none" strike="noStrike" dirty="0">
+                <a:solidFill>
+                  <a:srgbClr val="000000"/>
+                </a:solidFill>
+                <a:effectLst/>
+              </a:rPr>
+              <a:t>Android: /data/data/&lt;</a:t>
+            </a:r>
+            <a:r>
+              <a:rPr lang="en-US" b="0" i="0" u="none" strike="noStrike" dirty="0" err="1">
+                <a:solidFill>
+                  <a:srgbClr val="000000"/>
+                </a:solidFill>
+                <a:effectLst/>
+              </a:rPr>
+              <a:t>app_package_name</a:t>
+            </a:r>
+            <a:r>
+              <a:rPr lang="en-US" b="0" i="0" u="none" strike="noStrike" dirty="0">
+                <a:solidFill>
+                  <a:srgbClr val="000000"/>
+                </a:solidFill>
+                <a:effectLst/>
+              </a:rPr>
+              <a:t>&gt;/cache</a:t>
+            </a:r>
+          </a:p>
+          <a:p>
+            <a:pPr marL="1143000" lvl="2" indent="-228600" algn="l">
+              <a:buFont typeface="Arial" panose="020B0604020202020204" pitchFamily="34" charset="0"/>
+              <a:buChar char="•"/>
+            </a:pPr>
+            <a:r>
+              <a:rPr lang="en-US" b="0" i="0" u="none" strike="noStrike" dirty="0">
+                <a:solidFill>
+                  <a:srgbClr val="000000"/>
+                </a:solidFill>
+                <a:effectLst/>
+              </a:rPr>
+              <a:t>iOS: /var/mobile/Containers/Data/Application/&lt;</a:t>
+            </a:r>
+            <a:r>
+              <a:rPr lang="en-US" b="0" i="0" u="none" strike="noStrike" dirty="0" err="1">
+                <a:solidFill>
+                  <a:srgbClr val="000000"/>
+                </a:solidFill>
+                <a:effectLst/>
+              </a:rPr>
+              <a:t>app_bundle_id</a:t>
+            </a:r>
+            <a:r>
+              <a:rPr lang="en-US" b="0" i="0" u="none" strike="noStrike" dirty="0">
+                <a:solidFill>
+                  <a:srgbClr val="000000"/>
+                </a:solidFill>
+                <a:effectLst/>
+              </a:rPr>
+              <a:t>&gt;</a:t>
+            </a:r>
+          </a:p>
+          <a:p>
+            <a:pPr marL="742950" lvl="1" indent="-285750" algn="l">
+              <a:buFont typeface="Arial" panose="020B0604020202020204" pitchFamily="34" charset="0"/>
+              <a:buChar char="•"/>
+            </a:pPr>
+            <a:r>
+              <a:rPr lang="en-US" b="0" i="0" u="none" strike="noStrike" dirty="0">
+                <a:solidFill>
+                  <a:srgbClr val="000000"/>
+                </a:solidFill>
+                <a:effectLst/>
+              </a:rPr>
+              <a:t>Look for session tokens, cached pages, or other sensitive data stored in plaintext.</a:t>
+            </a:r>
+          </a:p>
+          <a:p>
+            <a:pPr marL="0" indent="0" algn="l">
+              <a:buNone/>
+            </a:pPr>
+            <a:r>
+              <a:rPr lang="en-US" b="1" i="0" u="none" strike="noStrike" dirty="0">
+                <a:solidFill>
+                  <a:srgbClr val="000000"/>
+                </a:solidFill>
+                <a:effectLst/>
+              </a:rPr>
+              <a:t>Expected Results:</a:t>
+            </a:r>
+            <a:endParaRPr lang="en-US" b="0" i="0" u="none" strike="noStrike" dirty="0">
+              <a:solidFill>
+                <a:srgbClr val="000000"/>
+              </a:solidFill>
+              <a:effectLst/>
+            </a:endParaRPr>
+          </a:p>
+          <a:p>
+            <a:pPr marL="742950" lvl="1" indent="-285750" algn="l">
+              <a:buFont typeface="Arial" panose="020B0604020202020204" pitchFamily="34" charset="0"/>
+              <a:buChar char="•"/>
+            </a:pPr>
+            <a:r>
+              <a:rPr lang="en-US" b="0" i="0" u="none" strike="noStrike" dirty="0">
+                <a:solidFill>
+                  <a:srgbClr val="000000"/>
+                </a:solidFill>
+                <a:effectLst/>
+              </a:rPr>
+              <a:t>No sensitive data should be stored in plaintext in the app's cache or file system.</a:t>
+            </a:r>
+          </a:p>
+          <a:p>
+            <a:pPr marL="742950" lvl="1" indent="-285750" algn="l">
+              <a:buFont typeface="Arial" panose="020B0604020202020204" pitchFamily="34" charset="0"/>
+              <a:buChar char="•"/>
+            </a:pPr>
+            <a:r>
+              <a:rPr lang="en-US" b="0" i="0" u="none" strike="noStrike" dirty="0">
+                <a:solidFill>
+                  <a:srgbClr val="000000"/>
+                </a:solidFill>
+                <a:effectLst/>
+              </a:rPr>
+              <a:t>Cached data should be securely encrypted or cleared when the app is closed.</a:t>
+            </a:r>
+          </a:p>
+          <a:p>
+            <a:pPr marL="742950" lvl="1" indent="-285750" algn="l">
+              <a:buFont typeface="Arial" panose="020B0604020202020204" pitchFamily="34" charset="0"/>
+              <a:buChar char="•"/>
+            </a:pPr>
+            <a:r>
+              <a:rPr lang="en-US" b="0" i="0" u="none" strike="noStrike" dirty="0">
+                <a:solidFill>
+                  <a:srgbClr val="000000"/>
+                </a:solidFill>
+                <a:effectLst/>
+              </a:rPr>
+              <a:t>Sensitive data (e.g., session tokens) should not be accessible after closing the app.</a:t>
+            </a:r>
+          </a:p>
+          <a:p>
+            <a:pPr marL="0" indent="0" algn="l">
+              <a:buNone/>
+            </a:pPr>
+            <a:r>
+              <a:rPr lang="en-US" b="1" i="0" u="none" strike="noStrike" dirty="0">
+                <a:solidFill>
+                  <a:srgbClr val="000000"/>
+                </a:solidFill>
+                <a:effectLst/>
+              </a:rPr>
+              <a:t>Test Data:</a:t>
+            </a:r>
+            <a:endParaRPr lang="en-US" b="0" i="0" u="none" strike="noStrike" dirty="0">
+              <a:solidFill>
+                <a:srgbClr val="000000"/>
+              </a:solidFill>
+              <a:effectLst/>
+            </a:endParaRPr>
+          </a:p>
+          <a:p>
+            <a:pPr marL="742950" lvl="1" indent="-285750" algn="l">
+              <a:buFont typeface="Arial" panose="020B0604020202020204" pitchFamily="34" charset="0"/>
+              <a:buChar char="•"/>
+            </a:pPr>
+            <a:r>
+              <a:rPr lang="en-US" b="0" i="0" u="none" strike="noStrike" dirty="0">
+                <a:solidFill>
+                  <a:srgbClr val="000000"/>
+                </a:solidFill>
+                <a:effectLst/>
+              </a:rPr>
+              <a:t>Valid credentials: </a:t>
+            </a:r>
+            <a:r>
+              <a:rPr lang="en-US" b="0" i="0" u="none" strike="noStrike" dirty="0" err="1">
+                <a:solidFill>
+                  <a:srgbClr val="000000"/>
+                </a:solidFill>
+                <a:effectLst/>
+              </a:rPr>
+              <a:t>user@example.com</a:t>
+            </a:r>
+            <a:r>
+              <a:rPr lang="en-US" b="0" i="0" u="none" strike="noStrike" dirty="0">
+                <a:solidFill>
+                  <a:srgbClr val="000000"/>
+                </a:solidFill>
+                <a:effectLst/>
+              </a:rPr>
+              <a:t> / Password123.</a:t>
+            </a:r>
+          </a:p>
+          <a:p>
+            <a:pPr marL="742950" lvl="1" indent="-285750" algn="l">
+              <a:buFont typeface="Arial" panose="020B0604020202020204" pitchFamily="34" charset="0"/>
+              <a:buChar char="•"/>
+            </a:pPr>
+            <a:r>
+              <a:rPr lang="en-US" b="0" i="0" u="none" strike="noStrike" dirty="0">
+                <a:solidFill>
+                  <a:srgbClr val="000000"/>
+                </a:solidFill>
+                <a:effectLst/>
+              </a:rPr>
+              <a:t>Sample sensitive actions (e.g., viewing personal data, making a payment).</a:t>
+            </a:r>
+          </a:p>
+          <a:p>
+            <a:pPr marL="0" indent="0" algn="l">
+              <a:buNone/>
+            </a:pPr>
+            <a:r>
+              <a:rPr lang="en-US" b="1" i="0" u="none" strike="noStrike" dirty="0">
+                <a:solidFill>
+                  <a:srgbClr val="000000"/>
+                </a:solidFill>
+                <a:effectLst/>
+              </a:rPr>
+              <a:t>Test Environment:</a:t>
+            </a:r>
+            <a:endParaRPr lang="en-US" b="0" i="0" u="none" strike="noStrike" dirty="0">
+              <a:solidFill>
+                <a:srgbClr val="000000"/>
+              </a:solidFill>
+              <a:effectLst/>
+            </a:endParaRPr>
+          </a:p>
+          <a:p>
+            <a:pPr marL="742950" lvl="1" indent="-285750" algn="l">
+              <a:buFont typeface="Arial" panose="020B0604020202020204" pitchFamily="34" charset="0"/>
+              <a:buChar char="•"/>
+            </a:pPr>
+            <a:r>
+              <a:rPr lang="en-US" b="0" i="0" u="none" strike="noStrike" dirty="0" err="1">
+                <a:solidFill>
+                  <a:srgbClr val="000000"/>
+                </a:solidFill>
+                <a:effectLst/>
+              </a:rPr>
+              <a:t>Corellium</a:t>
+            </a:r>
+            <a:r>
+              <a:rPr lang="en-US" b="0" i="0" u="none" strike="noStrike" dirty="0">
+                <a:solidFill>
+                  <a:srgbClr val="000000"/>
+                </a:solidFill>
+                <a:effectLst/>
+              </a:rPr>
+              <a:t> virtual device with Android/iOS.</a:t>
+            </a:r>
+          </a:p>
+          <a:p>
+            <a:pPr marL="742950" lvl="1" indent="-285750" algn="l">
+              <a:buFont typeface="Arial" panose="020B0604020202020204" pitchFamily="34" charset="0"/>
+              <a:buChar char="•"/>
+            </a:pPr>
+            <a:r>
+              <a:rPr lang="en-US" b="0" i="0" u="none" strike="noStrike" dirty="0">
+                <a:solidFill>
+                  <a:srgbClr val="000000"/>
+                </a:solidFill>
+                <a:effectLst/>
+              </a:rPr>
+              <a:t>File system access enabled on </a:t>
+            </a:r>
+            <a:r>
+              <a:rPr lang="en-US" b="0" i="0" u="none" strike="noStrike" dirty="0" err="1">
+                <a:solidFill>
+                  <a:srgbClr val="000000"/>
+                </a:solidFill>
+                <a:effectLst/>
+              </a:rPr>
+              <a:t>Corellium</a:t>
+            </a:r>
+            <a:r>
+              <a:rPr lang="en-US" b="0" i="0" u="none" strike="noStrike" dirty="0">
+                <a:solidFill>
+                  <a:srgbClr val="000000"/>
+                </a:solidFill>
+                <a:effectLst/>
+              </a:rPr>
+              <a:t>.</a:t>
+            </a:r>
+          </a:p>
+        </p:txBody>
+      </p:sp>
+    </p:spTree>
+    <p:extLst>
+      <p:ext uri="{BB962C8B-B14F-4D97-AF65-F5344CB8AC3E}">
+        <p14:creationId xmlns:p14="http://schemas.microsoft.com/office/powerpoint/2010/main" val="455807537"/>
+      </p:ext>
+    </p:extLst>
+  </p:cSld>
+  <p:clrMapOvr>
+    <a:masterClrMapping/>
+  </p:clrMapOvr>
+</p:sld>
+</file>
+
+<file path=ppt/slides/slide17.xml><?xml version="1.0" encoding="utf-8"?>
+<p:sld xmlns:a="http://schemas.openxmlformats.org/drawingml/2006/main" xmlns:r="http://schemas.openxmlformats.org/officeDocument/2006/relationships" xmlns:p="http://schemas.openxmlformats.org/presentationml/2006/main">
+  <p:cSld>
+    <p:spTree>
+      <p:nvGrpSpPr>
+        <p:cNvPr id="1" name=""/>
+        <p:cNvGrpSpPr/>
+        <p:nvPr/>
+      </p:nvGrpSpPr>
+      <p:grpSpPr>
+        <a:xfrm>
+          <a:off x="0" y="0"/>
+          <a:ext cx="0" cy="0"/>
+          <a:chOff x="0" y="0"/>
+          <a:chExt cx="0" cy="0"/>
+        </a:xfrm>
+      </p:grpSpPr>
+      <p:sp>
+        <p:nvSpPr>
+          <p:cNvPr id="2" name="Title 1">
+            <a:extLst>
+              <a:ext uri="{FF2B5EF4-FFF2-40B4-BE49-F238E27FC236}">
+                <a16:creationId xmlns:a16="http://schemas.microsoft.com/office/drawing/2014/main" id="{AE623537-3E43-C695-7395-76AE1E6FACF3}"/>
+              </a:ext>
+            </a:extLst>
+          </p:cNvPr>
+          <p:cNvSpPr>
+            <a:spLocks noGrp="1"/>
+          </p:cNvSpPr>
+          <p:nvPr>
+            <p:ph type="title"/>
+          </p:nvPr>
+        </p:nvSpPr>
+        <p:spPr/>
+        <p:txBody>
+          <a:bodyPr/>
+          <a:lstStyle/>
+          <a:p>
+            <a:r>
+              <a:rPr lang="en-US" b="0" i="0" u="none" strike="noStrike" dirty="0">
+                <a:solidFill>
+                  <a:srgbClr val="000000"/>
+                </a:solidFill>
+                <a:effectLst/>
+                <a:latin typeface="-webkit-standard"/>
+              </a:rPr>
+              <a:t>Validate App Security in Untrusted Environments</a:t>
+            </a:r>
+            <a:endParaRPr lang="en-US" dirty="0"/>
+          </a:p>
+        </p:txBody>
+      </p:sp>
+      <p:sp>
+        <p:nvSpPr>
+          <p:cNvPr id="3" name="Content Placeholder 2">
+            <a:extLst>
+              <a:ext uri="{FF2B5EF4-FFF2-40B4-BE49-F238E27FC236}">
+                <a16:creationId xmlns:a16="http://schemas.microsoft.com/office/drawing/2014/main" id="{B5F5B4D1-EFA9-59A3-A2FE-3C0F97BBC5DB}"/>
+              </a:ext>
+            </a:extLst>
+          </p:cNvPr>
+          <p:cNvSpPr>
+            <a:spLocks noGrp="1"/>
+          </p:cNvSpPr>
+          <p:nvPr>
+            <p:ph idx="1"/>
+          </p:nvPr>
+        </p:nvSpPr>
+        <p:spPr/>
+        <p:txBody>
+          <a:bodyPr>
+            <a:normAutofit fontScale="32500" lnSpcReduction="20000"/>
+          </a:bodyPr>
+          <a:lstStyle/>
+          <a:p>
+            <a:pPr marL="0" indent="0" algn="l">
+              <a:buNone/>
+            </a:pPr>
+            <a:r>
+              <a:rPr lang="en-US" b="1" i="0" u="none" strike="noStrike" dirty="0">
+                <a:solidFill>
+                  <a:srgbClr val="000000"/>
+                </a:solidFill>
+                <a:effectLst/>
+              </a:rPr>
+              <a:t>Test Case ID:</a:t>
+            </a:r>
+            <a:r>
+              <a:rPr lang="en-US" b="0" i="0" u="none" strike="noStrike" dirty="0">
+                <a:solidFill>
+                  <a:srgbClr val="000000"/>
+                </a:solidFill>
+                <a:effectLst/>
+              </a:rPr>
+              <a:t> TC-016</a:t>
+            </a:r>
+          </a:p>
+          <a:p>
+            <a:pPr marL="0" indent="0" algn="l">
+              <a:buNone/>
+            </a:pPr>
+            <a:r>
+              <a:rPr lang="en-US" b="1" i="0" u="none" strike="noStrike" dirty="0">
+                <a:solidFill>
+                  <a:srgbClr val="000000"/>
+                </a:solidFill>
+                <a:effectLst/>
+              </a:rPr>
+              <a:t>Objective:</a:t>
+            </a:r>
+            <a:r>
+              <a:rPr lang="en-US" b="0" i="0" u="none" strike="noStrike" dirty="0">
+                <a:solidFill>
+                  <a:srgbClr val="000000"/>
+                </a:solidFill>
+                <a:effectLst/>
+              </a:rPr>
+              <a:t> Verify the app detects and appropriately handles execution in untrusted environments (e.g., rooted/jailbroken devices) and prevents debugging or unauthorized modifications.</a:t>
+            </a:r>
+          </a:p>
+          <a:p>
+            <a:pPr marL="0" indent="0" algn="l">
+              <a:buNone/>
+            </a:pPr>
+            <a:r>
+              <a:rPr lang="en-US" b="1" i="0" u="none" strike="noStrike" dirty="0">
+                <a:solidFill>
+                  <a:srgbClr val="000000"/>
+                </a:solidFill>
+                <a:effectLst/>
+              </a:rPr>
+              <a:t>Pre-conditions:</a:t>
+            </a:r>
+            <a:endParaRPr lang="en-US" b="0" i="0" u="none" strike="noStrike" dirty="0">
+              <a:solidFill>
+                <a:srgbClr val="000000"/>
+              </a:solidFill>
+              <a:effectLst/>
+            </a:endParaRPr>
+          </a:p>
+          <a:p>
+            <a:pPr marL="742950" lvl="1" indent="-285750" algn="l">
+              <a:buFont typeface="Arial" panose="020B0604020202020204" pitchFamily="34" charset="0"/>
+              <a:buChar char="•"/>
+            </a:pPr>
+            <a:r>
+              <a:rPr lang="en-US" b="0" i="0" u="none" strike="noStrike" dirty="0">
+                <a:solidFill>
+                  <a:srgbClr val="000000"/>
+                </a:solidFill>
+                <a:effectLst/>
+              </a:rPr>
+              <a:t>APK/AAB/IPA installed on </a:t>
+            </a:r>
+            <a:r>
+              <a:rPr lang="en-US" b="0" i="0" u="none" strike="noStrike" dirty="0" err="1">
+                <a:solidFill>
+                  <a:srgbClr val="000000"/>
+                </a:solidFill>
+                <a:effectLst/>
+              </a:rPr>
+              <a:t>Corellium</a:t>
+            </a:r>
+            <a:r>
+              <a:rPr lang="en-US" b="0" i="0" u="none" strike="noStrike" dirty="0">
+                <a:solidFill>
+                  <a:srgbClr val="000000"/>
+                </a:solidFill>
+                <a:effectLst/>
+              </a:rPr>
+              <a:t> virtual devices configured as:</a:t>
+            </a:r>
+          </a:p>
+          <a:p>
+            <a:pPr marL="1143000" lvl="2" indent="-228600" algn="l">
+              <a:buFont typeface="Arial" panose="020B0604020202020204" pitchFamily="34" charset="0"/>
+              <a:buChar char="•"/>
+            </a:pPr>
+            <a:r>
+              <a:rPr lang="en-US" b="0" i="0" u="none" strike="noStrike" dirty="0">
+                <a:solidFill>
+                  <a:srgbClr val="000000"/>
+                </a:solidFill>
+                <a:effectLst/>
+              </a:rPr>
+              <a:t>Rooted Android device.</a:t>
+            </a:r>
+          </a:p>
+          <a:p>
+            <a:pPr marL="1143000" lvl="2" indent="-228600" algn="l">
+              <a:buFont typeface="Arial" panose="020B0604020202020204" pitchFamily="34" charset="0"/>
+              <a:buChar char="•"/>
+            </a:pPr>
+            <a:r>
+              <a:rPr lang="en-US" b="0" i="0" u="none" strike="noStrike" dirty="0">
+                <a:solidFill>
+                  <a:srgbClr val="000000"/>
+                </a:solidFill>
+                <a:effectLst/>
+              </a:rPr>
+              <a:t>Jailbroken iOS device.</a:t>
+            </a:r>
+          </a:p>
+          <a:p>
+            <a:pPr marL="742950" lvl="1" indent="-285750" algn="l">
+              <a:buFont typeface="Arial" panose="020B0604020202020204" pitchFamily="34" charset="0"/>
+              <a:buChar char="•"/>
+            </a:pPr>
+            <a:r>
+              <a:rPr lang="en-US" b="0" i="0" u="none" strike="noStrike" dirty="0">
+                <a:solidFill>
+                  <a:srgbClr val="000000"/>
+                </a:solidFill>
+                <a:effectLst/>
+              </a:rPr>
+              <a:t>Debugging tools (e.g., </a:t>
+            </a:r>
+            <a:r>
+              <a:rPr lang="en-US" b="0" i="0" u="none" strike="noStrike" dirty="0" err="1">
+                <a:solidFill>
+                  <a:srgbClr val="000000"/>
+                </a:solidFill>
+                <a:effectLst/>
+              </a:rPr>
+              <a:t>Corellium</a:t>
+            </a:r>
+            <a:r>
+              <a:rPr lang="en-US" b="0" i="0" u="none" strike="noStrike" dirty="0">
+                <a:solidFill>
+                  <a:srgbClr val="000000"/>
+                </a:solidFill>
+                <a:effectLst/>
+              </a:rPr>
+              <a:t> debugger) are available.</a:t>
+            </a:r>
+          </a:p>
+          <a:p>
+            <a:pPr marL="0" indent="0" algn="l">
+              <a:buNone/>
+            </a:pPr>
+            <a:r>
+              <a:rPr lang="en-US" b="1" i="0" u="none" strike="noStrike" dirty="0">
+                <a:solidFill>
+                  <a:srgbClr val="000000"/>
+                </a:solidFill>
+                <a:effectLst/>
+              </a:rPr>
+              <a:t>Steps:</a:t>
+            </a:r>
+            <a:endParaRPr lang="en-US" b="0" i="0" u="none" strike="noStrike" dirty="0">
+              <a:solidFill>
+                <a:srgbClr val="000000"/>
+              </a:solidFill>
+              <a:effectLst/>
+            </a:endParaRPr>
+          </a:p>
+          <a:p>
+            <a:pPr marL="742950" lvl="1" indent="-285750" algn="l">
+              <a:buFont typeface="Arial" panose="020B0604020202020204" pitchFamily="34" charset="0"/>
+              <a:buChar char="•"/>
+            </a:pPr>
+            <a:r>
+              <a:rPr lang="en-US" b="0" i="0" u="none" strike="noStrike" dirty="0">
+                <a:solidFill>
+                  <a:srgbClr val="000000"/>
+                </a:solidFill>
+                <a:effectLst/>
+              </a:rPr>
+              <a:t>Launch the app on a rooted Android device.</a:t>
+            </a:r>
+          </a:p>
+          <a:p>
+            <a:pPr marL="742950" lvl="1" indent="-285750" algn="l">
+              <a:buFont typeface="Arial" panose="020B0604020202020204" pitchFamily="34" charset="0"/>
+              <a:buChar char="•"/>
+            </a:pPr>
+            <a:r>
+              <a:rPr lang="en-US" b="0" i="0" u="none" strike="noStrike" dirty="0">
+                <a:solidFill>
+                  <a:srgbClr val="000000"/>
+                </a:solidFill>
+                <a:effectLst/>
+              </a:rPr>
+              <a:t>Launch the app on a jailbroken iOS device.</a:t>
+            </a:r>
+          </a:p>
+          <a:p>
+            <a:pPr marL="742950" lvl="1" indent="-285750" algn="l">
+              <a:buFont typeface="Arial" panose="020B0604020202020204" pitchFamily="34" charset="0"/>
+              <a:buChar char="•"/>
+            </a:pPr>
+            <a:r>
+              <a:rPr lang="en-US" b="0" i="0" u="none" strike="noStrike" dirty="0">
+                <a:solidFill>
+                  <a:srgbClr val="000000"/>
+                </a:solidFill>
+                <a:effectLst/>
+              </a:rPr>
+              <a:t>Verify the app’s behavior, checking for:</a:t>
+            </a:r>
+          </a:p>
+          <a:p>
+            <a:pPr marL="1143000" lvl="2" indent="-228600" algn="l">
+              <a:buFont typeface="Arial" panose="020B0604020202020204" pitchFamily="34" charset="0"/>
+              <a:buChar char="•"/>
+            </a:pPr>
+            <a:r>
+              <a:rPr lang="en-US" b="0" i="0" u="none" strike="noStrike" dirty="0">
+                <a:solidFill>
+                  <a:srgbClr val="000000"/>
+                </a:solidFill>
+                <a:effectLst/>
+              </a:rPr>
+              <a:t>Refusal to launch or a security notification.</a:t>
+            </a:r>
+          </a:p>
+          <a:p>
+            <a:pPr marL="1143000" lvl="2" indent="-228600" algn="l">
+              <a:buFont typeface="Arial" panose="020B0604020202020204" pitchFamily="34" charset="0"/>
+              <a:buChar char="•"/>
+            </a:pPr>
+            <a:r>
+              <a:rPr lang="en-US" b="0" i="0" u="none" strike="noStrike" dirty="0">
+                <a:solidFill>
+                  <a:srgbClr val="000000"/>
+                </a:solidFill>
+                <a:effectLst/>
+              </a:rPr>
+              <a:t>Error messages indicating the untrusted environment.</a:t>
+            </a:r>
+          </a:p>
+          <a:p>
+            <a:pPr marL="742950" lvl="1" indent="-285750" algn="l">
+              <a:buFont typeface="Arial" panose="020B0604020202020204" pitchFamily="34" charset="0"/>
+              <a:buChar char="•"/>
+            </a:pPr>
+            <a:r>
+              <a:rPr lang="en-US" b="0" i="0" u="none" strike="noStrike" dirty="0">
+                <a:solidFill>
+                  <a:srgbClr val="000000"/>
+                </a:solidFill>
+                <a:effectLst/>
+              </a:rPr>
+              <a:t>Attach debugging tools to the app using </a:t>
+            </a:r>
+            <a:r>
+              <a:rPr lang="en-US" b="0" i="0" u="none" strike="noStrike" dirty="0" err="1">
+                <a:solidFill>
+                  <a:srgbClr val="000000"/>
+                </a:solidFill>
+                <a:effectLst/>
+              </a:rPr>
+              <a:t>Corellium</a:t>
+            </a:r>
+            <a:r>
+              <a:rPr lang="en-US" b="0" i="0" u="none" strike="noStrike" dirty="0">
+                <a:solidFill>
+                  <a:srgbClr val="000000"/>
+                </a:solidFill>
+                <a:effectLst/>
+              </a:rPr>
+              <a:t>.</a:t>
+            </a:r>
+          </a:p>
+          <a:p>
+            <a:pPr marL="742950" lvl="1" indent="-285750" algn="l">
+              <a:buFont typeface="Arial" panose="020B0604020202020204" pitchFamily="34" charset="0"/>
+              <a:buChar char="•"/>
+            </a:pPr>
+            <a:r>
+              <a:rPr lang="en-US" b="0" i="0" u="none" strike="noStrike" dirty="0">
+                <a:solidFill>
+                  <a:srgbClr val="000000"/>
+                </a:solidFill>
+                <a:effectLst/>
+              </a:rPr>
+              <a:t>Attempt to inspect or modify the app’s runtime behavior (e.g., intercepting API calls, altering memory).</a:t>
+            </a:r>
+          </a:p>
+          <a:p>
+            <a:pPr marL="742950" lvl="1" indent="-285750" algn="l">
+              <a:buFont typeface="Arial" panose="020B0604020202020204" pitchFamily="34" charset="0"/>
+              <a:buChar char="•"/>
+            </a:pPr>
+            <a:r>
+              <a:rPr lang="en-US" b="0" i="0" u="none" strike="noStrike" dirty="0">
+                <a:solidFill>
+                  <a:srgbClr val="000000"/>
+                </a:solidFill>
+                <a:effectLst/>
+              </a:rPr>
+              <a:t>Observe how the app reacts to these attempts (e.g., crashes, blocks access).</a:t>
+            </a:r>
+          </a:p>
+          <a:p>
+            <a:pPr marL="0" indent="0" algn="l">
+              <a:buNone/>
+            </a:pPr>
+            <a:r>
+              <a:rPr lang="en-US" b="1" i="0" u="none" strike="noStrike" dirty="0">
+                <a:solidFill>
+                  <a:srgbClr val="000000"/>
+                </a:solidFill>
+                <a:effectLst/>
+              </a:rPr>
+              <a:t>Expected Results:</a:t>
+            </a:r>
+            <a:endParaRPr lang="en-US" b="0" i="0" u="none" strike="noStrike" dirty="0">
+              <a:solidFill>
+                <a:srgbClr val="000000"/>
+              </a:solidFill>
+              <a:effectLst/>
+            </a:endParaRPr>
+          </a:p>
+          <a:p>
+            <a:pPr marL="742950" lvl="1" indent="-285750" algn="l">
+              <a:buFont typeface="Arial" panose="020B0604020202020204" pitchFamily="34" charset="0"/>
+              <a:buChar char="•"/>
+            </a:pPr>
+            <a:r>
+              <a:rPr lang="en-US" b="0" i="0" u="none" strike="noStrike" dirty="0">
+                <a:solidFill>
+                  <a:srgbClr val="000000"/>
+                </a:solidFill>
+                <a:effectLst/>
+              </a:rPr>
+              <a:t>The app detects rooted/jailbroken environments and refuses to run or shows a warning.</a:t>
+            </a:r>
+          </a:p>
+          <a:p>
+            <a:pPr marL="742950" lvl="1" indent="-285750" algn="l">
+              <a:buFont typeface="Arial" panose="020B0604020202020204" pitchFamily="34" charset="0"/>
+              <a:buChar char="•"/>
+            </a:pPr>
+            <a:r>
+              <a:rPr lang="en-US" b="0" i="0" u="none" strike="noStrike" dirty="0">
+                <a:solidFill>
+                  <a:srgbClr val="000000"/>
+                </a:solidFill>
+                <a:effectLst/>
+              </a:rPr>
+              <a:t>Debugging attempts are blocked or logged, and the app resists runtime modification.</a:t>
+            </a:r>
+          </a:p>
+          <a:p>
+            <a:pPr marL="742950" lvl="1" indent="-285750" algn="l">
+              <a:buFont typeface="Arial" panose="020B0604020202020204" pitchFamily="34" charset="0"/>
+              <a:buChar char="•"/>
+            </a:pPr>
+            <a:r>
+              <a:rPr lang="en-US" b="0" i="0" u="none" strike="noStrike" dirty="0">
+                <a:solidFill>
+                  <a:srgbClr val="000000"/>
+                </a:solidFill>
+                <a:effectLst/>
+              </a:rPr>
+              <a:t>Sensitive data or operations remain secure and inaccessible.</a:t>
+            </a:r>
+          </a:p>
+          <a:p>
+            <a:pPr marL="0" indent="0" algn="l">
+              <a:buNone/>
+            </a:pPr>
+            <a:r>
+              <a:rPr lang="en-US" b="1" i="0" u="none" strike="noStrike" dirty="0">
+                <a:solidFill>
+                  <a:srgbClr val="000000"/>
+                </a:solidFill>
+                <a:effectLst/>
+              </a:rPr>
+              <a:t>Test Data:</a:t>
+            </a:r>
+            <a:endParaRPr lang="en-US" b="0" i="0" u="none" strike="noStrike" dirty="0">
+              <a:solidFill>
+                <a:srgbClr val="000000"/>
+              </a:solidFill>
+              <a:effectLst/>
+            </a:endParaRPr>
+          </a:p>
+          <a:p>
+            <a:pPr marL="742950" lvl="1" indent="-285750" algn="l">
+              <a:buFont typeface="Arial" panose="020B0604020202020204" pitchFamily="34" charset="0"/>
+              <a:buChar char="•"/>
+            </a:pPr>
+            <a:r>
+              <a:rPr lang="en-US" b="0" i="0" u="none" strike="noStrike" dirty="0">
+                <a:solidFill>
+                  <a:srgbClr val="000000"/>
+                </a:solidFill>
+                <a:effectLst/>
+              </a:rPr>
+              <a:t>Test credentials (if login is required): </a:t>
+            </a:r>
+            <a:r>
+              <a:rPr lang="en-US" b="0" i="0" u="none" strike="noStrike" dirty="0" err="1">
+                <a:solidFill>
+                  <a:srgbClr val="000000"/>
+                </a:solidFill>
+                <a:effectLst/>
+              </a:rPr>
+              <a:t>user@example.com</a:t>
+            </a:r>
+            <a:r>
+              <a:rPr lang="en-US" b="0" i="0" u="none" strike="noStrike" dirty="0">
+                <a:solidFill>
+                  <a:srgbClr val="000000"/>
+                </a:solidFill>
+                <a:effectLst/>
+              </a:rPr>
+              <a:t> / Secure@123.</a:t>
+            </a:r>
+          </a:p>
+          <a:p>
+            <a:pPr marL="742950" lvl="1" indent="-285750" algn="l">
+              <a:buFont typeface="Arial" panose="020B0604020202020204" pitchFamily="34" charset="0"/>
+              <a:buChar char="•"/>
+            </a:pPr>
+            <a:r>
+              <a:rPr lang="en-US" b="0" i="0" u="none" strike="noStrike" dirty="0">
+                <a:solidFill>
+                  <a:srgbClr val="000000"/>
+                </a:solidFill>
+                <a:effectLst/>
+              </a:rPr>
+              <a:t>Debugging attempts: Runtime inspection, API interception.</a:t>
+            </a:r>
+          </a:p>
+          <a:p>
+            <a:pPr marL="0" indent="0" algn="l">
+              <a:buNone/>
+            </a:pPr>
+            <a:r>
+              <a:rPr lang="en-US" b="1" i="0" u="none" strike="noStrike" dirty="0">
+                <a:solidFill>
+                  <a:srgbClr val="000000"/>
+                </a:solidFill>
+                <a:effectLst/>
+              </a:rPr>
+              <a:t>Test Environment:</a:t>
+            </a:r>
+            <a:endParaRPr lang="en-US" b="0" i="0" u="none" strike="noStrike" dirty="0">
+              <a:solidFill>
+                <a:srgbClr val="000000"/>
+              </a:solidFill>
+              <a:effectLst/>
+            </a:endParaRPr>
+          </a:p>
+          <a:p>
+            <a:pPr marL="742950" lvl="1" indent="-285750" algn="l">
+              <a:buFont typeface="Arial" panose="020B0604020202020204" pitchFamily="34" charset="0"/>
+              <a:buChar char="•"/>
+            </a:pPr>
+            <a:r>
+              <a:rPr lang="en-US" b="0" i="0" u="none" strike="noStrike" dirty="0" err="1">
+                <a:solidFill>
+                  <a:srgbClr val="000000"/>
+                </a:solidFill>
+                <a:effectLst/>
+              </a:rPr>
+              <a:t>Corellium</a:t>
+            </a:r>
+            <a:r>
+              <a:rPr lang="en-US" b="0" i="0" u="none" strike="noStrike" dirty="0">
+                <a:solidFill>
+                  <a:srgbClr val="000000"/>
+                </a:solidFill>
+                <a:effectLst/>
+              </a:rPr>
+              <a:t> virtual devices configured as rooted Android and jailbroken iOS devices.</a:t>
+            </a:r>
+          </a:p>
+          <a:p>
+            <a:pPr marL="742950" lvl="1" indent="-285750" algn="l">
+              <a:buFont typeface="Arial" panose="020B0604020202020204" pitchFamily="34" charset="0"/>
+              <a:buChar char="•"/>
+            </a:pPr>
+            <a:r>
+              <a:rPr lang="en-US" b="0" i="0" u="none" strike="noStrike" dirty="0">
+                <a:solidFill>
+                  <a:srgbClr val="000000"/>
+                </a:solidFill>
+                <a:effectLst/>
+              </a:rPr>
+              <a:t>Debugging tools available in </a:t>
+            </a:r>
+            <a:r>
+              <a:rPr lang="en-US" b="0" i="0" u="none" strike="noStrike" dirty="0" err="1">
+                <a:solidFill>
+                  <a:srgbClr val="000000"/>
+                </a:solidFill>
+                <a:effectLst/>
+              </a:rPr>
+              <a:t>Corellium</a:t>
+            </a:r>
+            <a:r>
+              <a:rPr lang="en-US" b="0" i="0" u="none" strike="noStrike" dirty="0">
+                <a:solidFill>
+                  <a:srgbClr val="000000"/>
+                </a:solidFill>
+                <a:effectLst/>
+              </a:rPr>
+              <a:t> for testing.</a:t>
+            </a:r>
+          </a:p>
+          <a:p>
+            <a:pPr marL="0" indent="0">
+              <a:buNone/>
+            </a:pPr>
+            <a:endParaRPr lang="en-US" dirty="0"/>
+          </a:p>
+        </p:txBody>
+      </p:sp>
+    </p:spTree>
+    <p:extLst>
+      <p:ext uri="{BB962C8B-B14F-4D97-AF65-F5344CB8AC3E}">
+        <p14:creationId xmlns:p14="http://schemas.microsoft.com/office/powerpoint/2010/main" val="1496681384"/>
+      </p:ext>
+    </p:extLst>
+  </p:cSld>
+  <p:clrMapOvr>
+    <a:masterClrMapping/>
+  </p:clrMapOvr>
+</p:sld>
+</file>
+
+<file path=ppt/slides/slide18.xml><?xml version="1.0" encoding="utf-8"?>
+<p:sld xmlns:a="http://schemas.openxmlformats.org/drawingml/2006/main" xmlns:r="http://schemas.openxmlformats.org/officeDocument/2006/relationships" xmlns:p="http://schemas.openxmlformats.org/presentationml/2006/main">
+  <p:cSld>
+    <p:spTree>
+      <p:nvGrpSpPr>
+        <p:cNvPr id="1" name=""/>
+        <p:cNvGrpSpPr/>
+        <p:nvPr/>
+      </p:nvGrpSpPr>
+      <p:grpSpPr>
+        <a:xfrm>
+          <a:off x="0" y="0"/>
+          <a:ext cx="0" cy="0"/>
+          <a:chOff x="0" y="0"/>
+          <a:chExt cx="0" cy="0"/>
+        </a:xfrm>
+      </p:grpSpPr>
+      <p:sp>
+        <p:nvSpPr>
+          <p:cNvPr id="2" name="Title 1">
+            <a:extLst>
+              <a:ext uri="{FF2B5EF4-FFF2-40B4-BE49-F238E27FC236}">
+                <a16:creationId xmlns:a16="http://schemas.microsoft.com/office/drawing/2014/main" id="{378BD5EA-54EC-7E27-3217-7F19408CE694}"/>
+              </a:ext>
+            </a:extLst>
+          </p:cNvPr>
+          <p:cNvSpPr>
+            <a:spLocks noGrp="1"/>
+          </p:cNvSpPr>
+          <p:nvPr>
+            <p:ph type="title"/>
+          </p:nvPr>
+        </p:nvSpPr>
+        <p:spPr/>
+        <p:txBody>
+          <a:bodyPr/>
+          <a:lstStyle/>
+          <a:p>
+            <a:endParaRPr lang="en-US"/>
+          </a:p>
+        </p:txBody>
+      </p:sp>
+      <p:sp>
+        <p:nvSpPr>
+          <p:cNvPr id="3" name="Content Placeholder 2">
+            <a:extLst>
+              <a:ext uri="{FF2B5EF4-FFF2-40B4-BE49-F238E27FC236}">
+                <a16:creationId xmlns:a16="http://schemas.microsoft.com/office/drawing/2014/main" id="{EBEB27FF-C1D2-BA89-C8D1-15914D5A7741}"/>
+              </a:ext>
+            </a:extLst>
+          </p:cNvPr>
+          <p:cNvSpPr>
+            <a:spLocks noGrp="1"/>
+          </p:cNvSpPr>
+          <p:nvPr>
+            <p:ph idx="1"/>
+          </p:nvPr>
+        </p:nvSpPr>
+        <p:spPr/>
+        <p:txBody>
+          <a:bodyPr/>
+          <a:lstStyle/>
+          <a:p>
+            <a:endParaRPr lang="en-US"/>
+          </a:p>
+        </p:txBody>
+      </p:sp>
+    </p:spTree>
+    <p:extLst>
+      <p:ext uri="{BB962C8B-B14F-4D97-AF65-F5344CB8AC3E}">
+        <p14:creationId xmlns:p14="http://schemas.microsoft.com/office/powerpoint/2010/main" val="61491308"/>
+      </p:ext>
+    </p:extLst>
+  </p:cSld>
+  <p:clrMapOvr>
+    <a:masterClrMapping/>
+  </p:clrMapOvr>
+</p:sld>
+</file>
+
+<file path=ppt/slides/slide19.xml><?xml version="1.0" encoding="utf-8"?>
+<p:sld xmlns:a="http://schemas.openxmlformats.org/drawingml/2006/main" xmlns:r="http://schemas.openxmlformats.org/officeDocument/2006/relationships" xmlns:p="http://schemas.openxmlformats.org/presentationml/2006/main">
+  <p:cSld>
+    <p:spTree>
+      <p:nvGrpSpPr>
+        <p:cNvPr id="1" name=""/>
+        <p:cNvGrpSpPr/>
+        <p:nvPr/>
+      </p:nvGrpSpPr>
+      <p:grpSpPr>
+        <a:xfrm>
+          <a:off x="0" y="0"/>
+          <a:ext cx="0" cy="0"/>
+          <a:chOff x="0" y="0"/>
+          <a:chExt cx="0" cy="0"/>
+        </a:xfrm>
+      </p:grpSpPr>
+      <p:sp>
+        <p:nvSpPr>
+          <p:cNvPr id="2" name="Title 1">
+            <a:extLst>
+              <a:ext uri="{FF2B5EF4-FFF2-40B4-BE49-F238E27FC236}">
+                <a16:creationId xmlns:a16="http://schemas.microsoft.com/office/drawing/2014/main" id="{4E734AA6-05A3-6080-29E1-FBD8D204D2F4}"/>
+              </a:ext>
+            </a:extLst>
+          </p:cNvPr>
+          <p:cNvSpPr>
+            <a:spLocks noGrp="1"/>
+          </p:cNvSpPr>
+          <p:nvPr>
+            <p:ph type="title"/>
+          </p:nvPr>
+        </p:nvSpPr>
+        <p:spPr/>
+        <p:txBody>
+          <a:bodyPr/>
+          <a:lstStyle/>
+          <a:p>
+            <a:endParaRPr lang="en-US"/>
+          </a:p>
+        </p:txBody>
+      </p:sp>
+      <p:sp>
+        <p:nvSpPr>
+          <p:cNvPr id="3" name="Content Placeholder 2">
+            <a:extLst>
+              <a:ext uri="{FF2B5EF4-FFF2-40B4-BE49-F238E27FC236}">
+                <a16:creationId xmlns:a16="http://schemas.microsoft.com/office/drawing/2014/main" id="{5391130B-7981-0338-4D08-9715D3516098}"/>
+              </a:ext>
+            </a:extLst>
+          </p:cNvPr>
+          <p:cNvSpPr>
+            <a:spLocks noGrp="1"/>
+          </p:cNvSpPr>
+          <p:nvPr>
+            <p:ph idx="1"/>
+          </p:nvPr>
+        </p:nvSpPr>
+        <p:spPr/>
+        <p:txBody>
+          <a:bodyPr/>
+          <a:lstStyle/>
+          <a:p>
+            <a:endParaRPr lang="en-US"/>
+          </a:p>
+        </p:txBody>
+      </p:sp>
+    </p:spTree>
+    <p:extLst>
+      <p:ext uri="{BB962C8B-B14F-4D97-AF65-F5344CB8AC3E}">
+        <p14:creationId xmlns:p14="http://schemas.microsoft.com/office/powerpoint/2010/main" val="3757834773"/>
+      </p:ext>
+    </p:extLst>
+  </p:cSld>
+  <p:clrMapOvr>
+    <a:masterClrMapping/>
+  </p:clrMapOvr>
+</p:sld>
+</file>
+
 <file path=ppt/slides/slide2.xml><?xml version="1.0" encoding="utf-8"?>
 <p:sld xmlns:a="http://schemas.openxmlformats.org/drawingml/2006/main" xmlns:r="http://schemas.openxmlformats.org/officeDocument/2006/relationships" xmlns:p="http://schemas.openxmlformats.org/presentationml/2006/main">
   <p:cSld>
@@ -3734,6 +8824,166 @@
     <p:extLst>
       <p:ext uri="{BB962C8B-B14F-4D97-AF65-F5344CB8AC3E}">
         <p14:creationId xmlns:p14="http://schemas.microsoft.com/office/powerpoint/2010/main" val="3900552347"/>
+      </p:ext>
+    </p:extLst>
+  </p:cSld>
+  <p:clrMapOvr>
+    <a:masterClrMapping/>
+  </p:clrMapOvr>
+</p:sld>
+</file>
+
+<file path=ppt/slides/slide20.xml><?xml version="1.0" encoding="utf-8"?>
+<p:sld xmlns:a="http://schemas.openxmlformats.org/drawingml/2006/main" xmlns:r="http://schemas.openxmlformats.org/officeDocument/2006/relationships" xmlns:p="http://schemas.openxmlformats.org/presentationml/2006/main">
+  <p:cSld>
+    <p:spTree>
+      <p:nvGrpSpPr>
+        <p:cNvPr id="1" name=""/>
+        <p:cNvGrpSpPr/>
+        <p:nvPr/>
+      </p:nvGrpSpPr>
+      <p:grpSpPr>
+        <a:xfrm>
+          <a:off x="0" y="0"/>
+          <a:ext cx="0" cy="0"/>
+          <a:chOff x="0" y="0"/>
+          <a:chExt cx="0" cy="0"/>
+        </a:xfrm>
+      </p:grpSpPr>
+      <p:sp>
+        <p:nvSpPr>
+          <p:cNvPr id="2" name="Title 1">
+            <a:extLst>
+              <a:ext uri="{FF2B5EF4-FFF2-40B4-BE49-F238E27FC236}">
+                <a16:creationId xmlns:a16="http://schemas.microsoft.com/office/drawing/2014/main" id="{B4DBFE26-5CCC-ECD3-E044-18A3A9CFE31E}"/>
+              </a:ext>
+            </a:extLst>
+          </p:cNvPr>
+          <p:cNvSpPr>
+            <a:spLocks noGrp="1"/>
+          </p:cNvSpPr>
+          <p:nvPr>
+            <p:ph type="title"/>
+          </p:nvPr>
+        </p:nvSpPr>
+        <p:spPr/>
+        <p:txBody>
+          <a:bodyPr/>
+          <a:lstStyle/>
+          <a:p>
+            <a:endParaRPr lang="en-US"/>
+          </a:p>
+        </p:txBody>
+      </p:sp>
+      <p:sp>
+        <p:nvSpPr>
+          <p:cNvPr id="3" name="Content Placeholder 2">
+            <a:extLst>
+              <a:ext uri="{FF2B5EF4-FFF2-40B4-BE49-F238E27FC236}">
+                <a16:creationId xmlns:a16="http://schemas.microsoft.com/office/drawing/2014/main" id="{9B7A71E4-4759-6A5E-CAEE-643B28855F3F}"/>
+              </a:ext>
+            </a:extLst>
+          </p:cNvPr>
+          <p:cNvSpPr>
+            <a:spLocks noGrp="1"/>
+          </p:cNvSpPr>
+          <p:nvPr>
+            <p:ph idx="1"/>
+          </p:nvPr>
+        </p:nvSpPr>
+        <p:spPr/>
+        <p:txBody>
+          <a:bodyPr/>
+          <a:lstStyle/>
+          <a:p>
+            <a:endParaRPr lang="en-US"/>
+          </a:p>
+        </p:txBody>
+      </p:sp>
+    </p:spTree>
+    <p:extLst>
+      <p:ext uri="{BB962C8B-B14F-4D97-AF65-F5344CB8AC3E}">
+        <p14:creationId xmlns:p14="http://schemas.microsoft.com/office/powerpoint/2010/main" val="1643932734"/>
+      </p:ext>
+    </p:extLst>
+  </p:cSld>
+  <p:clrMapOvr>
+    <a:masterClrMapping/>
+  </p:clrMapOvr>
+</p:sld>
+</file>
+
+<file path=ppt/slides/slide21.xml><?xml version="1.0" encoding="utf-8"?>
+<p:sld xmlns:a="http://schemas.openxmlformats.org/drawingml/2006/main" xmlns:r="http://schemas.openxmlformats.org/officeDocument/2006/relationships" xmlns:p="http://schemas.openxmlformats.org/presentationml/2006/main">
+  <p:cSld>
+    <p:spTree>
+      <p:nvGrpSpPr>
+        <p:cNvPr id="1" name=""/>
+        <p:cNvGrpSpPr/>
+        <p:nvPr/>
+      </p:nvGrpSpPr>
+      <p:grpSpPr>
+        <a:xfrm>
+          <a:off x="0" y="0"/>
+          <a:ext cx="0" cy="0"/>
+          <a:chOff x="0" y="0"/>
+          <a:chExt cx="0" cy="0"/>
+        </a:xfrm>
+      </p:grpSpPr>
+      <p:sp>
+        <p:nvSpPr>
+          <p:cNvPr id="2" name="Title 1">
+            <a:extLst>
+              <a:ext uri="{FF2B5EF4-FFF2-40B4-BE49-F238E27FC236}">
+                <a16:creationId xmlns:a16="http://schemas.microsoft.com/office/drawing/2014/main" id="{34E032F1-DB48-8F11-CA05-D70228037404}"/>
+              </a:ext>
+            </a:extLst>
+          </p:cNvPr>
+          <p:cNvSpPr>
+            <a:spLocks noGrp="1"/>
+          </p:cNvSpPr>
+          <p:nvPr>
+            <p:ph type="title"/>
+          </p:nvPr>
+        </p:nvSpPr>
+        <p:spPr/>
+        <p:txBody>
+          <a:bodyPr/>
+          <a:lstStyle/>
+          <a:p>
+            <a:endParaRPr lang="en-US"/>
+          </a:p>
+        </p:txBody>
+      </p:sp>
+      <p:sp>
+        <p:nvSpPr>
+          <p:cNvPr id="3" name="Content Placeholder 2">
+            <a:extLst>
+              <a:ext uri="{FF2B5EF4-FFF2-40B4-BE49-F238E27FC236}">
+                <a16:creationId xmlns:a16="http://schemas.microsoft.com/office/drawing/2014/main" id="{7A02CD63-524A-6B57-228A-EFA5EB89008F}"/>
+              </a:ext>
+            </a:extLst>
+          </p:cNvPr>
+          <p:cNvSpPr>
+            <a:spLocks noGrp="1"/>
+          </p:cNvSpPr>
+          <p:nvPr>
+            <p:ph idx="1"/>
+          </p:nvPr>
+        </p:nvSpPr>
+        <p:spPr/>
+        <p:txBody>
+          <a:bodyPr/>
+          <a:lstStyle/>
+          <a:p>
+            <a:endParaRPr lang="en-US"/>
+          </a:p>
+        </p:txBody>
+      </p:sp>
+    </p:spTree>
+    <p:extLst>
+      <p:ext uri="{BB962C8B-B14F-4D97-AF65-F5344CB8AC3E}">
+        <p14:creationId xmlns:p14="http://schemas.microsoft.com/office/powerpoint/2010/main" val="4172900672"/>
       </p:ext>
     </p:extLst>
   </p:cSld>
@@ -5204,7 +10454,848 @@
 </p:sld>
 </file>
 
+<file path=ppt/slides/slide9.xml><?xml version="1.0" encoding="utf-8"?>
+<p:sld xmlns:a="http://schemas.openxmlformats.org/drawingml/2006/main" xmlns:r="http://schemas.openxmlformats.org/officeDocument/2006/relationships" xmlns:p="http://schemas.openxmlformats.org/presentationml/2006/main">
+  <p:cSld>
+    <p:spTree>
+      <p:nvGrpSpPr>
+        <p:cNvPr id="1" name=""/>
+        <p:cNvGrpSpPr/>
+        <p:nvPr/>
+      </p:nvGrpSpPr>
+      <p:grpSpPr>
+        <a:xfrm>
+          <a:off x="0" y="0"/>
+          <a:ext cx="0" cy="0"/>
+          <a:chOff x="0" y="0"/>
+          <a:chExt cx="0" cy="0"/>
+        </a:xfrm>
+      </p:grpSpPr>
+      <p:sp>
+        <p:nvSpPr>
+          <p:cNvPr id="2" name="Title 1">
+            <a:extLst>
+              <a:ext uri="{FF2B5EF4-FFF2-40B4-BE49-F238E27FC236}">
+                <a16:creationId xmlns:a16="http://schemas.microsoft.com/office/drawing/2014/main" id="{6E756198-5998-47BA-394F-2B69C369991C}"/>
+              </a:ext>
+            </a:extLst>
+          </p:cNvPr>
+          <p:cNvSpPr>
+            <a:spLocks noGrp="1"/>
+          </p:cNvSpPr>
+          <p:nvPr>
+            <p:ph type="title"/>
+          </p:nvPr>
+        </p:nvSpPr>
+        <p:spPr/>
+        <p:txBody>
+          <a:bodyPr/>
+          <a:lstStyle/>
+          <a:p>
+            <a:r>
+              <a:rPr lang="en-US" b="0" i="0" u="none" strike="noStrike" dirty="0">
+                <a:solidFill>
+                  <a:srgbClr val="000000"/>
+                </a:solidFill>
+                <a:effectLst/>
+                <a:latin typeface="-webkit-standard"/>
+              </a:rPr>
+              <a:t>Check for Proper Logout Mechanism</a:t>
+            </a:r>
+            <a:endParaRPr lang="en-US" dirty="0"/>
+          </a:p>
+        </p:txBody>
+      </p:sp>
+      <p:sp>
+        <p:nvSpPr>
+          <p:cNvPr id="3" name="Content Placeholder 2">
+            <a:extLst>
+              <a:ext uri="{FF2B5EF4-FFF2-40B4-BE49-F238E27FC236}">
+                <a16:creationId xmlns:a16="http://schemas.microsoft.com/office/drawing/2014/main" id="{A961C7C7-87E3-EEC1-FA1B-8EE4DD34A01B}"/>
+              </a:ext>
+            </a:extLst>
+          </p:cNvPr>
+          <p:cNvSpPr>
+            <a:spLocks noGrp="1"/>
+          </p:cNvSpPr>
+          <p:nvPr>
+            <p:ph idx="1"/>
+          </p:nvPr>
+        </p:nvSpPr>
+        <p:spPr>
+          <a:xfrm>
+            <a:off x="838200" y="1512474"/>
+            <a:ext cx="10515600" cy="4351338"/>
+          </a:xfrm>
+        </p:spPr>
+        <p:txBody>
+          <a:bodyPr>
+            <a:normAutofit fontScale="25000" lnSpcReduction="20000"/>
+          </a:bodyPr>
+          <a:lstStyle/>
+          <a:p>
+            <a:pPr marL="0" indent="0" algn="l">
+              <a:buNone/>
+            </a:pPr>
+            <a:r>
+              <a:rPr lang="en-US" b="1" i="0" u="none" strike="noStrike" dirty="0">
+                <a:solidFill>
+                  <a:srgbClr val="000000"/>
+                </a:solidFill>
+                <a:effectLst/>
+              </a:rPr>
+              <a:t>Test Case ID: TC-008</a:t>
+            </a:r>
+          </a:p>
+          <a:p>
+            <a:pPr marL="0" indent="0" algn="l">
+              <a:buNone/>
+            </a:pPr>
+            <a:r>
+              <a:rPr lang="en-US" b="1" i="0" u="none" strike="noStrike" dirty="0">
+                <a:solidFill>
+                  <a:srgbClr val="000000"/>
+                </a:solidFill>
+                <a:effectLst/>
+              </a:rPr>
+              <a:t>Objective:</a:t>
+            </a:r>
+          </a:p>
+          <a:p>
+            <a:pPr marL="514350" indent="-514350" algn="l">
+              <a:buFont typeface="+mj-lt"/>
+              <a:buAutoNum type="arabicPeriod"/>
+            </a:pPr>
+            <a:r>
+              <a:rPr lang="en-US" b="0" i="0" u="none" strike="noStrike" dirty="0">
+                <a:solidFill>
+                  <a:srgbClr val="000000"/>
+                </a:solidFill>
+                <a:effectLst/>
+              </a:rPr>
+              <a:t>To validate that the logout mechanism effectively terminates the user session and prevents unauthorized access to sensitive sections after logging out.</a:t>
+            </a:r>
+          </a:p>
+          <a:p>
+            <a:pPr marL="0" indent="0" algn="l">
+              <a:buNone/>
+            </a:pPr>
+            <a:r>
+              <a:rPr lang="en-US" b="1" i="0" u="none" strike="noStrike" dirty="0">
+                <a:solidFill>
+                  <a:srgbClr val="000000"/>
+                </a:solidFill>
+                <a:effectLst/>
+              </a:rPr>
+              <a:t>Pre-conditions:</a:t>
+            </a:r>
+          </a:p>
+          <a:p>
+            <a:pPr algn="l">
+              <a:buFont typeface="+mj-lt"/>
+              <a:buAutoNum type="arabicPeriod"/>
+            </a:pPr>
+            <a:r>
+              <a:rPr lang="en-US" b="0" i="0" u="none" strike="noStrike" dirty="0">
+                <a:solidFill>
+                  <a:srgbClr val="000000"/>
+                </a:solidFill>
+                <a:effectLst/>
+              </a:rPr>
+              <a:t>APK/AAB/IPA file must be uploaded and installed on the </a:t>
+            </a:r>
+            <a:r>
+              <a:rPr lang="en-US" b="0" i="0" u="none" strike="noStrike" dirty="0" err="1">
+                <a:solidFill>
+                  <a:srgbClr val="000000"/>
+                </a:solidFill>
+                <a:effectLst/>
+              </a:rPr>
+              <a:t>Corellium</a:t>
+            </a:r>
+            <a:r>
+              <a:rPr lang="en-US" b="0" i="0" u="none" strike="noStrike" dirty="0">
+                <a:solidFill>
+                  <a:srgbClr val="000000"/>
+                </a:solidFill>
+                <a:effectLst/>
+              </a:rPr>
+              <a:t> virtual device.</a:t>
+            </a:r>
+          </a:p>
+          <a:p>
+            <a:pPr algn="l">
+              <a:buFont typeface="+mj-lt"/>
+              <a:buAutoNum type="arabicPeriod"/>
+            </a:pPr>
+            <a:r>
+              <a:rPr lang="en-US" b="0" i="0" u="none" strike="noStrike" dirty="0">
+                <a:solidFill>
+                  <a:srgbClr val="000000"/>
+                </a:solidFill>
+                <a:effectLst/>
+              </a:rPr>
+              <a:t>The app should have an active user account for testing.</a:t>
+            </a:r>
+          </a:p>
+          <a:p>
+            <a:pPr algn="l">
+              <a:buFont typeface="+mj-lt"/>
+              <a:buAutoNum type="arabicPeriod"/>
+            </a:pPr>
+            <a:r>
+              <a:rPr lang="en-US" b="0" i="0" u="none" strike="noStrike" dirty="0">
+                <a:solidFill>
+                  <a:srgbClr val="000000"/>
+                </a:solidFill>
+                <a:effectLst/>
+              </a:rPr>
+              <a:t>The app must provide sensitive sections accessible only after logging in.</a:t>
+            </a:r>
+          </a:p>
+          <a:p>
+            <a:pPr marL="0" indent="0" algn="l">
+              <a:buNone/>
+            </a:pPr>
+            <a:r>
+              <a:rPr lang="en-US" b="1" i="0" u="none" strike="noStrike" dirty="0">
+                <a:solidFill>
+                  <a:srgbClr val="000000"/>
+                </a:solidFill>
+                <a:effectLst/>
+              </a:rPr>
+              <a:t>Steps:</a:t>
+            </a:r>
+          </a:p>
+          <a:p>
+            <a:pPr algn="l">
+              <a:buFont typeface="+mj-lt"/>
+              <a:buAutoNum type="arabicPeriod"/>
+            </a:pPr>
+            <a:r>
+              <a:rPr lang="en-US" b="0" i="0" u="none" strike="noStrike" dirty="0">
+                <a:solidFill>
+                  <a:srgbClr val="000000"/>
+                </a:solidFill>
+                <a:effectLst/>
+              </a:rPr>
+              <a:t>Launch the app on the </a:t>
+            </a:r>
+            <a:r>
+              <a:rPr lang="en-US" b="0" i="0" u="none" strike="noStrike" dirty="0" err="1">
+                <a:solidFill>
+                  <a:srgbClr val="000000"/>
+                </a:solidFill>
+                <a:effectLst/>
+              </a:rPr>
+              <a:t>Corellium</a:t>
+            </a:r>
+            <a:r>
+              <a:rPr lang="en-US" b="0" i="0" u="none" strike="noStrike" dirty="0">
+                <a:solidFill>
+                  <a:srgbClr val="000000"/>
+                </a:solidFill>
+                <a:effectLst/>
+              </a:rPr>
+              <a:t> virtual device.</a:t>
+            </a:r>
+          </a:p>
+          <a:p>
+            <a:pPr algn="l">
+              <a:buFont typeface="+mj-lt"/>
+              <a:buAutoNum type="arabicPeriod"/>
+            </a:pPr>
+            <a:r>
+              <a:rPr lang="en-US" b="0" i="0" u="none" strike="noStrike" dirty="0">
+                <a:solidFill>
+                  <a:srgbClr val="000000"/>
+                </a:solidFill>
+                <a:effectLst/>
+              </a:rPr>
+              <a:t>Log in to the app with valid credentials.</a:t>
+            </a:r>
+          </a:p>
+          <a:p>
+            <a:pPr algn="l">
+              <a:buFont typeface="+mj-lt"/>
+              <a:buAutoNum type="arabicPeriod"/>
+            </a:pPr>
+            <a:r>
+              <a:rPr lang="en-US" b="0" i="0" u="none" strike="noStrike" dirty="0">
+                <a:solidFill>
+                  <a:srgbClr val="000000"/>
+                </a:solidFill>
+                <a:effectLst/>
+              </a:rPr>
+              <a:t>Navigate to sensitive sections of the app, such as account details or payment history.</a:t>
+            </a:r>
+          </a:p>
+          <a:p>
+            <a:pPr algn="l">
+              <a:buFont typeface="+mj-lt"/>
+              <a:buAutoNum type="arabicPeriod"/>
+            </a:pPr>
+            <a:r>
+              <a:rPr lang="en-US" b="0" i="0" u="none" strike="noStrike" dirty="0">
+                <a:solidFill>
+                  <a:srgbClr val="000000"/>
+                </a:solidFill>
+                <a:effectLst/>
+              </a:rPr>
+              <a:t>Log out using the provided logout option.</a:t>
+            </a:r>
+          </a:p>
+          <a:p>
+            <a:pPr algn="l">
+              <a:buFont typeface="+mj-lt"/>
+              <a:buAutoNum type="arabicPeriod"/>
+            </a:pPr>
+            <a:r>
+              <a:rPr lang="en-US" b="0" i="0" u="none" strike="noStrike" dirty="0">
+                <a:solidFill>
+                  <a:srgbClr val="000000"/>
+                </a:solidFill>
+                <a:effectLst/>
+              </a:rPr>
+              <a:t>After logging out, attempt to access the previously visited sensitive sections using:</a:t>
+            </a:r>
+          </a:p>
+          <a:p>
+            <a:pPr marL="742950" lvl="1" indent="-285750" algn="l">
+              <a:buFont typeface="+mj-lt"/>
+              <a:buAutoNum type="arabicPeriod"/>
+            </a:pPr>
+            <a:r>
+              <a:rPr lang="en-US" b="0" i="0" u="none" strike="noStrike" dirty="0">
+                <a:solidFill>
+                  <a:srgbClr val="000000"/>
+                </a:solidFill>
+                <a:effectLst/>
+              </a:rPr>
+              <a:t>The back button.</a:t>
+            </a:r>
+          </a:p>
+          <a:p>
+            <a:pPr marL="742950" lvl="1" indent="-285750" algn="l">
+              <a:buFont typeface="+mj-lt"/>
+              <a:buAutoNum type="arabicPeriod"/>
+            </a:pPr>
+            <a:r>
+              <a:rPr lang="en-US" b="0" i="0" u="none" strike="noStrike" dirty="0">
+                <a:solidFill>
+                  <a:srgbClr val="000000"/>
+                </a:solidFill>
+                <a:effectLst/>
+              </a:rPr>
+              <a:t>Any other navigation options available (e.g., deep links, recently opened activities).</a:t>
+            </a:r>
+          </a:p>
+          <a:p>
+            <a:pPr marL="0" indent="0" algn="l">
+              <a:buNone/>
+            </a:pPr>
+            <a:r>
+              <a:rPr lang="en-US" b="1" i="0" u="none" strike="noStrike" dirty="0">
+                <a:solidFill>
+                  <a:srgbClr val="000000"/>
+                </a:solidFill>
+                <a:effectLst/>
+              </a:rPr>
+              <a:t>Expected Results:</a:t>
+            </a:r>
+          </a:p>
+          <a:p>
+            <a:pPr algn="l">
+              <a:buFont typeface="+mj-lt"/>
+              <a:buAutoNum type="arabicPeriod"/>
+            </a:pPr>
+            <a:r>
+              <a:rPr lang="en-US" b="0" i="0" u="none" strike="noStrike" dirty="0">
+                <a:solidFill>
+                  <a:srgbClr val="000000"/>
+                </a:solidFill>
+                <a:effectLst/>
+              </a:rPr>
+              <a:t>The session should be terminated immediately after logout.</a:t>
+            </a:r>
+          </a:p>
+          <a:p>
+            <a:pPr algn="l">
+              <a:buFont typeface="+mj-lt"/>
+              <a:buAutoNum type="arabicPeriod"/>
+            </a:pPr>
+            <a:r>
+              <a:rPr lang="en-US" b="0" i="0" u="none" strike="noStrike" dirty="0">
+                <a:solidFill>
+                  <a:srgbClr val="000000"/>
+                </a:solidFill>
+                <a:effectLst/>
+              </a:rPr>
+              <a:t>Access to sensitive sections should be blocked, and the app should redirect to the login screen.</a:t>
+            </a:r>
+          </a:p>
+          <a:p>
+            <a:pPr algn="l">
+              <a:buFont typeface="+mj-lt"/>
+              <a:buAutoNum type="arabicPeriod"/>
+            </a:pPr>
+            <a:r>
+              <a:rPr lang="en-US" b="0" i="0" u="none" strike="noStrike" dirty="0">
+                <a:solidFill>
+                  <a:srgbClr val="000000"/>
+                </a:solidFill>
+                <a:effectLst/>
+              </a:rPr>
+              <a:t>Session tokens or sensitive data should not persist in storage, preventing re-access.</a:t>
+            </a:r>
+          </a:p>
+          <a:p>
+            <a:pPr marL="0" indent="0" algn="l">
+              <a:buNone/>
+            </a:pPr>
+            <a:r>
+              <a:rPr lang="en-US" b="1" i="0" u="none" strike="noStrike" dirty="0">
+                <a:solidFill>
+                  <a:srgbClr val="000000"/>
+                </a:solidFill>
+                <a:effectLst/>
+              </a:rPr>
+              <a:t>Test Data:</a:t>
+            </a:r>
+          </a:p>
+          <a:p>
+            <a:pPr marL="514350" indent="-514350" algn="l">
+              <a:buFont typeface="+mj-lt"/>
+              <a:buAutoNum type="arabicPeriod"/>
+            </a:pPr>
+            <a:r>
+              <a:rPr lang="en-US" b="0" i="0" u="none" strike="noStrike" dirty="0">
+                <a:solidFill>
+                  <a:srgbClr val="000000"/>
+                </a:solidFill>
+                <a:effectLst/>
+              </a:rPr>
+              <a:t>Test credentials (e.g., username and password).</a:t>
+            </a:r>
+          </a:p>
+          <a:p>
+            <a:pPr marL="514350" indent="-514350" algn="l">
+              <a:buFont typeface="+mj-lt"/>
+              <a:buAutoNum type="arabicPeriod"/>
+            </a:pPr>
+            <a:r>
+              <a:rPr lang="en-US" b="0" i="0" u="none" strike="noStrike" dirty="0">
+                <a:solidFill>
+                  <a:srgbClr val="000000"/>
+                </a:solidFill>
+                <a:effectLst/>
+              </a:rPr>
+              <a:t>Sensitive app sections to test (e.g., account profile, payment details).</a:t>
+            </a:r>
+          </a:p>
+          <a:p>
+            <a:pPr algn="l"/>
+            <a:r>
+              <a:rPr lang="en-US" b="1" i="0" u="none" strike="noStrike" dirty="0">
+                <a:solidFill>
+                  <a:srgbClr val="000000"/>
+                </a:solidFill>
+                <a:effectLst/>
+              </a:rPr>
+              <a:t>Test Environment:</a:t>
+            </a:r>
+          </a:p>
+          <a:p>
+            <a:pPr marL="514350" indent="-514350" algn="l">
+              <a:buFont typeface="+mj-lt"/>
+              <a:buAutoNum type="arabicPeriod"/>
+            </a:pPr>
+            <a:r>
+              <a:rPr lang="en-US" b="0" i="0" u="none" strike="noStrike" dirty="0" err="1">
+                <a:solidFill>
+                  <a:srgbClr val="000000"/>
+                </a:solidFill>
+                <a:effectLst/>
+              </a:rPr>
+              <a:t>Corellium</a:t>
+            </a:r>
+            <a:r>
+              <a:rPr lang="en-US" b="0" i="0" u="none" strike="noStrike" dirty="0">
+                <a:solidFill>
+                  <a:srgbClr val="000000"/>
+                </a:solidFill>
+                <a:effectLst/>
+              </a:rPr>
+              <a:t> virtual device with Android or iOS.</a:t>
+            </a:r>
+          </a:p>
+          <a:p>
+            <a:pPr marL="514350" indent="-514350" algn="l">
+              <a:buFont typeface="+mj-lt"/>
+              <a:buAutoNum type="arabicPeriod"/>
+            </a:pPr>
+            <a:r>
+              <a:rPr lang="en-US" b="0" i="0" u="none" strike="noStrike" dirty="0">
+                <a:solidFill>
+                  <a:srgbClr val="000000"/>
+                </a:solidFill>
+                <a:effectLst/>
+              </a:rPr>
+              <a:t>File system and session inspection tools available in </a:t>
+            </a:r>
+            <a:r>
+              <a:rPr lang="en-US" b="0" i="0" u="none" strike="noStrike" dirty="0" err="1">
+                <a:solidFill>
+                  <a:srgbClr val="000000"/>
+                </a:solidFill>
+                <a:effectLst/>
+              </a:rPr>
+              <a:t>Corellium</a:t>
+            </a:r>
+            <a:r>
+              <a:rPr lang="en-US" b="0" i="0" u="none" strike="noStrike" dirty="0">
+                <a:solidFill>
+                  <a:srgbClr val="000000"/>
+                </a:solidFill>
+                <a:effectLst/>
+              </a:rPr>
+              <a:t> to validate session termination.</a:t>
+            </a:r>
+          </a:p>
+          <a:p>
+            <a:endParaRPr lang="en-US" dirty="0"/>
+          </a:p>
+        </p:txBody>
+      </p:sp>
+    </p:spTree>
+    <p:extLst>
+      <p:ext uri="{BB962C8B-B14F-4D97-AF65-F5344CB8AC3E}">
+        <p14:creationId xmlns:p14="http://schemas.microsoft.com/office/powerpoint/2010/main" val="1642102406"/>
+      </p:ext>
+    </p:extLst>
+  </p:cSld>
+  <p:clrMapOvr>
+    <a:masterClrMapping/>
+  </p:clrMapOvr>
+</p:sld>
+</file>
+
 <file path=ppt/theme/theme1.xml><?xml version="1.0" encoding="utf-8"?>
+<a:theme xmlns:a="http://schemas.openxmlformats.org/drawingml/2006/main" name="Office Theme">
+  <a:themeElements>
+    <a:clrScheme name="Office">
+      <a:dk1>
+        <a:sysClr val="windowText" lastClr="000000"/>
+      </a:dk1>
+      <a:lt1>
+        <a:sysClr val="window" lastClr="FFFFFF"/>
+      </a:lt1>
+      <a:dk2>
+        <a:srgbClr val="0E2841"/>
+      </a:dk2>
+      <a:lt2>
+        <a:srgbClr val="E8E8E8"/>
+      </a:lt2>
+      <a:accent1>
+        <a:srgbClr val="156082"/>
+      </a:accent1>
+      <a:accent2>
+        <a:srgbClr val="E97132"/>
+      </a:accent2>
+      <a:accent3>
+        <a:srgbClr val="196B24"/>
+      </a:accent3>
+      <a:accent4>
+        <a:srgbClr val="0F9ED5"/>
+      </a:accent4>
+      <a:accent5>
+        <a:srgbClr val="A02B93"/>
+      </a:accent5>
+      <a:accent6>
+        <a:srgbClr val="4EA72E"/>
+      </a:accent6>
+      <a:hlink>
+        <a:srgbClr val="467886"/>
+      </a:hlink>
+      <a:folHlink>
+        <a:srgbClr val="96607D"/>
+      </a:folHlink>
+    </a:clrScheme>
+    <a:fontScheme name="Office">
+      <a:majorFont>
+        <a:latin typeface="Aptos Display" panose="02110004020202020204"/>
+        <a:ea typeface=""/>
+        <a:cs typeface=""/>
+        <a:font script="Jpan" typeface="游ゴシック Light"/>
+        <a:font script="Hang" typeface="맑은 고딕"/>
+        <a:font script="Hans" typeface="等线 Light"/>
+        <a:font script="Hant" typeface="新細明體"/>
+        <a:font script="Arab" typeface="Times New Roman"/>
+        <a:font script="Hebr" typeface="Times New Roman"/>
+        <a:font script="Thai" typeface="Angsana New"/>
+        <a:font script="Ethi" typeface="Nyala"/>
+        <a:font script="Beng" typeface="Vrinda"/>
+        <a:font script="Gujr" typeface="Shruti"/>
+        <a:font script="Khmr" typeface="MoolBoran"/>
+        <a:font script="Knda" typeface="Tunga"/>
+        <a:font script="Guru" typeface="Raavi"/>
+        <a:font script="Cans" typeface="Euphemia"/>
+        <a:font script="Cher" typeface="Plantagenet Cherokee"/>
+        <a:font script="Yiii" typeface="Microsoft Yi Baiti"/>
+        <a:font script="Tibt" typeface="Microsoft Himalaya"/>
+        <a:font script="Thaa" typeface="MV Boli"/>
+        <a:font script="Deva" typeface="Mangal"/>
+        <a:font script="Telu" typeface="Gautami"/>
+        <a:font script="Taml" typeface="Latha"/>
+        <a:font script="Syrc" typeface="Estrangelo Edessa"/>
+        <a:font script="Orya" typeface="Kalinga"/>
+        <a:font script="Mlym" typeface="Kartika"/>
+        <a:font script="Laoo" typeface="DokChampa"/>
+        <a:font script="Sinh" typeface="Iskoola Pota"/>
+        <a:font script="Mong" typeface="Mongolian Baiti"/>
+        <a:font script="Viet" typeface="Times New Roman"/>
+        <a:font script="Uigh" typeface="Microsoft Uighur"/>
+        <a:font script="Geor" typeface="Sylfaen"/>
+        <a:font script="Armn" typeface="Arial"/>
+        <a:font script="Bugi" typeface="Leelawadee UI"/>
+        <a:font script="Bopo" typeface="Microsoft JhengHei"/>
+        <a:font script="Java" typeface="Javanese Text"/>
+        <a:font script="Lisu" typeface="Segoe UI"/>
+        <a:font script="Mymr" typeface="Myanmar Text"/>
+        <a:font script="Nkoo" typeface="Ebrima"/>
+        <a:font script="Olck" typeface="Nirmala UI"/>
+        <a:font script="Osma" typeface="Ebrima"/>
+        <a:font script="Phag" typeface="Phagspa"/>
+        <a:font script="Syrn" typeface="Estrangelo Edessa"/>
+        <a:font script="Syrj" typeface="Estrangelo Edessa"/>
+        <a:font script="Syre" typeface="Estrangelo Edessa"/>
+        <a:font script="Sora" typeface="Nirmala UI"/>
+        <a:font script="Tale" typeface="Microsoft Tai Le"/>
+        <a:font script="Talu" typeface="Microsoft New Tai Lue"/>
+        <a:font script="Tfng" typeface="Ebrima"/>
+      </a:majorFont>
+      <a:minorFont>
+        <a:latin typeface="Aptos" panose="02110004020202020204"/>
+        <a:ea typeface=""/>
+        <a:cs typeface=""/>
+        <a:font script="Jpan" typeface="游ゴシック"/>
+        <a:font script="Hang" typeface="맑은 고딕"/>
+        <a:font script="Hans" typeface="等线"/>
+        <a:font script="Hant" typeface="新細明體"/>
+        <a:font script="Arab" typeface="Arial"/>
+        <a:font script="Hebr" typeface="Arial"/>
+        <a:font script="Thai" typeface="Cordia New"/>
+        <a:font script="Ethi" typeface="Nyala"/>
+        <a:font script="Beng" typeface="Vrinda"/>
+        <a:font script="Gujr" typeface="Shruti"/>
+        <a:font script="Khmr" typeface="DaunPenh"/>
+        <a:font script="Knda" typeface="Tunga"/>
+        <a:font script="Guru" typeface="Raavi"/>
+        <a:font script="Cans" typeface="Euphemia"/>
+        <a:font script="Cher" typeface="Plantagenet Cherokee"/>
+        <a:font script="Yiii" typeface="Microsoft Yi Baiti"/>
+        <a:font script="Tibt" typeface="Microsoft Himalaya"/>
+        <a:font script="Thaa" typeface="MV Boli"/>
+        <a:font script="Deva" typeface="Mangal"/>
+        <a:font script="Telu" typeface="Gautami"/>
+        <a:font script="Taml" typeface="Latha"/>
+        <a:font script="Syrc" typeface="Estrangelo Edessa"/>
+        <a:font script="Orya" typeface="Kalinga"/>
+        <a:font script="Mlym" typeface="Kartika"/>
+        <a:font script="Laoo" typeface="DokChampa"/>
+        <a:font script="Sinh" typeface="Iskoola Pota"/>
+        <a:font script="Mong" typeface="Mongolian Baiti"/>
+        <a:font script="Viet" typeface="Arial"/>
+        <a:font script="Uigh" typeface="Microsoft Uighur"/>
+        <a:font script="Geor" typeface="Sylfaen"/>
+        <a:font script="Armn" typeface="Arial"/>
+        <a:font script="Bugi" typeface="Leelawadee UI"/>
+        <a:font script="Bopo" typeface="Microsoft JhengHei"/>
+        <a:font script="Java" typeface="Javanese Text"/>
+        <a:font script="Lisu" typeface="Segoe UI"/>
+        <a:font script="Mymr" typeface="Myanmar Text"/>
+        <a:font script="Nkoo" typeface="Ebrima"/>
+        <a:font script="Olck" typeface="Nirmala UI"/>
+        <a:font script="Osma" typeface="Ebrima"/>
+        <a:font script="Phag" typeface="Phagspa"/>
+        <a:font script="Syrn" typeface="Estrangelo Edessa"/>
+        <a:font script="Syrj" typeface="Estrangelo Edessa"/>
+        <a:font script="Syre" typeface="Estrangelo Edessa"/>
+        <a:font script="Sora" typeface="Nirmala UI"/>
+        <a:font script="Tale" typeface="Microsoft Tai Le"/>
+        <a:font script="Talu" typeface="Microsoft New Tai Lue"/>
+        <a:font script="Tfng" typeface="Ebrima"/>
+      </a:minorFont>
+    </a:fontScheme>
+    <a:fmtScheme name="Office">
+      <a:fillStyleLst>
+        <a:solidFill>
+          <a:schemeClr val="phClr"/>
+        </a:solidFill>
+        <a:gradFill rotWithShape="1">
+          <a:gsLst>
+            <a:gs pos="0">
+              <a:schemeClr val="phClr">
+                <a:lumMod val="110000"/>
+                <a:satMod val="105000"/>
+                <a:tint val="67000"/>
+              </a:schemeClr>
+            </a:gs>
+            <a:gs pos="50000">
+              <a:schemeClr val="phClr">
+                <a:lumMod val="105000"/>
+                <a:satMod val="103000"/>
+                <a:tint val="73000"/>
+              </a:schemeClr>
+            </a:gs>
+            <a:gs pos="100000">
+              <a:schemeClr val="phClr">
+                <a:lumMod val="105000"/>
+                <a:satMod val="109000"/>
+                <a:tint val="81000"/>
+              </a:schemeClr>
+            </a:gs>
+          </a:gsLst>
+          <a:lin ang="5400000" scaled="0"/>
+        </a:gradFill>
+        <a:gradFill rotWithShape="1">
+          <a:gsLst>
+            <a:gs pos="0">
+              <a:schemeClr val="phClr">
+                <a:satMod val="103000"/>
+                <a:lumMod val="102000"/>
+                <a:tint val="94000"/>
+              </a:schemeClr>
+            </a:gs>
+            <a:gs pos="50000">
+              <a:schemeClr val="phClr">
+                <a:satMod val="110000"/>
+                <a:lumMod val="100000"/>
+                <a:shade val="100000"/>
+              </a:schemeClr>
+            </a:gs>
+            <a:gs pos="100000">
+              <a:schemeClr val="phClr">
+                <a:lumMod val="99000"/>
+                <a:satMod val="120000"/>
+                <a:shade val="78000"/>
+              </a:schemeClr>
+            </a:gs>
+          </a:gsLst>
+          <a:lin ang="5400000" scaled="0"/>
+        </a:gradFill>
+      </a:fillStyleLst>
+      <a:lnStyleLst>
+        <a:ln w="12700" cap="flat" cmpd="sng" algn="ctr">
+          <a:solidFill>
+            <a:schemeClr val="phClr"/>
+          </a:solidFill>
+          <a:prstDash val="solid"/>
+          <a:miter lim="800000"/>
+        </a:ln>
+        <a:ln w="19050" cap="flat" cmpd="sng" algn="ctr">
+          <a:solidFill>
+            <a:schemeClr val="phClr"/>
+          </a:solidFill>
+          <a:prstDash val="solid"/>
+          <a:miter lim="800000"/>
+        </a:ln>
+        <a:ln w="25400" cap="flat" cmpd="sng" algn="ctr">
+          <a:solidFill>
+            <a:schemeClr val="phClr"/>
+          </a:solidFill>
+          <a:prstDash val="solid"/>
+          <a:miter lim="800000"/>
+        </a:ln>
+      </a:lnStyleLst>
+      <a:effectStyleLst>
+        <a:effectStyle>
+          <a:effectLst/>
+        </a:effectStyle>
+        <a:effectStyle>
+          <a:effectLst/>
+        </a:effectStyle>
+        <a:effectStyle>
+          <a:effectLst>
+            <a:outerShdw blurRad="57150" dist="19050" dir="5400000" algn="ctr" rotWithShape="0">
+              <a:srgbClr val="000000">
+                <a:alpha val="63000"/>
+              </a:srgbClr>
+            </a:outerShdw>
+          </a:effectLst>
+        </a:effectStyle>
+      </a:effectStyleLst>
+      <a:bgFillStyleLst>
+        <a:solidFill>
+          <a:schemeClr val="phClr"/>
+        </a:solidFill>
+        <a:solidFill>
+          <a:schemeClr val="phClr">
+            <a:tint val="95000"/>
+            <a:satMod val="170000"/>
+          </a:schemeClr>
+        </a:solidFill>
+        <a:gradFill rotWithShape="1">
+          <a:gsLst>
+            <a:gs pos="0">
+              <a:schemeClr val="phClr">
+                <a:tint val="93000"/>
+                <a:satMod val="150000"/>
+                <a:shade val="98000"/>
+                <a:lumMod val="102000"/>
+              </a:schemeClr>
+            </a:gs>
+            <a:gs pos="50000">
+              <a:schemeClr val="phClr">
+                <a:tint val="98000"/>
+                <a:satMod val="130000"/>
+                <a:shade val="90000"/>
+                <a:lumMod val="103000"/>
+              </a:schemeClr>
+            </a:gs>
+            <a:gs pos="100000">
+              <a:schemeClr val="phClr">
+                <a:shade val="63000"/>
+                <a:satMod val="120000"/>
+              </a:schemeClr>
+            </a:gs>
+          </a:gsLst>
+          <a:lin ang="5400000" scaled="0"/>
+        </a:gradFill>
+      </a:bgFillStyleLst>
+    </a:fmtScheme>
+  </a:themeElements>
+  <a:objectDefaults>
+    <a:lnDef>
+      <a:spPr/>
+      <a:bodyPr/>
+      <a:lstStyle/>
+      <a:style>
+        <a:lnRef idx="2">
+          <a:schemeClr val="accent1"/>
+        </a:lnRef>
+        <a:fillRef idx="0">
+          <a:schemeClr val="accent1"/>
+        </a:fillRef>
+        <a:effectRef idx="1">
+          <a:schemeClr val="accent1"/>
+        </a:effectRef>
+        <a:fontRef idx="minor">
+          <a:schemeClr val="tx1"/>
+        </a:fontRef>
+      </a:style>
+    </a:lnDef>
+  </a:objectDefaults>
+  <a:extraClrSchemeLst/>
+  <a:extLst>
+    <a:ext uri="{05A4C25C-085E-4340-85A3-A5531E510DB2}">
+      <thm15:themeFamily xmlns:thm15="http://schemas.microsoft.com/office/thememl/2012/main" name="Office Theme" id="{2E142A2C-CD16-42D6-873A-C26D2A0506FA}" vid="{1BDDFF52-6CD6-40A5-AB3C-68EB2F1E4D0A}"/>
+    </a:ext>
+  </a:extLst>
+</a:theme>
+</file>
+
+<file path=ppt/theme/theme2.xml><?xml version="1.0" encoding="utf-8"?>
 <a:theme xmlns:a="http://schemas.openxmlformats.org/drawingml/2006/main" name="Office Theme">
   <a:themeElements>
     <a:clrScheme name="Office">
